--- a/Ildiz_kanalini_plombalash_taqdimot.pptx
+++ b/Ildiz_kanalini_plombalash_taqdimot.pptx
@@ -3254,7 +3254,7 @@
                 <a:solidFill>
                   <a:srgbClr val="9EB8D0"/>
                 </a:solidFill>
-                <a:latin typeface="Calibri"/>
+                <a:latin typeface="Times New Roman"/>
               </a:defRPr>
             </a:pPr>
             <a:r>
@@ -3290,7 +3290,7 @@
                 <a:solidFill>
                   <a:srgbClr val="FFFFFF"/>
                 </a:solidFill>
-                <a:latin typeface="Calibri"/>
+                <a:latin typeface="Times New Roman"/>
               </a:defRPr>
             </a:pPr>
             <a:r>
@@ -3326,11 +3326,11 @@
                 <a:solidFill>
                   <a:srgbClr val="C9E4DD"/>
                 </a:solidFill>
-                <a:latin typeface="Calibri"/>
+                <a:latin typeface="Times New Roman"/>
               </a:defRPr>
             </a:pPr>
             <a:r>
-              <a:t>3D obturatsiya</a:t>
+              <a:t>Uch o'lchamli obturatsiya</a:t>
             </a:r>
             <a:br/>
             <a:r>
@@ -3366,7 +3366,7 @@
                 <a:solidFill>
                   <a:srgbClr val="FFD27A"/>
                 </a:solidFill>
-                <a:latin typeface="Calibri"/>
+                <a:latin typeface="Times New Roman"/>
               </a:defRPr>
             </a:pPr>
             <a:r>
@@ -3402,7 +3402,7 @@
                 <a:solidFill>
                   <a:srgbClr val="00BFA6"/>
                 </a:solidFill>
-                <a:latin typeface="Calibri"/>
+                <a:latin typeface="Times New Roman"/>
               </a:defRPr>
             </a:pPr>
             <a:r>
@@ -3438,7 +3438,7 @@
                 <a:solidFill>
                   <a:srgbClr val="FFFFFF"/>
                 </a:solidFill>
-                <a:latin typeface="Calibri Light"/>
+                <a:latin typeface="Times New Roman"/>
               </a:defRPr>
             </a:pPr>
             <a:r>
@@ -3517,7 +3517,7 @@
                 <a:solidFill>
                   <a:srgbClr val="C9E4DD"/>
                 </a:solidFill>
-                <a:latin typeface="Calibri"/>
+                <a:latin typeface="Times New Roman"/>
               </a:defRPr>
             </a:pPr>
             <a:r>
@@ -3573,7 +3573,7 @@
                 <a:solidFill>
                   <a:srgbClr val="FFFFFF"/>
                 </a:solidFill>
-                <a:latin typeface="Calibri"/>
+                <a:latin typeface="Times New Roman"/>
               </a:rPr>
               <a:t>20 slayd</a:t>
             </a:r>
@@ -3627,7 +3627,7 @@
                 <a:solidFill>
                   <a:srgbClr val="FFFFFF"/>
                 </a:solidFill>
-                <a:latin typeface="Calibri"/>
+                <a:latin typeface="Times New Roman"/>
               </a:rPr>
               <a:t>Ilmiy taqdimot</a:t>
             </a:r>
@@ -3681,7 +3681,7 @@
                 <a:solidFill>
                   <a:srgbClr val="FFFFFF"/>
                 </a:solidFill>
-                <a:latin typeface="Calibri"/>
+                <a:latin typeface="Times New Roman"/>
               </a:rPr>
               <a:t>2026</a:t>
             </a:r>
@@ -3715,7 +3715,7 @@
                 <a:solidFill>
                   <a:srgbClr val="5A6D80"/>
                 </a:solidFill>
-                <a:latin typeface="Calibri"/>
+                <a:latin typeface="Times New Roman"/>
               </a:defRPr>
             </a:pPr>
             <a:r>
@@ -3751,7 +3751,7 @@
                 <a:solidFill>
                   <a:srgbClr val="7E93A8"/>
                 </a:solidFill>
-                <a:latin typeface="Calibri"/>
+                <a:latin typeface="Times New Roman"/>
               </a:defRPr>
             </a:pPr>
             <a:r>
@@ -3917,7 +3917,7 @@
                 <a:solidFill>
                   <a:srgbClr val="FFFFFF"/>
                 </a:solidFill>
-                <a:latin typeface="Calibri"/>
+                <a:latin typeface="Times New Roman"/>
               </a:rPr>
               <a:t>10</a:t>
             </a:r>
@@ -3951,7 +3951,7 @@
                 <a:solidFill>
                   <a:srgbClr val="00BFA6"/>
                 </a:solidFill>
-                <a:latin typeface="Calibri"/>
+                <a:latin typeface="Times New Roman"/>
               </a:defRPr>
             </a:pPr>
             <a:r>
@@ -3987,7 +3987,7 @@
                 <a:solidFill>
                   <a:srgbClr val="FFFFFF"/>
                 </a:solidFill>
-                <a:latin typeface="Calibri Light"/>
+                <a:latin typeface="Times New Roman"/>
               </a:defRPr>
             </a:pPr>
             <a:r>
@@ -4023,7 +4023,7 @@
                 <a:solidFill>
                   <a:srgbClr val="5A6D80"/>
                 </a:solidFill>
-                <a:latin typeface="Calibri"/>
+                <a:latin typeface="Times New Roman"/>
               </a:defRPr>
             </a:pPr>
             <a:r>
@@ -4059,7 +4059,7 @@
                 <a:solidFill>
                   <a:srgbClr val="5A6D80"/>
                 </a:solidFill>
-                <a:latin typeface="Calibri"/>
+                <a:latin typeface="Times New Roman"/>
               </a:defRPr>
             </a:pPr>
             <a:r>
@@ -4226,7 +4226,7 @@
                 <a:solidFill>
                   <a:srgbClr val="0B2C4A"/>
                 </a:solidFill>
-                <a:latin typeface="Calibri"/>
+                <a:latin typeface="Times New Roman"/>
               </a:defRPr>
             </a:pPr>
             <a:r>
@@ -4259,7 +4259,7 @@
           <a:p>
             <a:pPr>
               <a:lnSpc>
-                <a:spcPct val="115000"/>
+                <a:spcPct val="112000"/>
               </a:lnSpc>
               <a:spcBef>
                 <a:spcPts val="100"/>
@@ -4273,7 +4273,7 @@
                 <a:solidFill>
                   <a:srgbClr val="009E8A"/>
                 </a:solidFill>
-                <a:latin typeface="Calibri"/>
+                <a:latin typeface="Times New Roman"/>
               </a:rPr>
               <a:t>▸  </a:t>
             </a:r>
@@ -4282,7 +4282,7 @@
                 <a:solidFill>
                   <a:srgbClr val="1A2B3C"/>
                 </a:solidFill>
-                <a:latin typeface="Calibri"/>
+                <a:latin typeface="Times New Roman"/>
               </a:rPr>
               <a:t>Ta'rif: </a:t>
             </a:r>
@@ -4291,15 +4291,15 @@
                 <a:solidFill>
                   <a:srgbClr val="1A2B3C"/>
                 </a:solidFill>
-                <a:latin typeface="Calibri"/>
+                <a:latin typeface="Times New Roman"/>
               </a:rPr>
-              <a:t>gutta-percha (o'zak) bilan kanal devori orasidagi mikrobo'shliqni to'ldirib, qotib germetik qatlam hosil qiladi.</a:t>
+              <a:t>qattiq o'zak (gutta-percha) bilan kanal devori orasidagi mikroskopik tirqishlarni to'ldirib, qotgandan so'ng germetik qatlam hosil qiluvchi malham.</a:t>
             </a:r>
           </a:p>
           <a:p>
             <a:pPr>
               <a:lnSpc>
-                <a:spcPct val="115000"/>
+                <a:spcPct val="112000"/>
               </a:lnSpc>
               <a:spcBef>
                 <a:spcPts val="100"/>
@@ -4313,7 +4313,7 @@
                 <a:solidFill>
                   <a:srgbClr val="009E8A"/>
                 </a:solidFill>
-                <a:latin typeface="Calibri"/>
+                <a:latin typeface="Times New Roman"/>
               </a:rPr>
               <a:t>▸  </a:t>
             </a:r>
@@ -4322,24 +4322,24 @@
                 <a:solidFill>
                   <a:srgbClr val="1A2B3C"/>
                 </a:solidFill>
-                <a:latin typeface="Calibri"/>
+                <a:latin typeface="Times New Roman"/>
               </a:rPr>
-              <a:t>Funksiyalari: </a:t>
+              <a:t>Vazifalari: </a:t>
             </a:r>
             <a:r>
               <a:rPr sz="1100">
                 <a:solidFill>
                   <a:srgbClr val="1A2B3C"/>
                 </a:solidFill>
-                <a:latin typeface="Calibri"/>
+                <a:latin typeface="Times New Roman"/>
               </a:rPr>
-              <a:t>mikrosızıntını yo'qotish, lateral kanallarni to'ldirish, o'zakni dentinga sementlash.</a:t>
+              <a:t>mikrooqishning oldini olish, yon kanallarni to'ldirish, o'zakni dentinga mahkamlash.</a:t>
             </a:r>
           </a:p>
           <a:p>
             <a:pPr>
               <a:lnSpc>
-                <a:spcPct val="115000"/>
+                <a:spcPct val="112000"/>
               </a:lnSpc>
               <a:spcBef>
                 <a:spcPts val="100"/>
@@ -4353,7 +4353,7 @@
                 <a:solidFill>
                   <a:srgbClr val="009E8A"/>
                 </a:solidFill>
-                <a:latin typeface="Calibri"/>
+                <a:latin typeface="Times New Roman"/>
               </a:rPr>
               <a:t>▸  </a:t>
             </a:r>
@@ -4362,7 +4362,7 @@
                 <a:solidFill>
                   <a:srgbClr val="1A2B3C"/>
                 </a:solidFill>
-                <a:latin typeface="Calibri"/>
+                <a:latin typeface="Times New Roman"/>
               </a:rPr>
               <a:t>Ideal qatlam — </a:t>
             </a:r>
@@ -4371,15 +4371,15 @@
                 <a:solidFill>
                   <a:srgbClr val="1A2B3C"/>
                 </a:solidFill>
-                <a:latin typeface="Calibri"/>
+                <a:latin typeface="Times New Roman"/>
               </a:rPr>
-              <a:t>25–50 mkm: qancha yupqa bo'lsa, qisqarish va erish xavfi shuncha kam.</a:t>
+              <a:t>25–50 µm: qatlam qanchalik yupqa bo'lsa, qisqarish va erish xavfi shunchalik kam.</a:t>
             </a:r>
           </a:p>
           <a:p>
             <a:pPr>
               <a:lnSpc>
-                <a:spcPct val="115000"/>
+                <a:spcPct val="112000"/>
               </a:lnSpc>
               <a:spcBef>
                 <a:spcPts val="100"/>
@@ -4393,7 +4393,7 @@
                 <a:solidFill>
                   <a:srgbClr val="009E8A"/>
                 </a:solidFill>
-                <a:latin typeface="Calibri"/>
+                <a:latin typeface="Times New Roman"/>
               </a:rPr>
               <a:t>▸  </a:t>
             </a:r>
@@ -4402,7 +4402,7 @@
                 <a:solidFill>
                   <a:srgbClr val="1A2B3C"/>
                 </a:solidFill>
-                <a:latin typeface="Calibri"/>
+                <a:latin typeface="Times New Roman"/>
               </a:rPr>
               <a:t>Standart: </a:t>
             </a:r>
@@ -4411,15 +4411,15 @@
                 <a:solidFill>
                   <a:srgbClr val="1A2B3C"/>
                 </a:solidFill>
-                <a:latin typeface="Calibri"/>
+                <a:latin typeface="Times New Roman"/>
               </a:rPr>
-              <a:t>ISO 6876 talablariga (oqim, plyonka, eruvchanlik, kontrast) javob berishi shart.</a:t>
+              <a:t>ISO 6876 talablariga (oquvchanlik, parda qalinligi, eruvchanlik, kontrast) javob berishi shart.</a:t>
             </a:r>
           </a:p>
           <a:p>
             <a:pPr>
               <a:lnSpc>
-                <a:spcPct val="115000"/>
+                <a:spcPct val="112000"/>
               </a:lnSpc>
               <a:spcBef>
                 <a:spcPts val="100"/>
@@ -4433,7 +4433,7 @@
                 <a:solidFill>
                   <a:srgbClr val="009E8A"/>
                 </a:solidFill>
-                <a:latin typeface="Calibri"/>
+                <a:latin typeface="Times New Roman"/>
               </a:rPr>
               <a:t>▸  </a:t>
             </a:r>
@@ -4442,18 +4442,18 @@
                 <a:solidFill>
                   <a:srgbClr val="1A2B3C"/>
                 </a:solidFill>
-                <a:latin typeface="Calibri"/>
+                <a:latin typeface="Times New Roman"/>
               </a:rPr>
-              <a:t>Tanlov mezonlari: </a:t>
+              <a:t>Tanlash mezonlari: </a:t>
             </a:r>
             <a:r>
               <a:rPr sz="1100">
                 <a:solidFill>
                   <a:srgbClr val="1A2B3C"/>
                 </a:solidFill>
-                <a:latin typeface="Calibri"/>
+                <a:latin typeface="Times New Roman"/>
               </a:rPr>
-              <a:t>biokompatibilik, qisqarish, eruvchanlik, kontrast, retreatment imkoniyati.</a:t>
+              <a:t>biomuvofiqlik, qisqarish darajasi, eruvchanlik, rentgenkontrastlilik, qayta davolash imkoniyati.</a:t>
             </a:r>
           </a:p>
         </p:txBody>
@@ -4573,7 +4573,7 @@
                 <a:solidFill>
                   <a:srgbClr val="00BFA6"/>
                 </a:solidFill>
-                <a:latin typeface="Calibri"/>
+                <a:latin typeface="Times New Roman"/>
               </a:defRPr>
             </a:pPr>
             <a:r>
@@ -4627,7 +4627,7 @@
                 <a:solidFill>
                   <a:srgbClr val="FFFFFF"/>
                 </a:solidFill>
-                <a:latin typeface="Calibri"/>
+                <a:latin typeface="Times New Roman"/>
               </a:rPr>
               <a:t>I</a:t>
             </a:r>
@@ -4661,11 +4661,11 @@
                 <a:solidFill>
                   <a:srgbClr val="FFFFFF"/>
                 </a:solidFill>
-                <a:latin typeface="Calibri"/>
+                <a:latin typeface="Times New Roman"/>
               </a:defRPr>
             </a:pPr>
             <a:r>
-              <a:t>ZOE asoslilar</a:t>
+              <a:t>Rux oksidi-evgenollilar</a:t>
             </a:r>
           </a:p>
         </p:txBody>
@@ -4697,7 +4697,7 @@
                 <a:solidFill>
                   <a:srgbClr val="9EB8D0"/>
                 </a:solidFill>
-                <a:latin typeface="Calibri"/>
+                <a:latin typeface="Times New Roman"/>
               </a:defRPr>
             </a:pPr>
             <a:r>
@@ -4751,7 +4751,7 @@
                 <a:solidFill>
                   <a:srgbClr val="FFFFFF"/>
                 </a:solidFill>
-                <a:latin typeface="Calibri"/>
+                <a:latin typeface="Times New Roman"/>
               </a:rPr>
               <a:t>II</a:t>
             </a:r>
@@ -4785,11 +4785,11 @@
                 <a:solidFill>
                   <a:srgbClr val="FFFFFF"/>
                 </a:solidFill>
-                <a:latin typeface="Calibri"/>
+                <a:latin typeface="Times New Roman"/>
               </a:defRPr>
             </a:pPr>
             <a:r>
-              <a:t>Ca(OH)₂ + GIC + silikon</a:t>
+              <a:t>Ca(OH)₂ + shishaionomer + silikon</a:t>
             </a:r>
           </a:p>
         </p:txBody>
@@ -4821,7 +4821,7 @@
                 <a:solidFill>
                   <a:srgbClr val="9EB8D0"/>
                 </a:solidFill>
-                <a:latin typeface="Calibri"/>
+                <a:latin typeface="Times New Roman"/>
               </a:defRPr>
             </a:pPr>
             <a:r>
@@ -4875,7 +4875,7 @@
                 <a:solidFill>
                   <a:srgbClr val="FFFFFF"/>
                 </a:solidFill>
-                <a:latin typeface="Calibri"/>
+                <a:latin typeface="Times New Roman"/>
               </a:rPr>
               <a:t>III</a:t>
             </a:r>
@@ -4909,11 +4909,11 @@
                 <a:solidFill>
                   <a:srgbClr val="FFFFFF"/>
                 </a:solidFill>
-                <a:latin typeface="Calibri"/>
+                <a:latin typeface="Times New Roman"/>
               </a:defRPr>
             </a:pPr>
             <a:r>
-              <a:t>Epoksi-rezin</a:t>
+              <a:t>Epoksid smolali</a:t>
             </a:r>
           </a:p>
         </p:txBody>
@@ -4945,7 +4945,7 @@
                 <a:solidFill>
                   <a:srgbClr val="9EB8D0"/>
                 </a:solidFill>
-                <a:latin typeface="Calibri"/>
+                <a:latin typeface="Times New Roman"/>
               </a:defRPr>
             </a:pPr>
             <a:r>
@@ -4999,7 +4999,7 @@
                 <a:solidFill>
                   <a:srgbClr val="FFFFFF"/>
                 </a:solidFill>
-                <a:latin typeface="Calibri"/>
+                <a:latin typeface="Times New Roman"/>
               </a:rPr>
               <a:t>IV</a:t>
             </a:r>
@@ -5033,7 +5033,7 @@
                 <a:solidFill>
                   <a:srgbClr val="FFFFFF"/>
                 </a:solidFill>
-                <a:latin typeface="Calibri"/>
+                <a:latin typeface="Times New Roman"/>
               </a:defRPr>
             </a:pPr>
             <a:r>
@@ -5069,7 +5069,7 @@
                 <a:solidFill>
                   <a:srgbClr val="9EB8D0"/>
                 </a:solidFill>
-                <a:latin typeface="Calibri"/>
+                <a:latin typeface="Times New Roman"/>
               </a:defRPr>
             </a:pPr>
             <a:r>
@@ -5235,7 +5235,7 @@
                 <a:solidFill>
                   <a:srgbClr val="FFFFFF"/>
                 </a:solidFill>
-                <a:latin typeface="Calibri"/>
+                <a:latin typeface="Times New Roman"/>
               </a:rPr>
               <a:t>11</a:t>
             </a:r>
@@ -5269,7 +5269,7 @@
                 <a:solidFill>
                   <a:srgbClr val="00BFA6"/>
                 </a:solidFill>
-                <a:latin typeface="Calibri"/>
+                <a:latin typeface="Times New Roman"/>
               </a:defRPr>
             </a:pPr>
             <a:r>
@@ -5305,11 +5305,11 @@
                 <a:solidFill>
                   <a:srgbClr val="FFFFFF"/>
                 </a:solidFill>
-                <a:latin typeface="Calibri Light"/>
+                <a:latin typeface="Times New Roman"/>
               </a:defRPr>
             </a:pPr>
             <a:r>
-              <a:t>ZOE va kalsiy gidroksidli sealerlar (I–II avlod)</a:t>
+              <a:t>Rux oksidi-evgenolli va kalsiy gidroksidli sealerlar (I–II avlod)</a:t>
             </a:r>
           </a:p>
         </p:txBody>
@@ -5341,7 +5341,7 @@
                 <a:solidFill>
                   <a:srgbClr val="5A6D80"/>
                 </a:solidFill>
-                <a:latin typeface="Calibri"/>
+                <a:latin typeface="Times New Roman"/>
               </a:defRPr>
             </a:pPr>
             <a:r>
@@ -5377,7 +5377,7 @@
                 <a:solidFill>
                   <a:srgbClr val="5A6D80"/>
                 </a:solidFill>
-                <a:latin typeface="Calibri"/>
+                <a:latin typeface="Times New Roman"/>
               </a:defRPr>
             </a:pPr>
             <a:r>
@@ -5587,11 +5587,11 @@
                 <a:solidFill>
                   <a:srgbClr val="FFFFFF"/>
                 </a:solidFill>
-                <a:latin typeface="Calibri"/>
+                <a:latin typeface="Times New Roman"/>
               </a:defRPr>
             </a:pPr>
             <a:r>
-              <a:t>Sink-oksid evgenolli (ZOE) sealerlar</a:t>
+              <a:t>Rux oksidi-evgenolli (ZOE) sealerlar</a:t>
             </a:r>
           </a:p>
         </p:txBody>
@@ -5623,7 +5623,7 @@
                 <a:solidFill>
                   <a:srgbClr val="5A6D80"/>
                 </a:solidFill>
-                <a:latin typeface="Calibri"/>
+                <a:latin typeface="Times New Roman"/>
               </a:defRPr>
             </a:pPr>
             <a:r>
@@ -5656,7 +5656,7 @@
           <a:p>
             <a:pPr>
               <a:lnSpc>
-                <a:spcPct val="115000"/>
+                <a:spcPct val="112000"/>
               </a:lnSpc>
               <a:spcBef>
                 <a:spcPts val="100"/>
@@ -5670,7 +5670,7 @@
                 <a:solidFill>
                   <a:srgbClr val="C98A12"/>
                 </a:solidFill>
-                <a:latin typeface="Calibri"/>
+                <a:latin typeface="Times New Roman"/>
               </a:rPr>
               <a:t>+  </a:t>
             </a:r>
@@ -5679,24 +5679,24 @@
                 <a:solidFill>
                   <a:srgbClr val="1A2B3C"/>
                 </a:solidFill>
-                <a:latin typeface="Calibri"/>
+                <a:latin typeface="Times New Roman"/>
               </a:rPr>
-              <a:t>Afzallik: </a:t>
+              <a:t>Afzalliklari: </a:t>
             </a:r>
             <a:r>
               <a:rPr sz="1100">
                 <a:solidFill>
                   <a:srgbClr val="1A2B3C"/>
                 </a:solidFill>
-                <a:latin typeface="Calibri"/>
+                <a:latin typeface="Times New Roman"/>
               </a:rPr>
-              <a:t>arzon, uzoq klinik tajriba, yaxshi plastiklik</a:t>
+              <a:t>arzon, ko'p yillik klinik tajriba, qo'llash oson</a:t>
             </a:r>
           </a:p>
           <a:p>
             <a:pPr>
               <a:lnSpc>
-                <a:spcPct val="115000"/>
+                <a:spcPct val="112000"/>
               </a:lnSpc>
               <a:spcBef>
                 <a:spcPts val="100"/>
@@ -5710,7 +5710,7 @@
                 <a:solidFill>
                   <a:srgbClr val="C98A12"/>
                 </a:solidFill>
-                <a:latin typeface="Calibri"/>
+                <a:latin typeface="Times New Roman"/>
               </a:rPr>
               <a:t>+  </a:t>
             </a:r>
@@ -5719,24 +5719,24 @@
                 <a:solidFill>
                   <a:srgbClr val="1A2B3C"/>
                 </a:solidFill>
-                <a:latin typeface="Calibri"/>
+                <a:latin typeface="Times New Roman"/>
               </a:rPr>
-              <a:t>Afzallik: </a:t>
+              <a:t>Afzalliklari: </a:t>
             </a:r>
             <a:r>
               <a:rPr sz="1100">
                 <a:solidFill>
                   <a:srgbClr val="1A2B3C"/>
                 </a:solidFill>
-                <a:latin typeface="Calibri"/>
+                <a:latin typeface="Times New Roman"/>
               </a:rPr>
-              <a:t>rentgenkontrast yuqori, oson chiqariladi</a:t>
+              <a:t>yuqori rentgenkontrastlilik, oson chiqariladi</a:t>
             </a:r>
           </a:p>
           <a:p>
             <a:pPr>
               <a:lnSpc>
-                <a:spcPct val="115000"/>
+                <a:spcPct val="112000"/>
               </a:lnSpc>
               <a:spcBef>
                 <a:spcPts val="100"/>
@@ -5750,7 +5750,7 @@
                 <a:solidFill>
                   <a:srgbClr val="C98A12"/>
                 </a:solidFill>
-                <a:latin typeface="Calibri"/>
+                <a:latin typeface="Times New Roman"/>
               </a:rPr>
               <a:t>−  </a:t>
             </a:r>
@@ -5759,24 +5759,24 @@
                 <a:solidFill>
                   <a:srgbClr val="1A2B3C"/>
                 </a:solidFill>
-                <a:latin typeface="Calibri"/>
+                <a:latin typeface="Times New Roman"/>
               </a:rPr>
-              <a:t>Kamchilik: </a:t>
+              <a:t>Kamchiliklari: </a:t>
             </a:r>
             <a:r>
               <a:rPr sz="1100">
                 <a:solidFill>
                   <a:srgbClr val="1A2B3C"/>
                 </a:solidFill>
-                <a:latin typeface="Calibri"/>
+                <a:latin typeface="Times New Roman"/>
               </a:rPr>
-              <a:t>qisqaradi va eriydi → germetiklik kamayadi</a:t>
+              <a:t>qisqaradi va eriydi — germetiklik susayadi</a:t>
             </a:r>
           </a:p>
           <a:p>
             <a:pPr>
               <a:lnSpc>
-                <a:spcPct val="115000"/>
+                <a:spcPct val="112000"/>
               </a:lnSpc>
               <a:spcBef>
                 <a:spcPts val="100"/>
@@ -5790,7 +5790,7 @@
                 <a:solidFill>
                   <a:srgbClr val="C98A12"/>
                 </a:solidFill>
-                <a:latin typeface="Calibri"/>
+                <a:latin typeface="Times New Roman"/>
               </a:rPr>
               <a:t>−  </a:t>
             </a:r>
@@ -5799,18 +5799,18 @@
                 <a:solidFill>
                   <a:srgbClr val="1A2B3C"/>
                 </a:solidFill>
-                <a:latin typeface="Calibri"/>
+                <a:latin typeface="Times New Roman"/>
               </a:rPr>
-              <a:t>Kamchilik: </a:t>
+              <a:t>Kamchiliklari: </a:t>
             </a:r>
             <a:r>
               <a:rPr sz="1100">
                 <a:solidFill>
                   <a:srgbClr val="1A2B3C"/>
                 </a:solidFill>
-                <a:latin typeface="Calibri"/>
+                <a:latin typeface="Times New Roman"/>
               </a:rPr>
-              <a:t>evgenol allergiyasi, tishni bo'yashi mumkin</a:t>
+              <a:t>evgenolga allergik reaksiya, toj rangini o'zgartirishi mumkin</a:t>
             </a:r>
           </a:p>
         </p:txBody>
@@ -5973,7 +5973,7 @@
                 <a:solidFill>
                   <a:srgbClr val="FFFFFF"/>
                 </a:solidFill>
-                <a:latin typeface="Calibri"/>
+                <a:latin typeface="Times New Roman"/>
               </a:defRPr>
             </a:pPr>
             <a:r>
@@ -6009,7 +6009,7 @@
                 <a:solidFill>
                   <a:srgbClr val="5A6D80"/>
                 </a:solidFill>
-                <a:latin typeface="Calibri"/>
+                <a:latin typeface="Times New Roman"/>
               </a:defRPr>
             </a:pPr>
             <a:r>
@@ -6042,7 +6042,7 @@
           <a:p>
             <a:pPr>
               <a:lnSpc>
-                <a:spcPct val="115000"/>
+                <a:spcPct val="112000"/>
               </a:lnSpc>
               <a:spcBef>
                 <a:spcPts val="100"/>
@@ -6056,7 +6056,7 @@
                 <a:solidFill>
                   <a:srgbClr val="009E8A"/>
                 </a:solidFill>
-                <a:latin typeface="Calibri"/>
+                <a:latin typeface="Times New Roman"/>
               </a:rPr>
               <a:t>+  </a:t>
             </a:r>
@@ -6065,24 +6065,24 @@
                 <a:solidFill>
                   <a:srgbClr val="1A2B3C"/>
                 </a:solidFill>
-                <a:latin typeface="Calibri"/>
+                <a:latin typeface="Times New Roman"/>
               </a:rPr>
-              <a:t>Afzallik: </a:t>
+              <a:t>Afzalliklari: </a:t>
             </a:r>
             <a:r>
               <a:rPr sz="1100">
                 <a:solidFill>
                   <a:srgbClr val="1A2B3C"/>
                 </a:solidFill>
-                <a:latin typeface="Calibri"/>
+                <a:latin typeface="Times New Roman"/>
               </a:rPr>
-              <a:t>pH ishqoriy, biokompatibil, apeksifikatsiyani rag'batlantiradi</a:t>
+              <a:t>ishqoriy pH, biomuvofiq, apeksifikatsiyani rag'batlantiradi</a:t>
             </a:r>
           </a:p>
           <a:p>
             <a:pPr>
               <a:lnSpc>
-                <a:spcPct val="115000"/>
+                <a:spcPct val="112000"/>
               </a:lnSpc>
               <a:spcBef>
                 <a:spcPts val="100"/>
@@ -6096,7 +6096,7 @@
                 <a:solidFill>
                   <a:srgbClr val="009E8A"/>
                 </a:solidFill>
-                <a:latin typeface="Calibri"/>
+                <a:latin typeface="Times New Roman"/>
               </a:rPr>
               <a:t>+  </a:t>
             </a:r>
@@ -6105,24 +6105,24 @@
                 <a:solidFill>
                   <a:srgbClr val="1A2B3C"/>
                 </a:solidFill>
-                <a:latin typeface="Calibri"/>
+                <a:latin typeface="Times New Roman"/>
               </a:rPr>
-              <a:t>Afzallik: </a:t>
+              <a:t>Afzalliklari: </a:t>
             </a:r>
             <a:r>
               <a:rPr sz="1100">
                 <a:solidFill>
                   <a:srgbClr val="1A2B3C"/>
                 </a:solidFill>
-                <a:latin typeface="Calibri"/>
+                <a:latin typeface="Times New Roman"/>
               </a:rPr>
-              <a:t>periapikal to'qimaga ijobiy ta'sir</a:t>
+              <a:t>periapikal to'qimalarga ijobiy ta'sir</a:t>
             </a:r>
           </a:p>
           <a:p>
             <a:pPr>
               <a:lnSpc>
-                <a:spcPct val="115000"/>
+                <a:spcPct val="112000"/>
               </a:lnSpc>
               <a:spcBef>
                 <a:spcPts val="100"/>
@@ -6136,7 +6136,7 @@
                 <a:solidFill>
                   <a:srgbClr val="009E8A"/>
                 </a:solidFill>
-                <a:latin typeface="Calibri"/>
+                <a:latin typeface="Times New Roman"/>
               </a:rPr>
               <a:t>−  </a:t>
             </a:r>
@@ -6145,24 +6145,24 @@
                 <a:solidFill>
                   <a:srgbClr val="1A2B3C"/>
                 </a:solidFill>
-                <a:latin typeface="Calibri"/>
+                <a:latin typeface="Times New Roman"/>
               </a:rPr>
-              <a:t>Kamchilik: </a:t>
+              <a:t>Kamchiliklari: </a:t>
             </a:r>
             <a:r>
               <a:rPr sz="1100">
                 <a:solidFill>
                   <a:srgbClr val="1A2B3C"/>
                 </a:solidFill>
-                <a:latin typeface="Calibri"/>
+                <a:latin typeface="Times New Roman"/>
               </a:rPr>
-              <a:t>yuqori eruvchanlik — uzoq muddatda bo'shliq hosil bo'ladi</a:t>
+              <a:t>yuqori eruvchanlik — vaqt o'tishi bilan bo'shliq hosil bo'ladi</a:t>
             </a:r>
           </a:p>
           <a:p>
             <a:pPr>
               <a:lnSpc>
-                <a:spcPct val="115000"/>
+                <a:spcPct val="112000"/>
               </a:lnSpc>
               <a:spcBef>
                 <a:spcPts val="100"/>
@@ -6176,7 +6176,7 @@
                 <a:solidFill>
                   <a:srgbClr val="009E8A"/>
                 </a:solidFill>
-                <a:latin typeface="Calibri"/>
+                <a:latin typeface="Times New Roman"/>
               </a:rPr>
               <a:t>−  </a:t>
             </a:r>
@@ -6185,18 +6185,18 @@
                 <a:solidFill>
                   <a:srgbClr val="1A2B3C"/>
                 </a:solidFill>
-                <a:latin typeface="Calibri"/>
+                <a:latin typeface="Times New Roman"/>
               </a:rPr>
-              <a:t>Kamchilik: </a:t>
+              <a:t>Kamchiliklari: </a:t>
             </a:r>
             <a:r>
               <a:rPr sz="1100">
                 <a:solidFill>
                   <a:srgbClr val="1A2B3C"/>
                 </a:solidFill>
-                <a:latin typeface="Calibri"/>
+                <a:latin typeface="Times New Roman"/>
               </a:rPr>
-              <a:t>mexanik mustahkamlik past</a:t>
+              <a:t>mexanik mustahkamligi past</a:t>
             </a:r>
           </a:p>
         </p:txBody>
@@ -6358,7 +6358,7 @@
                 <a:solidFill>
                   <a:srgbClr val="FFFFFF"/>
                 </a:solidFill>
-                <a:latin typeface="Calibri"/>
+                <a:latin typeface="Times New Roman"/>
               </a:rPr>
               <a:t>12</a:t>
             </a:r>
@@ -6392,7 +6392,7 @@
                 <a:solidFill>
                   <a:srgbClr val="00BFA6"/>
                 </a:solidFill>
-                <a:latin typeface="Calibri"/>
+                <a:latin typeface="Times New Roman"/>
               </a:defRPr>
             </a:pPr>
             <a:r>
@@ -6428,11 +6428,11 @@
                 <a:solidFill>
                   <a:srgbClr val="FFFFFF"/>
                 </a:solidFill>
-                <a:latin typeface="Calibri Light"/>
+                <a:latin typeface="Times New Roman"/>
               </a:defRPr>
             </a:pPr>
             <a:r>
-              <a:t>Epoksi-rezin, shisha ionomer va silikon sealerlar (II–III avlod)</a:t>
+              <a:t>Epoksid smolali, shishaionomer va silikonli sealerlar (II–III avlod)</a:t>
             </a:r>
           </a:p>
         </p:txBody>
@@ -6464,7 +6464,7 @@
                 <a:solidFill>
                   <a:srgbClr val="5A6D80"/>
                 </a:solidFill>
-                <a:latin typeface="Calibri"/>
+                <a:latin typeface="Times New Roman"/>
               </a:defRPr>
             </a:pPr>
             <a:r>
@@ -6500,7 +6500,7 @@
                 <a:solidFill>
                   <a:srgbClr val="5A6D80"/>
                 </a:solidFill>
-                <a:latin typeface="Calibri"/>
+                <a:latin typeface="Times New Roman"/>
               </a:defRPr>
             </a:pPr>
             <a:r>
@@ -6667,7 +6667,7 @@
                 <a:solidFill>
                   <a:srgbClr val="00BFA6"/>
                 </a:solidFill>
-                <a:latin typeface="Calibri"/>
+                <a:latin typeface="Times New Roman"/>
               </a:defRPr>
             </a:pPr>
             <a:r>
@@ -6700,7 +6700,7 @@
           <a:p>
             <a:pPr>
               <a:lnSpc>
-                <a:spcPct val="115000"/>
+                <a:spcPct val="112000"/>
               </a:lnSpc>
               <a:spcBef>
                 <a:spcPts val="100"/>
@@ -6714,7 +6714,7 @@
                 <a:solidFill>
                   <a:srgbClr val="00BFA6"/>
                 </a:solidFill>
-                <a:latin typeface="Calibri"/>
+                <a:latin typeface="Times New Roman"/>
               </a:rPr>
               <a:t>●  </a:t>
             </a:r>
@@ -6723,24 +6723,24 @@
                 <a:solidFill>
                   <a:srgbClr val="FFFFFF"/>
                 </a:solidFill>
-                <a:latin typeface="Calibri"/>
+                <a:latin typeface="Times New Roman"/>
               </a:rPr>
-              <a:t>Tarkib: </a:t>
+              <a:t>Tarkibi: </a:t>
             </a:r>
             <a:r>
               <a:rPr sz="1000">
                 <a:solidFill>
                   <a:srgbClr val="FFFFFF"/>
                 </a:solidFill>
-                <a:latin typeface="Calibri"/>
+                <a:latin typeface="Times New Roman"/>
               </a:rPr>
-              <a:t>bisfenol-A epoksi + aminlar</a:t>
+              <a:t>epoksid smola (bisfenol A) + aminli qotiruvchi</a:t>
             </a:r>
           </a:p>
           <a:p>
             <a:pPr>
               <a:lnSpc>
-                <a:spcPct val="115000"/>
+                <a:spcPct val="112000"/>
               </a:lnSpc>
               <a:spcBef>
                 <a:spcPts val="100"/>
@@ -6754,7 +6754,7 @@
                 <a:solidFill>
                   <a:srgbClr val="00BFA6"/>
                 </a:solidFill>
-                <a:latin typeface="Calibri"/>
+                <a:latin typeface="Times New Roman"/>
               </a:rPr>
               <a:t>●  </a:t>
             </a:r>
@@ -6763,24 +6763,24 @@
                 <a:solidFill>
                   <a:srgbClr val="FFFFFF"/>
                 </a:solidFill>
-                <a:latin typeface="Calibri"/>
+                <a:latin typeface="Times New Roman"/>
               </a:rPr>
-              <a:t>Qotish: </a:t>
+              <a:t>Qotishi: </a:t>
             </a:r>
             <a:r>
               <a:rPr sz="1000">
                 <a:solidFill>
                   <a:srgbClr val="FFFFFF"/>
                 </a:solidFill>
-                <a:latin typeface="Calibri"/>
+                <a:latin typeface="Times New Roman"/>
               </a:rPr>
-              <a:t>~8 soat; qisqarish &lt;1%; eruvchanlik &lt;3%</a:t>
+              <a:t>taxminan 8 soat; qisqarish &lt; 1 %; eruvchanlik &lt; 3 %</a:t>
             </a:r>
           </a:p>
           <a:p>
             <a:pPr>
               <a:lnSpc>
-                <a:spcPct val="115000"/>
+                <a:spcPct val="112000"/>
               </a:lnSpc>
               <a:spcBef>
                 <a:spcPts val="100"/>
@@ -6794,7 +6794,7 @@
                 <a:solidFill>
                   <a:srgbClr val="00BFA6"/>
                 </a:solidFill>
-                <a:latin typeface="Calibri"/>
+                <a:latin typeface="Times New Roman"/>
               </a:rPr>
               <a:t>●  </a:t>
             </a:r>
@@ -6803,7 +6803,7 @@
                 <a:solidFill>
                   <a:srgbClr val="FFFFFF"/>
                 </a:solidFill>
-                <a:latin typeface="Calibri"/>
+                <a:latin typeface="Times New Roman"/>
               </a:rPr>
               <a:t>+: </a:t>
             </a:r>
@@ -6812,15 +6812,15 @@
                 <a:solidFill>
                   <a:srgbClr val="FFFFFF"/>
                 </a:solidFill>
-                <a:latin typeface="Calibri"/>
+                <a:latin typeface="Times New Roman"/>
               </a:rPr>
-              <a:t>a'lo adgeziya, o'lcham barqarorligi, yuqori kontrast</a:t>
+              <a:t>a'lo yopishish (adgeziya), hajm barqarorligi, yuqori kontrast</a:t>
             </a:r>
           </a:p>
           <a:p>
             <a:pPr>
               <a:lnSpc>
-                <a:spcPct val="115000"/>
+                <a:spcPct val="112000"/>
               </a:lnSpc>
               <a:spcBef>
                 <a:spcPts val="100"/>
@@ -6834,7 +6834,7 @@
                 <a:solidFill>
                   <a:srgbClr val="00BFA6"/>
                 </a:solidFill>
-                <a:latin typeface="Calibri"/>
+                <a:latin typeface="Times New Roman"/>
               </a:rPr>
               <a:t>●  </a:t>
             </a:r>
@@ -6843,7 +6843,7 @@
                 <a:solidFill>
                   <a:srgbClr val="FFFFFF"/>
                 </a:solidFill>
-                <a:latin typeface="Calibri"/>
+                <a:latin typeface="Times New Roman"/>
               </a:rPr>
               <a:t>◆: </a:t>
             </a:r>
@@ -6852,15 +6852,15 @@
                 <a:solidFill>
                   <a:srgbClr val="FFFFFF"/>
                 </a:solidFill>
-                <a:latin typeface="Calibri"/>
+                <a:latin typeface="Times New Roman"/>
               </a:rPr>
-              <a:t>ISO 6876 talablariga to'liq mos</a:t>
+              <a:t>ISO 6876 talablariga to'liq javob beradi</a:t>
             </a:r>
           </a:p>
           <a:p>
             <a:pPr>
               <a:lnSpc>
-                <a:spcPct val="115000"/>
+                <a:spcPct val="112000"/>
               </a:lnSpc>
               <a:spcBef>
                 <a:spcPts val="100"/>
@@ -6874,7 +6874,7 @@
                 <a:solidFill>
                   <a:srgbClr val="00BFA6"/>
                 </a:solidFill>
-                <a:latin typeface="Calibri"/>
+                <a:latin typeface="Times New Roman"/>
               </a:rPr>
               <a:t>●  </a:t>
             </a:r>
@@ -6883,7 +6883,7 @@
                 <a:solidFill>
                   <a:srgbClr val="FFFFFF"/>
                 </a:solidFill>
-                <a:latin typeface="Calibri"/>
+                <a:latin typeface="Times New Roman"/>
               </a:rPr>
               <a:t>−: </a:t>
             </a:r>
@@ -6892,9 +6892,9 @@
                 <a:solidFill>
                   <a:srgbClr val="FFFFFF"/>
                 </a:solidFill>
-                <a:latin typeface="Calibri"/>
+                <a:latin typeface="Times New Roman"/>
               </a:rPr>
-              <a:t>retreatment qiyin; qotmasdan oldin sitotoksik</a:t>
+              <a:t>qayta davolashda chiqarish qiyin; qotgunga qadar sitotoksik</a:t>
             </a:r>
           </a:p>
         </p:txBody>
@@ -7014,11 +7014,11 @@
                 <a:solidFill>
                   <a:srgbClr val="0B2C4A"/>
                 </a:solidFill>
-                <a:latin typeface="Calibri"/>
+                <a:latin typeface="Times New Roman"/>
               </a:defRPr>
             </a:pPr>
             <a:r>
-              <a:t>Shisha ionomer</a:t>
+              <a:t>Shishaionomer sement</a:t>
             </a:r>
           </a:p>
         </p:txBody>
@@ -7050,7 +7050,7 @@
                 <a:solidFill>
                   <a:srgbClr val="5A6D80"/>
                 </a:solidFill>
-                <a:latin typeface="Calibri"/>
+                <a:latin typeface="Times New Roman"/>
               </a:defRPr>
             </a:pPr>
             <a:r>
@@ -7083,7 +7083,7 @@
           <a:p>
             <a:pPr>
               <a:lnSpc>
-                <a:spcPct val="115000"/>
+                <a:spcPct val="112000"/>
               </a:lnSpc>
               <a:spcBef>
                 <a:spcPts val="100"/>
@@ -7097,7 +7097,7 @@
                 <a:solidFill>
                   <a:srgbClr val="009E8A"/>
                 </a:solidFill>
-                <a:latin typeface="Calibri"/>
+                <a:latin typeface="Times New Roman"/>
               </a:rPr>
               <a:t>+  </a:t>
             </a:r>
@@ -7106,7 +7106,7 @@
                 <a:solidFill>
                   <a:srgbClr val="1A2B3C"/>
                 </a:solidFill>
-                <a:latin typeface="Calibri"/>
+                <a:latin typeface="Times New Roman"/>
               </a:rPr>
               <a:t>Dentinga kimyoviy bog'lanadi</a:t>
             </a:r>
@@ -7114,7 +7114,7 @@
           <a:p>
             <a:pPr>
               <a:lnSpc>
-                <a:spcPct val="115000"/>
+                <a:spcPct val="112000"/>
               </a:lnSpc>
               <a:spcBef>
                 <a:spcPts val="100"/>
@@ -7128,7 +7128,7 @@
                 <a:solidFill>
                   <a:srgbClr val="009E8A"/>
                 </a:solidFill>
-                <a:latin typeface="Calibri"/>
+                <a:latin typeface="Times New Roman"/>
               </a:rPr>
               <a:t>+  </a:t>
             </a:r>
@@ -7137,15 +7137,15 @@
                 <a:solidFill>
                   <a:srgbClr val="1A2B3C"/>
                 </a:solidFill>
-                <a:latin typeface="Calibri"/>
+                <a:latin typeface="Times New Roman"/>
               </a:rPr>
-              <a:t>Ftor ajratadi</a:t>
+              <a:t>Ftor ajratib turadi</a:t>
             </a:r>
           </a:p>
           <a:p>
             <a:pPr>
               <a:lnSpc>
-                <a:spcPct val="115000"/>
+                <a:spcPct val="112000"/>
               </a:lnSpc>
               <a:spcBef>
                 <a:spcPts val="100"/>
@@ -7159,7 +7159,7 @@
                 <a:solidFill>
                   <a:srgbClr val="009E8A"/>
                 </a:solidFill>
-                <a:latin typeface="Calibri"/>
+                <a:latin typeface="Times New Roman"/>
               </a:rPr>
               <a:t>−  </a:t>
             </a:r>
@@ -7168,15 +7168,15 @@
                 <a:solidFill>
                   <a:srgbClr val="1A2B3C"/>
                 </a:solidFill>
-                <a:latin typeface="Calibri"/>
+                <a:latin typeface="Times New Roman"/>
               </a:rPr>
-              <a:t>Mo'rt, namga sezgir</a:t>
+              <a:t>Mo'rt, namlikka sezgir</a:t>
             </a:r>
           </a:p>
           <a:p>
             <a:pPr>
               <a:lnSpc>
-                <a:spcPct val="115000"/>
+                <a:spcPct val="112000"/>
               </a:lnSpc>
               <a:spcBef>
                 <a:spcPts val="100"/>
@@ -7190,7 +7190,7 @@
                 <a:solidFill>
                   <a:srgbClr val="009E8A"/>
                 </a:solidFill>
-                <a:latin typeface="Calibri"/>
+                <a:latin typeface="Times New Roman"/>
               </a:rPr>
               <a:t>−  </a:t>
             </a:r>
@@ -7199,9 +7199,9 @@
                 <a:solidFill>
                   <a:srgbClr val="1A2B3C"/>
                 </a:solidFill>
-                <a:latin typeface="Calibri"/>
+                <a:latin typeface="Times New Roman"/>
               </a:rPr>
-              <a:t>Qayta davolash juda qiyin</a:t>
+              <a:t>Qayta davolash o'ta qiyin</a:t>
             </a:r>
           </a:p>
         </p:txBody>
@@ -7321,11 +7321,11 @@
                 <a:solidFill>
                   <a:srgbClr val="0B2C4A"/>
                 </a:solidFill>
-                <a:latin typeface="Calibri"/>
+                <a:latin typeface="Times New Roman"/>
               </a:defRPr>
             </a:pPr>
             <a:r>
-              <a:t>Silikon</a:t>
+              <a:t>Silikon asosli</a:t>
             </a:r>
           </a:p>
         </p:txBody>
@@ -7357,7 +7357,7 @@
                 <a:solidFill>
                   <a:srgbClr val="5A6D80"/>
                 </a:solidFill>
-                <a:latin typeface="Calibri"/>
+                <a:latin typeface="Times New Roman"/>
               </a:defRPr>
             </a:pPr>
             <a:r>
@@ -7390,7 +7390,7 @@
           <a:p>
             <a:pPr>
               <a:lnSpc>
-                <a:spcPct val="115000"/>
+                <a:spcPct val="112000"/>
               </a:lnSpc>
               <a:spcBef>
                 <a:spcPts val="100"/>
@@ -7404,7 +7404,7 @@
                 <a:solidFill>
                   <a:srgbClr val="009E8A"/>
                 </a:solidFill>
-                <a:latin typeface="Calibri"/>
+                <a:latin typeface="Times New Roman"/>
               </a:rPr>
               <a:t>+  </a:t>
             </a:r>
@@ -7413,15 +7413,15 @@
                 <a:solidFill>
                   <a:srgbClr val="1A2B3C"/>
                 </a:solidFill>
-                <a:latin typeface="Calibri"/>
+                <a:latin typeface="Times New Roman"/>
               </a:rPr>
-              <a:t>Kengayadi (+0,2%)</a:t>
+              <a:t>Qotayotib kengayadi (+0,2 %)</a:t>
             </a:r>
           </a:p>
           <a:p>
             <a:pPr>
               <a:lnSpc>
-                <a:spcPct val="115000"/>
+                <a:spcPct val="112000"/>
               </a:lnSpc>
               <a:spcBef>
                 <a:spcPts val="100"/>
@@ -7435,7 +7435,7 @@
                 <a:solidFill>
                   <a:srgbClr val="009E8A"/>
                 </a:solidFill>
-                <a:latin typeface="Calibri"/>
+                <a:latin typeface="Times New Roman"/>
               </a:rPr>
               <a:t>+  </a:t>
             </a:r>
@@ -7444,15 +7444,15 @@
                 <a:solidFill>
                   <a:srgbClr val="1A2B3C"/>
                 </a:solidFill>
-                <a:latin typeface="Calibri"/>
+                <a:latin typeface="Times New Roman"/>
               </a:rPr>
-              <a:t>Zo'r oqimtarlik</a:t>
+              <a:t>Yuqori oquvchanlik</a:t>
             </a:r>
           </a:p>
           <a:p>
             <a:pPr>
               <a:lnSpc>
-                <a:spcPct val="115000"/>
+                <a:spcPct val="112000"/>
               </a:lnSpc>
               <a:spcBef>
                 <a:spcPts val="100"/>
@@ -7466,7 +7466,7 @@
                 <a:solidFill>
                   <a:srgbClr val="009E8A"/>
                 </a:solidFill>
-                <a:latin typeface="Calibri"/>
+                <a:latin typeface="Times New Roman"/>
               </a:rPr>
               <a:t>−  </a:t>
             </a:r>
@@ -7475,15 +7475,15 @@
                 <a:solidFill>
                   <a:srgbClr val="1A2B3C"/>
                 </a:solidFill>
-                <a:latin typeface="Calibri"/>
+                <a:latin typeface="Times New Roman"/>
               </a:rPr>
-              <a:t>Mustahkamlik past</a:t>
+              <a:t>Mustahkamligi past</a:t>
             </a:r>
           </a:p>
           <a:p>
             <a:pPr>
               <a:lnSpc>
-                <a:spcPct val="115000"/>
+                <a:spcPct val="112000"/>
               </a:lnSpc>
               <a:spcBef>
                 <a:spcPts val="100"/>
@@ -7497,7 +7497,7 @@
                 <a:solidFill>
                   <a:srgbClr val="009E8A"/>
                 </a:solidFill>
-                <a:latin typeface="Calibri"/>
+                <a:latin typeface="Times New Roman"/>
               </a:rPr>
               <a:t>−  </a:t>
             </a:r>
@@ -7506,7 +7506,7 @@
                 <a:solidFill>
                   <a:srgbClr val="1A2B3C"/>
                 </a:solidFill>
-                <a:latin typeface="Calibri"/>
+                <a:latin typeface="Times New Roman"/>
               </a:rPr>
               <a:t>Narxi yuqori</a:t>
             </a:r>
@@ -7670,7 +7670,7 @@
                 <a:solidFill>
                   <a:srgbClr val="FFFFFF"/>
                 </a:solidFill>
-                <a:latin typeface="Calibri"/>
+                <a:latin typeface="Times New Roman"/>
               </a:rPr>
               <a:t>13</a:t>
             </a:r>
@@ -7704,7 +7704,7 @@
                 <a:solidFill>
                   <a:srgbClr val="00BFA6"/>
                 </a:solidFill>
-                <a:latin typeface="Calibri"/>
+                <a:latin typeface="Times New Roman"/>
               </a:defRPr>
             </a:pPr>
             <a:r>
@@ -7740,11 +7740,11 @@
                 <a:solidFill>
                   <a:srgbClr val="FFFFFF"/>
                 </a:solidFill>
-                <a:latin typeface="Calibri Light"/>
+                <a:latin typeface="Times New Roman"/>
               </a:defRPr>
             </a:pPr>
             <a:r>
-              <a:t>Biokeramik sealerlar (IV avlod) — bioaktiv inqilob</a:t>
+              <a:t>Biokeramik sealerlar (IV avlod) — bioaktiv materiallar davri</a:t>
             </a:r>
           </a:p>
         </p:txBody>
@@ -7776,7 +7776,7 @@
                 <a:solidFill>
                   <a:srgbClr val="5A6D80"/>
                 </a:solidFill>
-                <a:latin typeface="Calibri"/>
+                <a:latin typeface="Times New Roman"/>
               </a:defRPr>
             </a:pPr>
             <a:r>
@@ -7812,7 +7812,7 @@
                 <a:solidFill>
                   <a:srgbClr val="5A6D80"/>
                 </a:solidFill>
-                <a:latin typeface="Calibri"/>
+                <a:latin typeface="Times New Roman"/>
               </a:defRPr>
             </a:pPr>
             <a:r>
@@ -7979,11 +7979,11 @@
                 <a:solidFill>
                   <a:srgbClr val="0B2C4A"/>
                 </a:solidFill>
-                <a:latin typeface="Calibri"/>
+                <a:latin typeface="Times New Roman"/>
               </a:defRPr>
             </a:pPr>
             <a:r>
-              <a:t>Trikalsiy silikat (MTA asosli) + kalsiy fosfat + sirkoniy oksid</a:t>
+              <a:t>Trikalsiy silikat (MTA asosli) + kalsiy fosfat + sirkoniy dioksidi (ZrO₂)</a:t>
             </a:r>
           </a:p>
         </p:txBody>
@@ -8012,7 +8012,7 @@
           <a:p>
             <a:pPr>
               <a:lnSpc>
-                <a:spcPct val="115000"/>
+                <a:spcPct val="112000"/>
               </a:lnSpc>
               <a:spcBef>
                 <a:spcPts val="100"/>
@@ -8026,33 +8026,33 @@
                 <a:solidFill>
                   <a:srgbClr val="009E8A"/>
                 </a:solidFill>
-                <a:latin typeface="Calibri"/>
+                <a:latin typeface="Times New Roman"/>
               </a:rPr>
-              <a:t>①  </a:t>
+              <a:t>1.  </a:t>
             </a:r>
             <a:r>
               <a:rPr sz="1100" b="1">
                 <a:solidFill>
                   <a:srgbClr val="1A2B3C"/>
                 </a:solidFill>
-                <a:latin typeface="Calibri"/>
+                <a:latin typeface="Times New Roman"/>
               </a:rPr>
-              <a:t>Gidratatsiya: </a:t>
+              <a:t>Qotish mexanizmi: </a:t>
             </a:r>
             <a:r>
               <a:rPr sz="1100">
                 <a:solidFill>
                   <a:srgbClr val="1A2B3C"/>
                 </a:solidFill>
-                <a:latin typeface="Calibri"/>
+                <a:latin typeface="Times New Roman"/>
               </a:rPr>
-              <a:t>kanal namligida qotadi — namlik afzallik!</a:t>
+              <a:t>kanal namligi hisobiga qotadi — namlik muammo emas, afzallik!</a:t>
             </a:r>
           </a:p>
           <a:p>
             <a:pPr>
               <a:lnSpc>
-                <a:spcPct val="115000"/>
+                <a:spcPct val="112000"/>
               </a:lnSpc>
               <a:spcBef>
                 <a:spcPts val="100"/>
@@ -8066,16 +8066,16 @@
                 <a:solidFill>
                   <a:srgbClr val="009E8A"/>
                 </a:solidFill>
-                <a:latin typeface="Calibri"/>
+                <a:latin typeface="Times New Roman"/>
               </a:rPr>
-              <a:t>②  </a:t>
+              <a:t>2.  </a:t>
             </a:r>
             <a:r>
               <a:rPr sz="1100" b="1">
                 <a:solidFill>
                   <a:srgbClr val="1A2B3C"/>
                 </a:solidFill>
-                <a:latin typeface="Calibri"/>
+                <a:latin typeface="Times New Roman"/>
               </a:rPr>
               <a:t>Bioaktivlik: </a:t>
             </a:r>
@@ -8084,15 +8084,15 @@
                 <a:solidFill>
                   <a:srgbClr val="1A2B3C"/>
                 </a:solidFill>
-                <a:latin typeface="Calibri"/>
+                <a:latin typeface="Times New Roman"/>
               </a:rPr>
-              <a:t>gidroksiapatit hosil qilib dentinga kimyoviy bog'lanadi.</a:t>
+              <a:t>gidroksiapatit hosil qilib, dentin bilan kimyoviy bog'lanadi («monoblok»).</a:t>
             </a:r>
           </a:p>
           <a:p>
             <a:pPr>
               <a:lnSpc>
-                <a:spcPct val="115000"/>
+                <a:spcPct val="112000"/>
               </a:lnSpc>
               <a:spcBef>
                 <a:spcPts val="100"/>
@@ -8106,33 +8106,33 @@
                 <a:solidFill>
                   <a:srgbClr val="009E8A"/>
                 </a:solidFill>
-                <a:latin typeface="Calibri"/>
+                <a:latin typeface="Times New Roman"/>
               </a:rPr>
-              <a:t>③  </a:t>
+              <a:t>3.  </a:t>
             </a:r>
             <a:r>
               <a:rPr sz="1100" b="1">
                 <a:solidFill>
                   <a:srgbClr val="1A2B3C"/>
                 </a:solidFill>
-                <a:latin typeface="Calibri"/>
+                <a:latin typeface="Times New Roman"/>
               </a:rPr>
-              <a:t>pH &gt; 12: </a:t>
+              <a:t>Muhit: </a:t>
             </a:r>
             <a:r>
               <a:rPr sz="1100">
                 <a:solidFill>
                   <a:srgbClr val="1A2B3C"/>
                 </a:solidFill>
-                <a:latin typeface="Calibri"/>
+                <a:latin typeface="Times New Roman"/>
               </a:rPr>
-              <a:t>antibakterial; kengayish ~0,1%; eruvchanlik &lt;3%.</a:t>
+              <a:t>pH &gt; 12 — antibakterial; kengayish ~0,1 %; eruvchanlik &lt; 3 %.</a:t>
             </a:r>
           </a:p>
           <a:p>
             <a:pPr>
               <a:lnSpc>
-                <a:spcPct val="115000"/>
+                <a:spcPct val="112000"/>
               </a:lnSpc>
               <a:spcBef>
                 <a:spcPts val="100"/>
@@ -8146,27 +8146,27 @@
                 <a:solidFill>
                   <a:srgbClr val="009E8A"/>
                 </a:solidFill>
-                <a:latin typeface="Calibri"/>
+                <a:latin typeface="Times New Roman"/>
               </a:rPr>
-              <a:t>④  </a:t>
+              <a:t>4.  </a:t>
             </a:r>
             <a:r>
               <a:rPr sz="1100" b="1">
                 <a:solidFill>
                   <a:srgbClr val="1A2B3C"/>
                 </a:solidFill>
-                <a:latin typeface="Calibri"/>
+                <a:latin typeface="Times New Roman"/>
               </a:rPr>
-              <a:t>Vakillar: </a:t>
+              <a:t>Savdo nomlari: </a:t>
             </a:r>
             <a:r>
               <a:rPr sz="1100">
                 <a:solidFill>
                   <a:srgbClr val="1A2B3C"/>
                 </a:solidFill>
-                <a:latin typeface="Calibri"/>
+                <a:latin typeface="Times New Roman"/>
               </a:rPr>
-              <a:t>BioRoot RCS • TotalFill BC • EndoSequence BC.</a:t>
+              <a:t>BioRoot RCS • TotalFill BC Sealer • EndoSequence BC.</a:t>
             </a:r>
           </a:p>
         </p:txBody>
@@ -8310,11 +8310,11 @@
                 <a:solidFill>
                   <a:srgbClr val="5A6D80"/>
                 </a:solidFill>
-                <a:latin typeface="Calibri"/>
+                <a:latin typeface="Times New Roman"/>
               </a:defRPr>
             </a:pPr>
             <a:r>
-              <a:t>Gidroksiapatitning dentinga bog'lanishi (sxematik)</a:t>
+              <a:t>Gidroksiapatitning dentinga bog'lanishi (sxematik tasvir)</a:t>
             </a:r>
           </a:p>
         </p:txBody>
@@ -8430,15 +8430,15 @@
           <a:lstStyle/>
           <a:p>
             <a:pPr algn="l">
-              <a:defRPr sz="1150" b="1" i="0">
+              <a:defRPr sz="1050" b="1" i="0">
                 <a:solidFill>
                   <a:srgbClr val="00BFA6"/>
                 </a:solidFill>
-                <a:latin typeface="Calibri"/>
+                <a:latin typeface="Times New Roman"/>
               </a:defRPr>
             </a:pPr>
             <a:r>
-              <a:t>Baholash</a:t>
+              <a:t>Afzallik va kamchiliklar</a:t>
             </a:r>
           </a:p>
         </p:txBody>
@@ -8467,7 +8467,7 @@
           <a:p>
             <a:pPr>
               <a:lnSpc>
-                <a:spcPct val="115000"/>
+                <a:spcPct val="112000"/>
               </a:lnSpc>
               <a:spcBef>
                 <a:spcPts val="100"/>
@@ -8481,7 +8481,7 @@
                 <a:solidFill>
                   <a:srgbClr val="00BFA6"/>
                 </a:solidFill>
-                <a:latin typeface="Calibri"/>
+                <a:latin typeface="Times New Roman"/>
               </a:rPr>
               <a:t>✓  </a:t>
             </a:r>
@@ -8490,15 +8490,15 @@
                 <a:solidFill>
                   <a:srgbClr val="FFFFFF"/>
                 </a:solidFill>
-                <a:latin typeface="Calibri"/>
+                <a:latin typeface="Times New Roman"/>
               </a:rPr>
-              <a:t>Gidrofil, sitotoksik emas</a:t>
+              <a:t>Gidrofil, hujayralar uchun bezarar</a:t>
             </a:r>
           </a:p>
           <a:p>
             <a:pPr>
               <a:lnSpc>
-                <a:spcPct val="115000"/>
+                <a:spcPct val="112000"/>
               </a:lnSpc>
               <a:spcBef>
                 <a:spcPts val="100"/>
@@ -8512,7 +8512,7 @@
                 <a:solidFill>
                   <a:srgbClr val="00BFA6"/>
                 </a:solidFill>
-                <a:latin typeface="Calibri"/>
+                <a:latin typeface="Times New Roman"/>
               </a:rPr>
               <a:t>✓  </a:t>
             </a:r>
@@ -8521,15 +8521,15 @@
                 <a:solidFill>
                   <a:srgbClr val="FFFFFF"/>
                 </a:solidFill>
-                <a:latin typeface="Calibri"/>
+                <a:latin typeface="Times New Roman"/>
               </a:rPr>
-              <a:t>Single-cone bilan ideal</a:t>
+              <a:t>Yakka shtift usuli bilan uyg'un</a:t>
             </a:r>
           </a:p>
           <a:p>
             <a:pPr>
               <a:lnSpc>
-                <a:spcPct val="115000"/>
+                <a:spcPct val="112000"/>
               </a:lnSpc>
               <a:spcBef>
                 <a:spcPts val="100"/>
@@ -8543,7 +8543,7 @@
                 <a:solidFill>
                   <a:srgbClr val="00BFA6"/>
                 </a:solidFill>
-                <a:latin typeface="Calibri"/>
+                <a:latin typeface="Times New Roman"/>
               </a:rPr>
               <a:t>✓  </a:t>
             </a:r>
@@ -8552,15 +8552,15 @@
                 <a:solidFill>
                   <a:srgbClr val="FFFFFF"/>
                 </a:solidFill>
-                <a:latin typeface="Calibri"/>
+                <a:latin typeface="Times New Roman"/>
               </a:rPr>
-              <a:t>Perforatsiya/apeks yopish</a:t>
+              <a:t>Perforatsiya va apeksni yopishda</a:t>
             </a:r>
           </a:p>
           <a:p>
             <a:pPr>
               <a:lnSpc>
-                <a:spcPct val="115000"/>
+                <a:spcPct val="112000"/>
               </a:lnSpc>
               <a:spcBef>
                 <a:spcPts val="100"/>
@@ -8574,7 +8574,7 @@
                 <a:solidFill>
                   <a:srgbClr val="00BFA6"/>
                 </a:solidFill>
-                <a:latin typeface="Calibri"/>
+                <a:latin typeface="Times New Roman"/>
               </a:rPr>
               <a:t>✕  </a:t>
             </a:r>
@@ -8583,15 +8583,15 @@
                 <a:solidFill>
                   <a:srgbClr val="FFFFFF"/>
                 </a:solidFill>
-                <a:latin typeface="Calibri"/>
+                <a:latin typeface="Times New Roman"/>
               </a:rPr>
-              <a:t>Retreatment qiyin</a:t>
+              <a:t>Qayta davolash qiyin</a:t>
             </a:r>
           </a:p>
           <a:p>
             <a:pPr>
               <a:lnSpc>
-                <a:spcPct val="115000"/>
+                <a:spcPct val="112000"/>
               </a:lnSpc>
               <a:spcBef>
                 <a:spcPts val="100"/>
@@ -8605,7 +8605,7 @@
                 <a:solidFill>
                   <a:srgbClr val="00BFA6"/>
                 </a:solidFill>
-                <a:latin typeface="Calibri"/>
+                <a:latin typeface="Times New Roman"/>
               </a:rPr>
               <a:t>✕  </a:t>
             </a:r>
@@ -8614,7 +8614,7 @@
                 <a:solidFill>
                   <a:srgbClr val="FFFFFF"/>
                 </a:solidFill>
-                <a:latin typeface="Calibri"/>
+                <a:latin typeface="Times New Roman"/>
               </a:rPr>
               <a:t>Qimmat, ish vaqti qisqa</a:t>
             </a:r>
@@ -8780,7 +8780,7 @@
                 <a:solidFill>
                   <a:srgbClr val="FFD27A"/>
                 </a:solidFill>
-                <a:latin typeface="Calibri"/>
+                <a:latin typeface="Times New Roman"/>
               </a:rPr>
               <a:t>◆ ILMIY ASOS  </a:t>
             </a:r>
@@ -8789,9 +8789,9 @@
                 <a:solidFill>
                   <a:srgbClr val="FFFFFF"/>
                 </a:solidFill>
-                <a:latin typeface="Calibri"/>
+                <a:latin typeface="Times New Roman"/>
               </a:rPr>
-              <a:t>MTA — Torabinejad et al., 1993 (Loma Linda universiteti): kalsiy-silikat sementlar davri boshlandi. Gidroksiapatit hosil qilishi va yuqori biomoslashuvchanligi ko'plab in vitro va klinik tadqiqotlarda isbotlangan.</a:t>
+              <a:t>MTA — Torabinejad va b., 1993 (Loma Linda universiteti, AQSH): kalsiy-silikat sementlar davri boshlandi. Gidroksiapatit hosil qilishi va yuqori biomuvofiqligi ko'plab laborator va klinik tadqiqotlarda isbotlangan.</a:t>
             </a:r>
           </a:p>
         </p:txBody>
@@ -8953,7 +8953,7 @@
                 <a:solidFill>
                   <a:srgbClr val="FFFFFF"/>
                 </a:solidFill>
-                <a:latin typeface="Calibri"/>
+                <a:latin typeface="Times New Roman"/>
               </a:rPr>
               <a:t>14</a:t>
             </a:r>
@@ -8987,7 +8987,7 @@
                 <a:solidFill>
                   <a:srgbClr val="00BFA6"/>
                 </a:solidFill>
-                <a:latin typeface="Calibri"/>
+                <a:latin typeface="Times New Roman"/>
               </a:defRPr>
             </a:pPr>
             <a:r>
@@ -9023,7 +9023,7 @@
                 <a:solidFill>
                   <a:srgbClr val="FFFFFF"/>
                 </a:solidFill>
-                <a:latin typeface="Calibri Light"/>
+                <a:latin typeface="Times New Roman"/>
               </a:defRPr>
             </a:pPr>
             <a:r>
@@ -9059,7 +9059,7 @@
                 <a:solidFill>
                   <a:srgbClr val="5A6D80"/>
                 </a:solidFill>
-                <a:latin typeface="Calibri"/>
+                <a:latin typeface="Times New Roman"/>
               </a:defRPr>
             </a:pPr>
             <a:r>
@@ -9095,7 +9095,7 @@
                 <a:solidFill>
                   <a:srgbClr val="5A6D80"/>
                 </a:solidFill>
-                <a:latin typeface="Calibri"/>
+                <a:latin typeface="Times New Roman"/>
               </a:defRPr>
             </a:pPr>
             <a:r>
@@ -9258,15 +9258,15 @@
           <a:lstStyle/>
           <a:p>
             <a:pPr algn="l">
-              <a:defRPr sz="1250" b="1" i="0">
+              <a:defRPr sz="1200" b="1" i="0">
                 <a:solidFill>
                   <a:srgbClr val="0B2C4A"/>
                 </a:solidFill>
-                <a:latin typeface="Calibri"/>
+                <a:latin typeface="Times New Roman"/>
               </a:defRPr>
             </a:pPr>
             <a:r>
-              <a:t>Gutta-percha — trans-1,4-poliizopren</a:t>
+              <a:t>Gutta-percha — trans-1,4-poliizopren (tabiiy polimer)</a:t>
             </a:r>
           </a:p>
         </p:txBody>
@@ -9295,7 +9295,7 @@
           <a:p>
             <a:pPr>
               <a:lnSpc>
-                <a:spcPct val="115000"/>
+                <a:spcPct val="112000"/>
               </a:lnSpc>
               <a:spcBef>
                 <a:spcPts val="100"/>
@@ -9309,7 +9309,7 @@
                 <a:solidFill>
                   <a:srgbClr val="009E8A"/>
                 </a:solidFill>
-                <a:latin typeface="Calibri"/>
+                <a:latin typeface="Times New Roman"/>
               </a:rPr>
               <a:t>▸  </a:t>
             </a:r>
@@ -9318,24 +9318,24 @@
                 <a:solidFill>
                   <a:srgbClr val="1A2B3C"/>
                 </a:solidFill>
-                <a:latin typeface="Calibri"/>
+                <a:latin typeface="Times New Roman"/>
               </a:rPr>
-              <a:t>Tarkib: </a:t>
+              <a:t>Tarkibi: </a:t>
             </a:r>
             <a:r>
               <a:rPr sz="1100">
                 <a:solidFill>
                   <a:srgbClr val="1A2B3C"/>
                 </a:solidFill>
-                <a:latin typeface="Calibri"/>
+                <a:latin typeface="Times New Roman"/>
               </a:rPr>
-              <a:t>~20% gutta-percha + 60–75% ZnO + mumlar + BaSO₄ (kontrast).</a:t>
+              <a:t>taxminan 20 % gutta-percha + 60–75 % rux oksidi (ZnO) + mumlar + bariy sulfat (BaSO₄, kontrast uchun).</a:t>
             </a:r>
           </a:p>
           <a:p>
             <a:pPr>
               <a:lnSpc>
-                <a:spcPct val="115000"/>
+                <a:spcPct val="112000"/>
               </a:lnSpc>
               <a:spcBef>
                 <a:spcPts val="100"/>
@@ -9349,7 +9349,7 @@
                 <a:solidFill>
                   <a:srgbClr val="009E8A"/>
                 </a:solidFill>
-                <a:latin typeface="Calibri"/>
+                <a:latin typeface="Times New Roman"/>
               </a:rPr>
               <a:t>▸  </a:t>
             </a:r>
@@ -9358,24 +9358,24 @@
                 <a:solidFill>
                   <a:srgbClr val="1A2B3C"/>
                 </a:solidFill>
-                <a:latin typeface="Calibri"/>
+                <a:latin typeface="Times New Roman"/>
               </a:rPr>
-              <a:t>Fazalar: </a:t>
+              <a:t>Fazalari: </a:t>
             </a:r>
             <a:r>
               <a:rPr sz="1100">
                 <a:solidFill>
                   <a:srgbClr val="1A2B3C"/>
                 </a:solidFill>
-                <a:latin typeface="Calibri"/>
+                <a:latin typeface="Times New Roman"/>
               </a:rPr>
-              <a:t>β-faza (standart) → qizdirilganda α-faza (60°C da yumshaydi).</a:t>
+              <a:t>β-faza (ishchi holat) → qizdirilganda α-faza (60 °C da yumshab, yopishqoq bo'ladi).</a:t>
             </a:r>
           </a:p>
           <a:p>
             <a:pPr>
               <a:lnSpc>
-                <a:spcPct val="115000"/>
+                <a:spcPct val="112000"/>
               </a:lnSpc>
               <a:spcBef>
                 <a:spcPts val="100"/>
@@ -9389,7 +9389,7 @@
                 <a:solidFill>
                   <a:srgbClr val="009E8A"/>
                 </a:solidFill>
-                <a:latin typeface="Calibri"/>
+                <a:latin typeface="Times New Roman"/>
               </a:rPr>
               <a:t>▸  </a:t>
             </a:r>
@@ -9398,7 +9398,7 @@
                 <a:solidFill>
                   <a:srgbClr val="1A2B3C"/>
                 </a:solidFill>
-                <a:latin typeface="Calibri"/>
+                <a:latin typeface="Times New Roman"/>
               </a:rPr>
               <a:t>Standart: </a:t>
             </a:r>
@@ -9407,15 +9407,15 @@
                 <a:solidFill>
                   <a:srgbClr val="1A2B3C"/>
                 </a:solidFill>
-                <a:latin typeface="Calibri"/>
+                <a:latin typeface="Times New Roman"/>
               </a:rPr>
-              <a:t>ISO 6877 — o'lcham 15–80; konussimonlik 02/04/06; master + accessory.</a:t>
+              <a:t>ISO 6877 — o'lcham 15–80; konussimonlik 02/04/06; asosiy + qo'shimcha shtiftlar.</a:t>
             </a:r>
           </a:p>
           <a:p>
             <a:pPr>
               <a:lnSpc>
-                <a:spcPct val="115000"/>
+                <a:spcPct val="112000"/>
               </a:lnSpc>
               <a:spcBef>
                 <a:spcPts val="100"/>
@@ -9429,7 +9429,7 @@
                 <a:solidFill>
                   <a:srgbClr val="009E8A"/>
                 </a:solidFill>
-                <a:latin typeface="Calibri"/>
+                <a:latin typeface="Times New Roman"/>
               </a:rPr>
               <a:t>▸  </a:t>
             </a:r>
@@ -9438,7 +9438,7 @@
                 <a:solidFill>
                   <a:srgbClr val="1A2B3C"/>
                 </a:solidFill>
-                <a:latin typeface="Calibri"/>
+                <a:latin typeface="Times New Roman"/>
               </a:rPr>
               <a:t>+: </a:t>
             </a:r>
@@ -9447,9 +9447,9 @@
                 <a:solidFill>
                   <a:srgbClr val="1A2B3C"/>
                 </a:solidFill>
-                <a:latin typeface="Calibri"/>
+                <a:latin typeface="Times New Roman"/>
               </a:rPr>
-              <a:t>biokompatibil, kontrast, arzon, oson chiqariladi;  −: sealer shart!</a:t>
+              <a:t>biomuvofiq, kontrast, arzon, oson chiqariladi;  −: yolg'iz o'zi germetik emas — sealer shart!</a:t>
             </a:r>
           </a:p>
         </p:txBody>
@@ -9681,11 +9681,11 @@
                 <a:solidFill>
                   <a:srgbClr val="00BFA6"/>
                 </a:solidFill>
-                <a:latin typeface="Calibri"/>
+                <a:latin typeface="Times New Roman"/>
               </a:defRPr>
             </a:pPr>
             <a:r>
-              <a:t>Boshqa o'zaklar</a:t>
+              <a:t>Boshqa o'zak materiallari</a:t>
             </a:r>
           </a:p>
         </p:txBody>
@@ -9714,7 +9714,7 @@
           <a:p>
             <a:pPr>
               <a:lnSpc>
-                <a:spcPct val="115000"/>
+                <a:spcPct val="112000"/>
               </a:lnSpc>
               <a:spcBef>
                 <a:spcPts val="100"/>
@@ -9728,7 +9728,7 @@
                 <a:solidFill>
                   <a:srgbClr val="00BFA6"/>
                 </a:solidFill>
-                <a:latin typeface="Calibri"/>
+                <a:latin typeface="Times New Roman"/>
               </a:rPr>
               <a:t>●  </a:t>
             </a:r>
@@ -9737,7 +9737,7 @@
                 <a:solidFill>
                   <a:srgbClr val="FFFFFF"/>
                 </a:solidFill>
-                <a:latin typeface="Calibri"/>
+                <a:latin typeface="Times New Roman"/>
               </a:rPr>
               <a:t>Resilon: </a:t>
             </a:r>
@@ -9746,15 +9746,15 @@
                 <a:solidFill>
                   <a:srgbClr val="FFFFFF"/>
                 </a:solidFill>
-                <a:latin typeface="Calibri"/>
+                <a:latin typeface="Times New Roman"/>
               </a:rPr>
-              <a:t>monoblok g'oyasi, gidroliz muammosi</a:t>
+              <a:t>yaxlit bog'lanish g'oyasi, biroq gidrolizga uchraydi</a:t>
             </a:r>
           </a:p>
           <a:p>
             <a:pPr>
               <a:lnSpc>
-                <a:spcPct val="115000"/>
+                <a:spcPct val="112000"/>
               </a:lnSpc>
               <a:spcBef>
                 <a:spcPts val="100"/>
@@ -9768,7 +9768,7 @@
                 <a:solidFill>
                   <a:srgbClr val="00BFA6"/>
                 </a:solidFill>
-                <a:latin typeface="Calibri"/>
+                <a:latin typeface="Times New Roman"/>
               </a:rPr>
               <a:t>●  </a:t>
             </a:r>
@@ -9777,24 +9777,24 @@
                 <a:solidFill>
                   <a:srgbClr val="FFFFFF"/>
                 </a:solidFill>
-                <a:latin typeface="Calibri"/>
+                <a:latin typeface="Times New Roman"/>
               </a:rPr>
-              <a:t>MTA plug: </a:t>
+              <a:t>MTA tiqin: </a:t>
             </a:r>
             <a:r>
               <a:rPr sz="1000">
                 <a:solidFill>
                   <a:srgbClr val="FFFFFF"/>
                 </a:solidFill>
-                <a:latin typeface="Calibri"/>
+                <a:latin typeface="Times New Roman"/>
               </a:rPr>
-              <a:t>ochiq apeksda 3–5 mm to'siq</a:t>
+              <a:t>ochiq apeksda 3–5 mm apikal to'siq</a:t>
             </a:r>
           </a:p>
           <a:p>
             <a:pPr>
               <a:lnSpc>
-                <a:spcPct val="115000"/>
+                <a:spcPct val="112000"/>
               </a:lnSpc>
               <a:spcBef>
                 <a:spcPts val="100"/>
@@ -9808,7 +9808,7 @@
                 <a:solidFill>
                   <a:srgbClr val="00BFA6"/>
                 </a:solidFill>
-                <a:latin typeface="Calibri"/>
+                <a:latin typeface="Times New Roman"/>
               </a:rPr>
               <a:t>●  </a:t>
             </a:r>
@@ -9817,18 +9817,18 @@
                 <a:solidFill>
                   <a:srgbClr val="FFFFFF"/>
                 </a:solidFill>
-                <a:latin typeface="Calibri"/>
+                <a:latin typeface="Times New Roman"/>
               </a:rPr>
-              <a:t>Kumush / titan shtiftlar: </a:t>
+              <a:t>Kumush va titan shtiftlar: </a:t>
             </a:r>
             <a:r>
               <a:rPr sz="1000">
                 <a:solidFill>
                   <a:srgbClr val="FFFFFF"/>
                 </a:solidFill>
-                <a:latin typeface="Calibri"/>
+                <a:latin typeface="Times New Roman"/>
               </a:rPr>
-              <a:t>tarixiy, cheklangan</a:t>
+              <a:t>tarixiy ahamiyat, cheklangan qo'llaniladi</a:t>
             </a:r>
           </a:p>
         </p:txBody>
@@ -9990,7 +9990,7 @@
                 <a:solidFill>
                   <a:srgbClr val="FFFFFF"/>
                 </a:solidFill>
-                <a:latin typeface="Calibri"/>
+                <a:latin typeface="Times New Roman"/>
               </a:rPr>
               <a:t>15</a:t>
             </a:r>
@@ -10024,7 +10024,7 @@
                 <a:solidFill>
                   <a:srgbClr val="00BFA6"/>
                 </a:solidFill>
-                <a:latin typeface="Calibri"/>
+                <a:latin typeface="Times New Roman"/>
               </a:defRPr>
             </a:pPr>
             <a:r>
@@ -10060,11 +10060,11 @@
                 <a:solidFill>
                   <a:srgbClr val="FFFFFF"/>
                 </a:solidFill>
-                <a:latin typeface="Calibri Light"/>
+                <a:latin typeface="Times New Roman"/>
               </a:defRPr>
             </a:pPr>
             <a:r>
-              <a:t>Gutta-percha + sealer: nega aynan kombinatsiya?</a:t>
+              <a:t>Gutta-percha + sealer: kombinatsiyaning ilmiy asosi</a:t>
             </a:r>
           </a:p>
         </p:txBody>
@@ -10096,7 +10096,7 @@
                 <a:solidFill>
                   <a:srgbClr val="5A6D80"/>
                 </a:solidFill>
-                <a:latin typeface="Calibri"/>
+                <a:latin typeface="Times New Roman"/>
               </a:defRPr>
             </a:pPr>
             <a:r>
@@ -10132,7 +10132,7 @@
                 <a:solidFill>
                   <a:srgbClr val="5A6D80"/>
                 </a:solidFill>
-                <a:latin typeface="Calibri"/>
+                <a:latin typeface="Times New Roman"/>
               </a:defRPr>
             </a:pPr>
             <a:r>
@@ -10295,15 +10295,15 @@
           <a:lstStyle/>
           <a:p>
             <a:pPr algn="ctr">
-              <a:defRPr sz="1350" b="1" i="0">
+              <a:defRPr sz="1250" b="1" i="0">
                 <a:solidFill>
                   <a:srgbClr val="00BFA6"/>
                 </a:solidFill>
-                <a:latin typeface="Calibri"/>
+                <a:latin typeface="Times New Roman"/>
               </a:defRPr>
             </a:pPr>
             <a:r>
-              <a:t>GUTTA-PERCHA (hajm to'ldiruvchi o'zak)   +   SEALER (mikrotirqish germetigi)   =   3D OBTURATSIYA</a:t>
+              <a:t>GUTTA-PERCHA (hajm to'ldiruvchi o'zak)  +  SEALER (mikrotirqishlarni zichlovchi malham)  =  UCH O'LCHAMLI OBTURATSIYA</a:t>
             </a:r>
           </a:p>
         </p:txBody>
@@ -10466,7 +10466,7 @@
                 <a:solidFill>
                   <a:srgbClr val="FFFFFF"/>
                 </a:solidFill>
-                <a:latin typeface="Calibri"/>
+                <a:latin typeface="Times New Roman"/>
               </a:defRPr>
             </a:pPr>
             <a:r>
@@ -10506,11 +10506,11 @@
                 <a:solidFill>
                   <a:srgbClr val="1A2B3C"/>
                 </a:solidFill>
-                <a:latin typeface="Calibri"/>
+                <a:latin typeface="Times New Roman"/>
               </a:defRPr>
             </a:pPr>
             <a:r>
-              <a:t>Sealer qatlami 25–50 mkm — qisqarish kam, germetiklik yuqori.</a:t>
+              <a:t>Sealer qatlami 25–50 µm — qisqarish kam, germetiklik yuqori.</a:t>
             </a:r>
           </a:p>
         </p:txBody>
@@ -10673,15 +10673,15 @@
                 <a:solidFill>
                   <a:srgbClr val="FFFFFF"/>
                 </a:solidFill>
-                <a:latin typeface="Calibri"/>
+                <a:latin typeface="Times New Roman"/>
               </a:defRPr>
             </a:pPr>
             <a:r>
-              <a:t>Faqat pasta: ~70%</a:t>
+              <a:t>Faqat pasta: ~70 %</a:t>
             </a:r>
             <a:br/>
             <a:r>
-              <a:t>Kombinatsiya: 90–95%</a:t>
+              <a:t>Kombinatsiya: 90–95 %</a:t>
             </a:r>
           </a:p>
         </p:txBody>
@@ -10713,11 +10713,11 @@
                 <a:solidFill>
                   <a:srgbClr val="1A2B3C"/>
                 </a:solidFill>
-                <a:latin typeface="Calibri"/>
+                <a:latin typeface="Times New Roman"/>
               </a:defRPr>
             </a:pPr>
             <a:r>
-              <a:t>Kondensatsiyalangan gutta-percha + sealer keskin ustun (klinik tadqiqotlar).</a:t>
+              <a:t>Zichlashtirilgan gutta-percha + sealer sezilarli ustun (klinik tadqiqotlar).</a:t>
             </a:r>
           </a:p>
         </p:txBody>
@@ -10880,15 +10880,15 @@
                 <a:solidFill>
                   <a:srgbClr val="FFFFFF"/>
                 </a:solidFill>
-                <a:latin typeface="Calibri"/>
+                <a:latin typeface="Times New Roman"/>
               </a:defRPr>
             </a:pPr>
             <a:r>
-              <a:t>Apikal uchlik —</a:t>
+              <a:t>Apikal uchdan bir qism —</a:t>
             </a:r>
             <a:br/>
             <a:r>
-              <a:t>eng kritik zona</a:t>
+              <a:t>eng mas'uliyatli soha</a:t>
             </a:r>
           </a:p>
         </p:txBody>
@@ -10920,11 +10920,11 @@
                 <a:solidFill>
                   <a:srgbClr val="1A2B3C"/>
                 </a:solidFill>
-                <a:latin typeface="Calibri"/>
+                <a:latin typeface="Times New Roman"/>
               </a:defRPr>
             </a:pPr>
             <a:r>
-              <a:t>Apikal 3–4 mm da zichlash maksimal bo'lishi shart.</a:t>
+              <a:t>Aynan apikal 3–4 mm da zichlash eng yuqori bo'lishi shart.</a:t>
             </a:r>
           </a:p>
         </p:txBody>
@@ -11068,11 +11068,11 @@
                 <a:solidFill>
                   <a:srgbClr val="5A6D80"/>
                 </a:solidFill>
-                <a:latin typeface="Calibri"/>
+                <a:latin typeface="Times New Roman"/>
               </a:defRPr>
             </a:pPr>
             <a:r>
-              <a:t>Muvaffaqiyatli obturatsiya rentgeni (sxematik)</a:t>
+              <a:t>Muvaffaqiyatli obturatsiya rentgenogrammasi (sxematik tasvir)</a:t>
             </a:r>
           </a:p>
         </p:txBody>
@@ -11236,7 +11236,7 @@
                 <a:solidFill>
                   <a:srgbClr val="FFD27A"/>
                 </a:solidFill>
-                <a:latin typeface="Calibri"/>
+                <a:latin typeface="Times New Roman"/>
               </a:rPr>
               <a:t>◆ ILMIY DALIL  </a:t>
             </a:r>
@@ -11245,9 +11245,9 @@
                 <a:solidFill>
                   <a:srgbClr val="FFFFFF"/>
                 </a:solidFill>
-                <a:latin typeface="Calibri"/>
+                <a:latin typeface="Times New Roman"/>
               </a:rPr>
-              <a:t>Ray &amp; Trope, 1995: koronal germetiklik (plomba/toj) sifati periapikal sog'liqqa ildiz kanali plombasi sifaticha kuchli ta'sir qiladi. Rentgen-mezoni: bir xil zichlik • bo'shliqlarsiz • ishchi uzunlikda tugash.</a:t>
+              <a:t>Ray va Trope, 1995: koronal germetiklik (plomba yoki qoplama) sifati periapikal to'qimalar sog'lig'iga ildiz kanali plombasi sifaticha kuchli ta'sir ko'rsatadi. Rentgenologik mezon: bir xil zichlik • bo'shliqlarsiz • ishchi uzunlikda yakunlanish.</a:t>
             </a:r>
           </a:p>
         </p:txBody>
@@ -11409,7 +11409,7 @@
                 <a:solidFill>
                   <a:srgbClr val="FFFFFF"/>
                 </a:solidFill>
-                <a:latin typeface="Calibri"/>
+                <a:latin typeface="Times New Roman"/>
               </a:rPr>
               <a:t>16</a:t>
             </a:r>
@@ -11443,7 +11443,7 @@
                 <a:solidFill>
                   <a:srgbClr val="00BFA6"/>
                 </a:solidFill>
-                <a:latin typeface="Calibri"/>
+                <a:latin typeface="Times New Roman"/>
               </a:defRPr>
             </a:pPr>
             <a:r>
@@ -11479,7 +11479,7 @@
                 <a:solidFill>
                   <a:srgbClr val="FFFFFF"/>
                 </a:solidFill>
-                <a:latin typeface="Calibri Light"/>
+                <a:latin typeface="Times New Roman"/>
               </a:defRPr>
             </a:pPr>
             <a:r>
@@ -11515,7 +11515,7 @@
                 <a:solidFill>
                   <a:srgbClr val="5A6D80"/>
                 </a:solidFill>
-                <a:latin typeface="Calibri"/>
+                <a:latin typeface="Times New Roman"/>
               </a:defRPr>
             </a:pPr>
             <a:r>
@@ -11551,7 +11551,7 @@
                 <a:solidFill>
                   <a:srgbClr val="5A6D80"/>
                 </a:solidFill>
-                <a:latin typeface="Calibri"/>
+                <a:latin typeface="Times New Roman"/>
               </a:defRPr>
             </a:pPr>
             <a:r>
@@ -11761,7 +11761,7 @@
                 <a:solidFill>
                   <a:srgbClr val="FFFFFF"/>
                 </a:solidFill>
-                <a:latin typeface="Calibri"/>
+                <a:latin typeface="Times New Roman"/>
               </a:defRPr>
             </a:pPr>
             <a:r>
@@ -11794,7 +11794,7 @@
           <a:p>
             <a:pPr>
               <a:lnSpc>
-                <a:spcPct val="115000"/>
+                <a:spcPct val="112000"/>
               </a:lnSpc>
               <a:spcBef>
                 <a:spcPts val="100"/>
@@ -11808,7 +11808,7 @@
                 <a:solidFill>
                   <a:srgbClr val="1E88E5"/>
                 </a:solidFill>
-                <a:latin typeface="Calibri"/>
+                <a:latin typeface="Times New Roman"/>
               </a:rPr>
               <a:t>1.  </a:t>
             </a:r>
@@ -11817,16 +11817,16 @@
                 <a:solidFill>
                   <a:srgbClr val="1A2B3C"/>
                 </a:solidFill>
-                <a:latin typeface="Calibri"/>
+                <a:latin typeface="Times New Roman"/>
               </a:rPr>
-              <a:t>Markaziy shtift </a:t>
+              <a:t>Yakka shtift </a:t>
             </a:r>
             <a:r>
               <a:rPr sz="1150">
                 <a:solidFill>
                   <a:srgbClr val="1A2B3C"/>
                 </a:solidFill>
-                <a:latin typeface="Calibri"/>
+                <a:latin typeface="Times New Roman"/>
               </a:rPr>
               <a:t>(single-cone) — tez, oson, arzon</a:t>
             </a:r>
@@ -11834,7 +11834,7 @@
           <a:p>
             <a:pPr>
               <a:lnSpc>
-                <a:spcPct val="115000"/>
+                <a:spcPct val="112000"/>
               </a:lnSpc>
               <a:spcBef>
                 <a:spcPts val="100"/>
@@ -11848,7 +11848,7 @@
                 <a:solidFill>
                   <a:srgbClr val="1E88E5"/>
                 </a:solidFill>
-                <a:latin typeface="Calibri"/>
+                <a:latin typeface="Times New Roman"/>
               </a:rPr>
               <a:t>2.  </a:t>
             </a:r>
@@ -11857,7 +11857,7 @@
                 <a:solidFill>
                   <a:srgbClr val="1A2B3C"/>
                 </a:solidFill>
-                <a:latin typeface="Calibri"/>
+                <a:latin typeface="Times New Roman"/>
               </a:rPr>
               <a:t>Lateral kondensatsiya </a:t>
             </a:r>
@@ -11866,15 +11866,15 @@
                 <a:solidFill>
                   <a:srgbClr val="1A2B3C"/>
                 </a:solidFill>
-                <a:latin typeface="Calibri"/>
+                <a:latin typeface="Times New Roman"/>
               </a:rPr>
-              <a:t>(sovuq) — klassik oltin standart</a:t>
+              <a:t>(sovuq zichlash) — klassik oltin standart</a:t>
             </a:r>
           </a:p>
           <a:p>
             <a:pPr>
               <a:lnSpc>
-                <a:spcPct val="115000"/>
+                <a:spcPct val="112000"/>
               </a:lnSpc>
               <a:spcBef>
                 <a:spcPts val="100"/>
@@ -11888,7 +11888,7 @@
                 <a:solidFill>
                   <a:srgbClr val="1E88E5"/>
                 </a:solidFill>
-                <a:latin typeface="Calibri"/>
+                <a:latin typeface="Times New Roman"/>
               </a:rPr>
               <a:t>3.  </a:t>
             </a:r>
@@ -11897,24 +11897,24 @@
                 <a:solidFill>
                   <a:srgbClr val="1A2B3C"/>
                 </a:solidFill>
-                <a:latin typeface="Calibri"/>
+                <a:latin typeface="Times New Roman"/>
               </a:rPr>
-              <a:t>Biokeramik single-cone </a:t>
+              <a:t>Biokeramik yakka shtift </a:t>
             </a:r>
             <a:r>
               <a:rPr sz="1150">
                 <a:solidFill>
                   <a:srgbClr val="1A2B3C"/>
                 </a:solidFill>
-                <a:latin typeface="Calibri"/>
+                <a:latin typeface="Times New Roman"/>
               </a:rPr>
-              <a:t>— zamonaviy sodda protokol</a:t>
+              <a:t>— zamonaviy soddalashtirilgan protokol</a:t>
             </a:r>
           </a:p>
           <a:p>
             <a:pPr>
               <a:lnSpc>
-                <a:spcPct val="115000"/>
+                <a:spcPct val="112000"/>
               </a:lnSpc>
               <a:spcBef>
                 <a:spcPts val="100"/>
@@ -11928,7 +11928,7 @@
                 <a:solidFill>
                   <a:srgbClr val="1E88E5"/>
                 </a:solidFill>
-                <a:latin typeface="Calibri"/>
+                <a:latin typeface="Times New Roman"/>
               </a:rPr>
               <a:t>◈   </a:t>
             </a:r>
@@ -11937,18 +11937,18 @@
                 <a:solidFill>
                   <a:srgbClr val="1A2B3C"/>
                 </a:solidFill>
-                <a:latin typeface="Calibri"/>
+                <a:latin typeface="Times New Roman"/>
               </a:rPr>
-              <a:t>Afzallik: </a:t>
+              <a:t>Afzalligi: </a:t>
             </a:r>
             <a:r>
               <a:rPr sz="1150">
                 <a:solidFill>
                   <a:srgbClr val="1A2B3C"/>
                 </a:solidFill>
-                <a:latin typeface="Calibri"/>
+                <a:latin typeface="Times New Roman"/>
               </a:rPr>
-              <a:t>maxsus jihoz shart emas, retreatment oson</a:t>
+              <a:t>maxsus jihoz talab qilinmaydi, qayta davolash oson</a:t>
             </a:r>
           </a:p>
         </p:txBody>
@@ -12107,15 +12107,15 @@
           <a:lstStyle/>
           <a:p>
             <a:pPr algn="ctr">
-              <a:defRPr sz="1250" b="1" i="0">
+              <a:defRPr sz="1200" b="1" i="0">
                 <a:solidFill>
                   <a:srgbClr val="FFFFFF"/>
                 </a:solidFill>
-                <a:latin typeface="Calibri"/>
+                <a:latin typeface="Times New Roman"/>
               </a:defRPr>
             </a:pPr>
             <a:r>
-              <a:t>♨  ISSIQ USULLAR (plastifikatsiya)</a:t>
+              <a:t>♨  ISSIQ USULLAR (issiqlikda yumshatish)</a:t>
             </a:r>
           </a:p>
         </p:txBody>
@@ -12144,7 +12144,7 @@
           <a:p>
             <a:pPr>
               <a:lnSpc>
-                <a:spcPct val="115000"/>
+                <a:spcPct val="112000"/>
               </a:lnSpc>
               <a:spcBef>
                 <a:spcPts val="100"/>
@@ -12158,7 +12158,7 @@
                 <a:solidFill>
                   <a:srgbClr val="FF6F00"/>
                 </a:solidFill>
-                <a:latin typeface="Calibri"/>
+                <a:latin typeface="Times New Roman"/>
               </a:rPr>
               <a:t>1.  </a:t>
             </a:r>
@@ -12167,7 +12167,7 @@
                 <a:solidFill>
                   <a:srgbClr val="1A2B3C"/>
                 </a:solidFill>
-                <a:latin typeface="Calibri"/>
+                <a:latin typeface="Times New Roman"/>
               </a:rPr>
               <a:t>Vertikal kondensatsiya </a:t>
             </a:r>
@@ -12176,7 +12176,7 @@
                 <a:solidFill>
                   <a:srgbClr val="1A2B3C"/>
                 </a:solidFill>
-                <a:latin typeface="Calibri"/>
+                <a:latin typeface="Times New Roman"/>
               </a:rPr>
               <a:t>(Schilder, 1967)</a:t>
             </a:r>
@@ -12184,7 +12184,7 @@
           <a:p>
             <a:pPr>
               <a:lnSpc>
-                <a:spcPct val="115000"/>
+                <a:spcPct val="112000"/>
               </a:lnSpc>
               <a:spcBef>
                 <a:spcPts val="100"/>
@@ -12198,7 +12198,7 @@
                 <a:solidFill>
                   <a:srgbClr val="FF6F00"/>
                 </a:solidFill>
-                <a:latin typeface="Calibri"/>
+                <a:latin typeface="Times New Roman"/>
               </a:rPr>
               <a:t>2.  </a:t>
             </a:r>
@@ -12207,7 +12207,7 @@
                 <a:solidFill>
                   <a:srgbClr val="1A2B3C"/>
                 </a:solidFill>
-                <a:latin typeface="Calibri"/>
+                <a:latin typeface="Times New Roman"/>
               </a:rPr>
               <a:t>Uzluksiz to'lqin </a:t>
             </a:r>
@@ -12216,15 +12216,15 @@
                 <a:solidFill>
                   <a:srgbClr val="1A2B3C"/>
                 </a:solidFill>
-                <a:latin typeface="Calibri"/>
+                <a:latin typeface="Times New Roman"/>
               </a:rPr>
-              <a:t>(Buchanan — System B)</a:t>
+              <a:t>(continuous wave — Buchanan, System B)</a:t>
             </a:r>
           </a:p>
           <a:p>
             <a:pPr>
               <a:lnSpc>
-                <a:spcPct val="115000"/>
+                <a:spcPct val="112000"/>
               </a:lnSpc>
               <a:spcBef>
                 <a:spcPts val="100"/>
@@ -12238,7 +12238,7 @@
                 <a:solidFill>
                   <a:srgbClr val="FF6F00"/>
                 </a:solidFill>
-                <a:latin typeface="Calibri"/>
+                <a:latin typeface="Times New Roman"/>
               </a:rPr>
               <a:t>3.  </a:t>
             </a:r>
@@ -12247,7 +12247,7 @@
                 <a:solidFill>
                   <a:srgbClr val="1A2B3C"/>
                 </a:solidFill>
-                <a:latin typeface="Calibri"/>
+                <a:latin typeface="Times New Roman"/>
               </a:rPr>
               <a:t>Termoplastik in'ektsiya </a:t>
             </a:r>
@@ -12256,7 +12256,7 @@
                 <a:solidFill>
                   <a:srgbClr val="1A2B3C"/>
                 </a:solidFill>
-                <a:latin typeface="Calibri"/>
+                <a:latin typeface="Times New Roman"/>
               </a:rPr>
               <a:t>(Obtura, Calamus, BeeFill)</a:t>
             </a:r>
@@ -12264,7 +12264,7 @@
           <a:p>
             <a:pPr>
               <a:lnSpc>
-                <a:spcPct val="115000"/>
+                <a:spcPct val="112000"/>
               </a:lnSpc>
               <a:spcBef>
                 <a:spcPts val="100"/>
@@ -12278,7 +12278,7 @@
                 <a:solidFill>
                   <a:srgbClr val="FF6F00"/>
                 </a:solidFill>
-                <a:latin typeface="Calibri"/>
+                <a:latin typeface="Times New Roman"/>
               </a:rPr>
               <a:t>4.  </a:t>
             </a:r>
@@ -12287,16 +12287,16 @@
                 <a:solidFill>
                   <a:srgbClr val="1A2B3C"/>
                 </a:solidFill>
-                <a:latin typeface="Calibri"/>
+                <a:latin typeface="Times New Roman"/>
               </a:rPr>
-              <a:t>Tashuvchili </a:t>
+              <a:t>Tashuvchi o'zakli usul </a:t>
             </a:r>
             <a:r>
               <a:rPr sz="1150">
                 <a:solidFill>
                   <a:srgbClr val="1A2B3C"/>
                 </a:solidFill>
-                <a:latin typeface="Calibri"/>
+                <a:latin typeface="Times New Roman"/>
               </a:rPr>
               <a:t>(Thermafil, GuttaCore)</a:t>
             </a:r>
@@ -12330,11 +12330,11 @@
                 <a:solidFill>
                   <a:srgbClr val="0B2C4A"/>
                 </a:solidFill>
-                <a:latin typeface="Calibri"/>
+                <a:latin typeface="Times New Roman"/>
               </a:defRPr>
             </a:pPr>
             <a:r>
-              <a:t>Tanlov omillari:  kanal anatomiyasi (oval / egri / keng)  +  jihoz mavjudligi  +  shifokor malakasi</a:t>
+              <a:t>Tanlash omillari:  kanal shakli (oval / qiyshiq / keng)  +  jihozlar mavjudligi  +  shifokor malakasi</a:t>
             </a:r>
           </a:p>
         </p:txBody>
@@ -12496,7 +12496,7 @@
                 <a:solidFill>
                   <a:srgbClr val="FFFFFF"/>
                 </a:solidFill>
-                <a:latin typeface="Calibri"/>
+                <a:latin typeface="Times New Roman"/>
               </a:rPr>
               <a:t>17</a:t>
             </a:r>
@@ -12530,7 +12530,7 @@
                 <a:solidFill>
                   <a:srgbClr val="00BFA6"/>
                 </a:solidFill>
-                <a:latin typeface="Calibri"/>
+                <a:latin typeface="Times New Roman"/>
               </a:defRPr>
             </a:pPr>
             <a:r>
@@ -12566,11 +12566,11 @@
                 <a:solidFill>
                   <a:srgbClr val="FFFFFF"/>
                 </a:solidFill>
-                <a:latin typeface="Calibri Light"/>
+                <a:latin typeface="Times New Roman"/>
               </a:defRPr>
             </a:pPr>
             <a:r>
-              <a:t>Sovuq usullar: single-cone va lateral kondensatsiya</a:t>
+              <a:t>Sovuq usullar: yakka shtift va lateral kondensatsiya</a:t>
             </a:r>
           </a:p>
         </p:txBody>
@@ -12602,7 +12602,7 @@
                 <a:solidFill>
                   <a:srgbClr val="5A6D80"/>
                 </a:solidFill>
-                <a:latin typeface="Calibri"/>
+                <a:latin typeface="Times New Roman"/>
               </a:defRPr>
             </a:pPr>
             <a:r>
@@ -12638,7 +12638,7 @@
                 <a:solidFill>
                   <a:srgbClr val="5A6D80"/>
                 </a:solidFill>
-                <a:latin typeface="Calibri"/>
+                <a:latin typeface="Times New Roman"/>
               </a:defRPr>
             </a:pPr>
             <a:r>
@@ -12805,11 +12805,11 @@
                 <a:solidFill>
                   <a:srgbClr val="1E88E5"/>
                 </a:solidFill>
-                <a:latin typeface="Calibri"/>
+                <a:latin typeface="Times New Roman"/>
               </a:defRPr>
             </a:pPr>
             <a:r>
-              <a:t>A. Single-cone</a:t>
+              <a:t>A. Yakka shtift</a:t>
             </a:r>
           </a:p>
         </p:txBody>
@@ -12822,8 +12822,8 @@
         </p:nvSpPr>
         <p:spPr>
           <a:xfrm>
-            <a:off x="731520" y="2194560"/>
-            <a:ext cx="2651760" cy="2834640"/>
+            <a:off x="685800" y="2057400"/>
+            <a:ext cx="2743200" cy="274320"/>
           </a:xfrm>
           <a:prstGeom prst="rect">
             <a:avLst/>
@@ -12836,9 +12836,45 @@
           </a:bodyPr>
           <a:lstStyle/>
           <a:p>
+            <a:pPr algn="l">
+              <a:defRPr sz="950" b="0" i="0">
+                <a:solidFill>
+                  <a:srgbClr val="5A6D80"/>
+                </a:solidFill>
+                <a:latin typeface="Times New Roman"/>
+              </a:defRPr>
+            </a:pPr>
+            <a:r>
+              <a:t>(single-cone)</a:t>
+            </a:r>
+          </a:p>
+        </p:txBody>
+      </p:sp>
+      <p:sp>
+        <p:nvSpPr>
+          <p:cNvPr id="14" name="TextBox 13"/>
+          <p:cNvSpPr txBox="1"/>
+          <p:nvPr/>
+        </p:nvSpPr>
+        <p:spPr>
+          <a:xfrm>
+            <a:off x="731520" y="2377440"/>
+            <a:ext cx="2651760" cy="2651760"/>
+          </a:xfrm>
+          <a:prstGeom prst="rect">
+            <a:avLst/>
+          </a:prstGeom>
+          <a:noFill/>
+        </p:spPr>
+        <p:txBody>
+          <a:bodyPr wrap="square">
+            <a:spAutoFit/>
+          </a:bodyPr>
+          <a:lstStyle/>
+          <a:p>
             <a:pPr>
               <a:lnSpc>
-                <a:spcPct val="115000"/>
+                <a:spcPct val="112000"/>
               </a:lnSpc>
               <a:spcBef>
                 <a:spcPts val="100"/>
@@ -12852,7 +12888,7 @@
                 <a:solidFill>
                   <a:srgbClr val="009E8A"/>
                 </a:solidFill>
-                <a:latin typeface="Calibri"/>
+                <a:latin typeface="Times New Roman"/>
               </a:rPr>
               <a:t>▸  </a:t>
             </a:r>
@@ -12861,15 +12897,15 @@
                 <a:solidFill>
                   <a:srgbClr val="1A2B3C"/>
                 </a:solidFill>
-                <a:latin typeface="Calibri"/>
+                <a:latin typeface="Times New Roman"/>
               </a:rPr>
-              <a:t>Bitta master-shtift + sealer</a:t>
+              <a:t>Bitta asosiy shtift + sealer</a:t>
             </a:r>
           </a:p>
           <a:p>
             <a:pPr>
               <a:lnSpc>
-                <a:spcPct val="115000"/>
+                <a:spcPct val="112000"/>
               </a:lnSpc>
               <a:spcBef>
                 <a:spcPts val="100"/>
@@ -12883,7 +12919,7 @@
                 <a:solidFill>
                   <a:srgbClr val="009E8A"/>
                 </a:solidFill>
-                <a:latin typeface="Calibri"/>
+                <a:latin typeface="Times New Roman"/>
               </a:rPr>
               <a:t>▸  </a:t>
             </a:r>
@@ -12892,7 +12928,7 @@
                 <a:solidFill>
                   <a:srgbClr val="1A2B3C"/>
                 </a:solidFill>
-                <a:latin typeface="Calibri"/>
+                <a:latin typeface="Times New Roman"/>
               </a:rPr>
               <a:t>+: </a:t>
             </a:r>
@@ -12901,7 +12937,7 @@
                 <a:solidFill>
                   <a:srgbClr val="1A2B3C"/>
                 </a:solidFill>
-                <a:latin typeface="Calibri"/>
+                <a:latin typeface="Times New Roman"/>
               </a:rPr>
               <a:t>eng tez va oson usul</a:t>
             </a:r>
@@ -12909,7 +12945,7 @@
           <a:p>
             <a:pPr>
               <a:lnSpc>
-                <a:spcPct val="115000"/>
+                <a:spcPct val="112000"/>
               </a:lnSpc>
               <a:spcBef>
                 <a:spcPts val="100"/>
@@ -12923,7 +12959,7 @@
                 <a:solidFill>
                   <a:srgbClr val="009E8A"/>
                 </a:solidFill>
-                <a:latin typeface="Calibri"/>
+                <a:latin typeface="Times New Roman"/>
               </a:rPr>
               <a:t>▸  </a:t>
             </a:r>
@@ -12932,7 +12968,7 @@
                 <a:solidFill>
                   <a:srgbClr val="1A2B3C"/>
                 </a:solidFill>
-                <a:latin typeface="Calibri"/>
+                <a:latin typeface="Times New Roman"/>
               </a:rPr>
               <a:t>−: </a:t>
             </a:r>
@@ -12941,7 +12977,7 @@
                 <a:solidFill>
                   <a:srgbClr val="1A2B3C"/>
                 </a:solidFill>
-                <a:latin typeface="Calibri"/>
+                <a:latin typeface="Times New Roman"/>
               </a:rPr>
               <a:t>oval kanalda germetiklik past</a:t>
             </a:r>
@@ -12949,7 +12985,7 @@
           <a:p>
             <a:pPr>
               <a:lnSpc>
-                <a:spcPct val="115000"/>
+                <a:spcPct val="112000"/>
               </a:lnSpc>
               <a:spcBef>
                 <a:spcPts val="100"/>
@@ -12963,7 +12999,7 @@
                 <a:solidFill>
                   <a:srgbClr val="009E8A"/>
                 </a:solidFill>
-                <a:latin typeface="Calibri"/>
+                <a:latin typeface="Times New Roman"/>
               </a:rPr>
               <a:t>▸  </a:t>
             </a:r>
@@ -12972,7 +13008,7 @@
                 <a:solidFill>
                   <a:srgbClr val="1A2B3C"/>
                 </a:solidFill>
-                <a:latin typeface="Calibri"/>
+                <a:latin typeface="Times New Roman"/>
               </a:rPr>
               <a:t>◈: </a:t>
             </a:r>
@@ -12981,7 +13017,7 @@
                 <a:solidFill>
                   <a:srgbClr val="1A2B3C"/>
                 </a:solidFill>
-                <a:latin typeface="Calibri"/>
+                <a:latin typeface="Times New Roman"/>
               </a:rPr>
               <a:t>biokeramik sealer bilan samarali!</a:t>
             </a:r>
@@ -12990,7 +13026,7 @@
       </p:sp>
       <p:sp>
         <p:nvSpPr>
-          <p:cNvPr id="14" name="Rounded Rectangle 13"/>
+          <p:cNvPr id="15" name="Rounded Rectangle 14"/>
           <p:cNvSpPr/>
           <p:nvPr/>
         </p:nvSpPr>
@@ -13033,7 +13069,7 @@
       </p:sp>
       <p:sp>
         <p:nvSpPr>
-          <p:cNvPr id="15" name="Rounded Rectangle 14"/>
+          <p:cNvPr id="16" name="Rounded Rectangle 15"/>
           <p:cNvSpPr/>
           <p:nvPr/>
         </p:nvSpPr>
@@ -13078,7 +13114,7 @@
       </p:sp>
       <p:sp>
         <p:nvSpPr>
-          <p:cNvPr id="16" name="TextBox 15"/>
+          <p:cNvPr id="17" name="TextBox 16"/>
           <p:cNvSpPr txBox="1"/>
           <p:nvPr/>
         </p:nvSpPr>
@@ -13103,7 +13139,7 @@
                 <a:solidFill>
                   <a:srgbClr val="0B2C4A"/>
                 </a:solidFill>
-                <a:latin typeface="Calibri"/>
+                <a:latin typeface="Times New Roman"/>
               </a:defRPr>
             </a:pPr>
             <a:r>
@@ -13114,14 +13150,14 @@
       </p:sp>
       <p:sp>
         <p:nvSpPr>
-          <p:cNvPr id="17" name="Oval 16"/>
+          <p:cNvPr id="18" name="Oval 17"/>
           <p:cNvSpPr/>
           <p:nvPr/>
         </p:nvSpPr>
         <p:spPr>
           <a:xfrm>
             <a:off x="3977639" y="2212848"/>
-            <a:ext cx="329184" cy="329184"/>
+            <a:ext cx="310896" cy="310896"/>
           </a:xfrm>
           <a:prstGeom prst="ellipse">
             <a:avLst/>
@@ -13153,11 +13189,11 @@
           <a:p>
             <a:pPr algn="ctr"/>
             <a:r>
-              <a:rPr sz="1000" b="1">
+              <a:rPr sz="900" b="1">
                 <a:solidFill>
                   <a:srgbClr val="FFFFFF"/>
                 </a:solidFill>
-                <a:latin typeface="Calibri"/>
+                <a:latin typeface="Times New Roman"/>
               </a:rPr>
               <a:t>1</a:t>
             </a:r>
@@ -13166,14 +13202,14 @@
       </p:sp>
       <p:sp>
         <p:nvSpPr>
-          <p:cNvPr id="18" name="TextBox 17"/>
+          <p:cNvPr id="19" name="TextBox 18"/>
           <p:cNvSpPr txBox="1"/>
           <p:nvPr/>
         </p:nvSpPr>
         <p:spPr>
           <a:xfrm>
-            <a:off x="4407408" y="2212848"/>
-            <a:ext cx="3657600" cy="329184"/>
+            <a:off x="4389120" y="2212848"/>
+            <a:ext cx="3703320" cy="329184"/>
           </a:xfrm>
           <a:prstGeom prst="rect">
             <a:avLst/>
@@ -13187,29 +13223,29 @@
           <a:lstStyle/>
           <a:p>
             <a:pPr algn="l">
-              <a:defRPr sz="1000" b="0" i="0">
+              <a:defRPr sz="950" b="0" i="0">
                 <a:solidFill>
                   <a:srgbClr val="1A2B3C"/>
                 </a:solidFill>
-                <a:latin typeface="Calibri"/>
+                <a:latin typeface="Times New Roman"/>
               </a:defRPr>
             </a:pPr>
             <a:r>
-              <a:t>Master-shtift tanlash (tug-fit)</a:t>
-            </a:r>
-          </a:p>
-        </p:txBody>
-      </p:sp>
-      <p:sp>
-        <p:nvSpPr>
-          <p:cNvPr id="19" name="Oval 18"/>
+              <a:t>Asosiy shtift tanlash (tug-fit tiqilish)</a:t>
+            </a:r>
+          </a:p>
+        </p:txBody>
+      </p:sp>
+      <p:sp>
+        <p:nvSpPr>
+          <p:cNvPr id="20" name="Oval 19"/>
           <p:cNvSpPr/>
           <p:nvPr/>
         </p:nvSpPr>
         <p:spPr>
           <a:xfrm>
-            <a:off x="3977639" y="2596896"/>
-            <a:ext cx="329184" cy="329184"/>
+            <a:off x="3977639" y="2578608"/>
+            <a:ext cx="310896" cy="310896"/>
           </a:xfrm>
           <a:prstGeom prst="ellipse">
             <a:avLst/>
@@ -13241,11 +13277,11 @@
           <a:p>
             <a:pPr algn="ctr"/>
             <a:r>
-              <a:rPr sz="1000" b="1">
+              <a:rPr sz="900" b="1">
                 <a:solidFill>
                   <a:srgbClr val="FFFFFF"/>
                 </a:solidFill>
-                <a:latin typeface="Calibri"/>
+                <a:latin typeface="Times New Roman"/>
               </a:rPr>
               <a:t>2</a:t>
             </a:r>
@@ -13254,14 +13290,14 @@
       </p:sp>
       <p:sp>
         <p:nvSpPr>
-          <p:cNvPr id="20" name="TextBox 19"/>
+          <p:cNvPr id="21" name="TextBox 20"/>
           <p:cNvSpPr txBox="1"/>
           <p:nvPr/>
         </p:nvSpPr>
         <p:spPr>
           <a:xfrm>
-            <a:off x="4407408" y="2596896"/>
-            <a:ext cx="3657600" cy="329184"/>
+            <a:off x="4389120" y="2578608"/>
+            <a:ext cx="3703320" cy="329184"/>
           </a:xfrm>
           <a:prstGeom prst="rect">
             <a:avLst/>
@@ -13275,11 +13311,11 @@
           <a:lstStyle/>
           <a:p>
             <a:pPr algn="l">
-              <a:defRPr sz="1000" b="0" i="0">
+              <a:defRPr sz="950" b="0" i="0">
                 <a:solidFill>
                   <a:srgbClr val="1A2B3C"/>
                 </a:solidFill>
-                <a:latin typeface="Calibri"/>
+                <a:latin typeface="Times New Roman"/>
               </a:defRPr>
             </a:pPr>
             <a:r>
@@ -13290,14 +13326,14 @@
       </p:sp>
       <p:sp>
         <p:nvSpPr>
-          <p:cNvPr id="21" name="Oval 20"/>
+          <p:cNvPr id="22" name="Oval 21"/>
           <p:cNvSpPr/>
           <p:nvPr/>
         </p:nvSpPr>
         <p:spPr>
           <a:xfrm>
-            <a:off x="3977639" y="2980944"/>
-            <a:ext cx="329184" cy="329184"/>
+            <a:off x="3977639" y="2944368"/>
+            <a:ext cx="310896" cy="310896"/>
           </a:xfrm>
           <a:prstGeom prst="ellipse">
             <a:avLst/>
@@ -13329,11 +13365,11 @@
           <a:p>
             <a:pPr algn="ctr"/>
             <a:r>
-              <a:rPr sz="1000" b="1">
+              <a:rPr sz="900" b="1">
                 <a:solidFill>
                   <a:srgbClr val="FFFFFF"/>
                 </a:solidFill>
-                <a:latin typeface="Calibri"/>
+                <a:latin typeface="Times New Roman"/>
               </a:rPr>
               <a:t>3</a:t>
             </a:r>
@@ -13342,14 +13378,14 @@
       </p:sp>
       <p:sp>
         <p:nvSpPr>
-          <p:cNvPr id="22" name="TextBox 21"/>
+          <p:cNvPr id="23" name="TextBox 22"/>
           <p:cNvSpPr txBox="1"/>
           <p:nvPr/>
         </p:nvSpPr>
         <p:spPr>
           <a:xfrm>
-            <a:off x="4407408" y="2980944"/>
-            <a:ext cx="3657600" cy="329184"/>
+            <a:off x="4389120" y="2944368"/>
+            <a:ext cx="3703320" cy="329184"/>
           </a:xfrm>
           <a:prstGeom prst="rect">
             <a:avLst/>
@@ -13363,29 +13399,29 @@
           <a:lstStyle/>
           <a:p>
             <a:pPr algn="l">
-              <a:defRPr sz="1000" b="0" i="0">
+              <a:defRPr sz="950" b="0" i="0">
                 <a:solidFill>
                   <a:srgbClr val="1A2B3C"/>
                 </a:solidFill>
-                <a:latin typeface="Calibri"/>
+                <a:latin typeface="Times New Roman"/>
               </a:defRPr>
             </a:pPr>
             <a:r>
-              <a:t>Master-shtiftni joylash</a:t>
-            </a:r>
-          </a:p>
-        </p:txBody>
-      </p:sp>
-      <p:sp>
-        <p:nvSpPr>
-          <p:cNvPr id="23" name="Oval 22"/>
+              <a:t>Asosiy shtiftni joylashtirish</a:t>
+            </a:r>
+          </a:p>
+        </p:txBody>
+      </p:sp>
+      <p:sp>
+        <p:nvSpPr>
+          <p:cNvPr id="24" name="Oval 23"/>
           <p:cNvSpPr/>
           <p:nvPr/>
         </p:nvSpPr>
         <p:spPr>
           <a:xfrm>
-            <a:off x="3977639" y="3364991"/>
-            <a:ext cx="329184" cy="329184"/>
+            <a:off x="3977639" y="3310128"/>
+            <a:ext cx="310896" cy="310896"/>
           </a:xfrm>
           <a:prstGeom prst="ellipse">
             <a:avLst/>
@@ -13417,11 +13453,11 @@
           <a:p>
             <a:pPr algn="ctr"/>
             <a:r>
-              <a:rPr sz="1000" b="1">
+              <a:rPr sz="900" b="1">
                 <a:solidFill>
                   <a:srgbClr val="FFFFFF"/>
                 </a:solidFill>
-                <a:latin typeface="Calibri"/>
+                <a:latin typeface="Times New Roman"/>
               </a:rPr>
               <a:t>4</a:t>
             </a:r>
@@ -13430,14 +13466,14 @@
       </p:sp>
       <p:sp>
         <p:nvSpPr>
-          <p:cNvPr id="24" name="TextBox 23"/>
+          <p:cNvPr id="25" name="TextBox 24"/>
           <p:cNvSpPr txBox="1"/>
           <p:nvPr/>
         </p:nvSpPr>
         <p:spPr>
           <a:xfrm>
-            <a:off x="4407408" y="3364991"/>
-            <a:ext cx="3657600" cy="329184"/>
+            <a:off x="4389120" y="3310128"/>
+            <a:ext cx="3703320" cy="329184"/>
           </a:xfrm>
           <a:prstGeom prst="rect">
             <a:avLst/>
@@ -13451,29 +13487,29 @@
           <a:lstStyle/>
           <a:p>
             <a:pPr algn="l">
-              <a:defRPr sz="1000" b="0" i="0">
+              <a:defRPr sz="950" b="0" i="0">
                 <a:solidFill>
                   <a:srgbClr val="1A2B3C"/>
                 </a:solidFill>
-                <a:latin typeface="Calibri"/>
+                <a:latin typeface="Times New Roman"/>
               </a:defRPr>
             </a:pPr>
             <a:r>
-              <a:t>Spreader bilan lateral siqish</a:t>
-            </a:r>
-          </a:p>
-        </p:txBody>
-      </p:sp>
-      <p:sp>
-        <p:nvSpPr>
-          <p:cNvPr id="25" name="Oval 24"/>
+              <a:t>Yoyuvchi asbob (spreader) bilan zichlash</a:t>
+            </a:r>
+          </a:p>
+        </p:txBody>
+      </p:sp>
+      <p:sp>
+        <p:nvSpPr>
+          <p:cNvPr id="26" name="Oval 25"/>
           <p:cNvSpPr/>
           <p:nvPr/>
         </p:nvSpPr>
         <p:spPr>
           <a:xfrm>
-            <a:off x="3977639" y="3749039"/>
-            <a:ext cx="329184" cy="329184"/>
+            <a:off x="3977639" y="3675887"/>
+            <a:ext cx="310896" cy="310896"/>
           </a:xfrm>
           <a:prstGeom prst="ellipse">
             <a:avLst/>
@@ -13505,11 +13541,11 @@
           <a:p>
             <a:pPr algn="ctr"/>
             <a:r>
-              <a:rPr sz="1000" b="1">
+              <a:rPr sz="900" b="1">
                 <a:solidFill>
                   <a:srgbClr val="FFFFFF"/>
                 </a:solidFill>
-                <a:latin typeface="Calibri"/>
+                <a:latin typeface="Times New Roman"/>
               </a:rPr>
               <a:t>5</a:t>
             </a:r>
@@ -13518,14 +13554,14 @@
       </p:sp>
       <p:sp>
         <p:nvSpPr>
-          <p:cNvPr id="26" name="TextBox 25"/>
+          <p:cNvPr id="27" name="TextBox 26"/>
           <p:cNvSpPr txBox="1"/>
           <p:nvPr/>
         </p:nvSpPr>
         <p:spPr>
           <a:xfrm>
-            <a:off x="4407408" y="3749039"/>
-            <a:ext cx="3657600" cy="329184"/>
+            <a:off x="4389120" y="3675887"/>
+            <a:ext cx="3703320" cy="329184"/>
           </a:xfrm>
           <a:prstGeom prst="rect">
             <a:avLst/>
@@ -13539,29 +13575,29 @@
           <a:lstStyle/>
           <a:p>
             <a:pPr algn="l">
-              <a:defRPr sz="1000" b="0" i="0">
+              <a:defRPr sz="950" b="0" i="0">
                 <a:solidFill>
                   <a:srgbClr val="1A2B3C"/>
                 </a:solidFill>
-                <a:latin typeface="Calibri"/>
+                <a:latin typeface="Times New Roman"/>
               </a:defRPr>
             </a:pPr>
             <a:r>
-              <a:t>Qo'shimcha shtiftlar kiritish</a:t>
-            </a:r>
-          </a:p>
-        </p:txBody>
-      </p:sp>
-      <p:sp>
-        <p:nvSpPr>
-          <p:cNvPr id="27" name="Oval 26"/>
+              <a:t>Qo'shimcha shtiftlarni kiritish</a:t>
+            </a:r>
+          </a:p>
+        </p:txBody>
+      </p:sp>
+      <p:sp>
+        <p:nvSpPr>
+          <p:cNvPr id="28" name="Oval 27"/>
           <p:cNvSpPr/>
           <p:nvPr/>
         </p:nvSpPr>
         <p:spPr>
           <a:xfrm>
-            <a:off x="3977639" y="4133087"/>
-            <a:ext cx="329184" cy="329184"/>
+            <a:off x="3977639" y="4041648"/>
+            <a:ext cx="310896" cy="310896"/>
           </a:xfrm>
           <a:prstGeom prst="ellipse">
             <a:avLst/>
@@ -13593,11 +13629,11 @@
           <a:p>
             <a:pPr algn="ctr"/>
             <a:r>
-              <a:rPr sz="1000" b="1">
+              <a:rPr sz="900" b="1">
                 <a:solidFill>
                   <a:srgbClr val="FFFFFF"/>
                 </a:solidFill>
-                <a:latin typeface="Calibri"/>
+                <a:latin typeface="Times New Roman"/>
               </a:rPr>
               <a:t>6</a:t>
             </a:r>
@@ -13606,14 +13642,14 @@
       </p:sp>
       <p:sp>
         <p:nvSpPr>
-          <p:cNvPr id="28" name="TextBox 27"/>
+          <p:cNvPr id="29" name="TextBox 28"/>
           <p:cNvSpPr txBox="1"/>
           <p:nvPr/>
         </p:nvSpPr>
         <p:spPr>
           <a:xfrm>
-            <a:off x="4407408" y="4133087"/>
-            <a:ext cx="3657600" cy="329184"/>
+            <a:off x="4389120" y="4041648"/>
+            <a:ext cx="3703320" cy="329184"/>
           </a:xfrm>
           <a:prstGeom prst="rect">
             <a:avLst/>
@@ -13627,22 +13663,58 @@
           <a:lstStyle/>
           <a:p>
             <a:pPr algn="l">
-              <a:defRPr sz="1000" b="0" i="0">
+              <a:defRPr sz="950" b="0" i="0">
                 <a:solidFill>
                   <a:srgbClr val="1A2B3C"/>
                 </a:solidFill>
-                <a:latin typeface="Calibri"/>
+                <a:latin typeface="Times New Roman"/>
               </a:defRPr>
             </a:pPr>
             <a:r>
-              <a:t>Kesish + vertikal siqish + rentgen</a:t>
-            </a:r>
-          </a:p>
-        </p:txBody>
-      </p:sp>
-      <p:sp>
-        <p:nvSpPr>
-          <p:cNvPr id="29" name="Rounded Rectangle 28"/>
+              <a:t>Kesish + vertikal zichlash + rentgen</a:t>
+            </a:r>
+          </a:p>
+        </p:txBody>
+      </p:sp>
+      <p:sp>
+        <p:nvSpPr>
+          <p:cNvPr id="30" name="TextBox 29"/>
+          <p:cNvSpPr txBox="1"/>
+          <p:nvPr/>
+        </p:nvSpPr>
+        <p:spPr>
+          <a:xfrm>
+            <a:off x="3977639" y="4526280"/>
+            <a:ext cx="4114800" cy="594360"/>
+          </a:xfrm>
+          <a:prstGeom prst="rect">
+            <a:avLst/>
+          </a:prstGeom>
+          <a:noFill/>
+        </p:spPr>
+        <p:txBody>
+          <a:bodyPr wrap="square">
+            <a:spAutoFit/>
+          </a:bodyPr>
+          <a:lstStyle/>
+          <a:p>
+            <a:pPr algn="l">
+              <a:defRPr sz="900" b="0" i="0">
+                <a:solidFill>
+                  <a:srgbClr val="5A6D80"/>
+                </a:solidFill>
+                <a:latin typeface="Times New Roman"/>
+              </a:defRPr>
+            </a:pPr>
+            <a:r>
+              <a:t>+ Arzon, ishonchli, qayta davolash oson  •  − Ko'p vaqt talab qiladi, devor yorilishi xavfi</a:t>
+            </a:r>
+          </a:p>
+        </p:txBody>
+      </p:sp>
+      <p:sp>
+        <p:nvSpPr>
+          <p:cNvPr id="31" name="Rounded Rectangle 30"/>
           <p:cNvSpPr/>
           <p:nvPr/>
         </p:nvSpPr>
@@ -13685,7 +13757,7 @@
       </p:sp>
       <p:sp>
         <p:nvSpPr>
-          <p:cNvPr id="30" name="Rounded Rectangle 29"/>
+          <p:cNvPr id="32" name="Rounded Rectangle 31"/>
           <p:cNvSpPr/>
           <p:nvPr/>
         </p:nvSpPr>
@@ -13730,7 +13802,7 @@
       </p:sp>
       <p:pic>
         <p:nvPicPr>
-          <p:cNvPr id="31" name="Picture 30" descr="img_08_lateral.jpg"/>
+          <p:cNvPr id="33" name="Picture 32" descr="img_08_lateral.jpg"/>
           <p:cNvPicPr>
             <a:picLocks noChangeAspect="1"/>
           </p:cNvPicPr>
@@ -13754,7 +13826,7 @@
       </p:pic>
       <p:sp>
         <p:nvSpPr>
-          <p:cNvPr id="32" name="TextBox 31"/>
+          <p:cNvPr id="34" name="TextBox 33"/>
           <p:cNvSpPr txBox="1"/>
           <p:nvPr/>
         </p:nvSpPr>
@@ -13779,18 +13851,18 @@
                 <a:solidFill>
                   <a:srgbClr val="5A6D80"/>
                 </a:solidFill>
-                <a:latin typeface="Calibri"/>
+                <a:latin typeface="Times New Roman"/>
               </a:defRPr>
             </a:pPr>
             <a:r>
-              <a:t>Lateral kondensatsiya: spreader bilan zichlash (sxematik)</a:t>
-            </a:r>
-          </a:p>
-        </p:txBody>
-      </p:sp>
-      <p:sp>
-        <p:nvSpPr>
-          <p:cNvPr id="33" name="Rounded Rectangle 32"/>
+              <a:t>Lateral kondensatsiya: yoyuvchi asbob bilan zichlash (sxematik tasvir)</a:t>
+            </a:r>
+          </a:p>
+        </p:txBody>
+      </p:sp>
+      <p:sp>
+        <p:nvSpPr>
+          <p:cNvPr id="35" name="Rounded Rectangle 34"/>
           <p:cNvSpPr/>
           <p:nvPr/>
         </p:nvSpPr>
@@ -13833,7 +13905,7 @@
       </p:sp>
       <p:sp>
         <p:nvSpPr>
-          <p:cNvPr id="34" name="Rounded Rectangle 33"/>
+          <p:cNvPr id="36" name="Rounded Rectangle 35"/>
           <p:cNvSpPr/>
           <p:nvPr/>
         </p:nvSpPr>
@@ -13878,7 +13950,7 @@
       </p:sp>
       <p:sp>
         <p:nvSpPr>
-          <p:cNvPr id="35" name="Rectangle 34"/>
+          <p:cNvPr id="37" name="Rectangle 36"/>
           <p:cNvSpPr/>
           <p:nvPr/>
         </p:nvSpPr>
@@ -13921,7 +13993,7 @@
       </p:sp>
       <p:sp>
         <p:nvSpPr>
-          <p:cNvPr id="36" name="TextBox 35"/>
+          <p:cNvPr id="38" name="TextBox 37"/>
           <p:cNvSpPr txBox="1"/>
           <p:nvPr/>
         </p:nvSpPr>
@@ -13947,7 +14019,7 @@
                 <a:solidFill>
                   <a:srgbClr val="FFD27A"/>
                 </a:solidFill>
-                <a:latin typeface="Calibri"/>
+                <a:latin typeface="Times New Roman"/>
               </a:rPr>
               <a:t>◆ ILMIY ASOS  </a:t>
             </a:r>
@@ -13956,9 +14028,9 @@
                 <a:solidFill>
                   <a:srgbClr val="FFFFFF"/>
                 </a:solidFill>
-                <a:latin typeface="Calibri"/>
+                <a:latin typeface="Times New Roman"/>
               </a:rPr>
-              <a:t>Schilder H., 1967 / 1974: uch o'lchamli (3D) obturatsiya konsepsiyasi — tozalash, shakllantirish va zich to'ldirish.</a:t>
+              <a:t>Schilder H., 1967 / 1974: uch o'lchamli (3D) obturatsiya konsepsiyasi — to'liq tozalash, to'g'ri shakllantirish va zich to'ldirish.</a:t>
             </a:r>
           </a:p>
         </p:txBody>
@@ -14120,7 +14192,7 @@
                 <a:solidFill>
                   <a:srgbClr val="FFFFFF"/>
                 </a:solidFill>
-                <a:latin typeface="Calibri"/>
+                <a:latin typeface="Times New Roman"/>
               </a:rPr>
               <a:t>18</a:t>
             </a:r>
@@ -14154,7 +14226,7 @@
                 <a:solidFill>
                   <a:srgbClr val="00BFA6"/>
                 </a:solidFill>
-                <a:latin typeface="Calibri"/>
+                <a:latin typeface="Times New Roman"/>
               </a:defRPr>
             </a:pPr>
             <a:r>
@@ -14190,7 +14262,7 @@
                 <a:solidFill>
                   <a:srgbClr val="FFFFFF"/>
                 </a:solidFill>
-                <a:latin typeface="Calibri Light"/>
+                <a:latin typeface="Times New Roman"/>
               </a:defRPr>
             </a:pPr>
             <a:r>
@@ -14226,7 +14298,7 @@
                 <a:solidFill>
                   <a:srgbClr val="5A6D80"/>
                 </a:solidFill>
-                <a:latin typeface="Calibri"/>
+                <a:latin typeface="Times New Roman"/>
               </a:defRPr>
             </a:pPr>
             <a:r>
@@ -14262,7 +14334,7 @@
                 <a:solidFill>
                   <a:srgbClr val="5A6D80"/>
                 </a:solidFill>
-                <a:latin typeface="Calibri"/>
+                <a:latin typeface="Times New Roman"/>
               </a:defRPr>
             </a:pPr>
             <a:r>
@@ -14472,7 +14544,7 @@
                 <a:solidFill>
                   <a:srgbClr val="FFFFFF"/>
                 </a:solidFill>
-                <a:latin typeface="Calibri"/>
+                <a:latin typeface="Times New Roman"/>
               </a:defRPr>
             </a:pPr>
             <a:r>
@@ -14508,11 +14580,11 @@
                 <a:solidFill>
                   <a:srgbClr val="1A2B3C"/>
                 </a:solidFill>
-                <a:latin typeface="Calibri"/>
+                <a:latin typeface="Times New Roman"/>
               </a:defRPr>
             </a:pPr>
             <a:r>
-              <a:t>Issiq pluggerlar bilan apikaldan koronalga qatlamma-qatlam zichlash. 3D to'lish, lateral kanallar yopiladi.</a:t>
+              <a:t>Issiq zichlovchi asboblar (plugger) bilan apeksdan tojga tomon qatlamma-qatlam zichlash. Uch o'lchamli to'lish, yon kanallar yopiladi.</a:t>
             </a:r>
           </a:p>
         </p:txBody>
@@ -14675,7 +14747,7 @@
                 <a:solidFill>
                   <a:srgbClr val="FFFFFF"/>
                 </a:solidFill>
-                <a:latin typeface="Calibri"/>
+                <a:latin typeface="Times New Roman"/>
               </a:defRPr>
             </a:pPr>
             <a:r>
@@ -14711,11 +14783,11 @@
                 <a:solidFill>
                   <a:srgbClr val="1A2B3C"/>
                 </a:solidFill>
-                <a:latin typeface="Calibri"/>
+                <a:latin typeface="Times New Roman"/>
               </a:defRPr>
             </a:pPr>
             <a:r>
-              <a:t>System B + Obtura: downpack (apikal 4–5 mm) + backfill (in'ektsiya). Tez, germetik.</a:t>
+              <a:t>System B + Obtura: apikal zichlash — downpack (apikal 4–5 mm) + in'ektsion to'ldirish — backfill. Tez, germetik.</a:t>
             </a:r>
           </a:p>
         </p:txBody>
@@ -14878,7 +14950,7 @@
                 <a:solidFill>
                   <a:srgbClr val="FFFFFF"/>
                 </a:solidFill>
-                <a:latin typeface="Calibri"/>
+                <a:latin typeface="Times New Roman"/>
               </a:defRPr>
             </a:pPr>
             <a:r>
@@ -14914,11 +14986,11 @@
                 <a:solidFill>
                   <a:srgbClr val="1A2B3C"/>
                 </a:solidFill>
-                <a:latin typeface="Calibri"/>
+                <a:latin typeface="Times New Roman"/>
               </a:defRPr>
             </a:pPr>
             <a:r>
-              <a:t>Qoplangan o'zak qizdirib kiritiladi. Egri kanallarda a'lo. O'zakni chiqarish qiyin.</a:t>
+              <a:t>Oldindan gutta-percha qoplangan o'zak qizdirilib kiritiladi. Qiyshiq kanallarda a'lo natija. O'zakni chiqarish qiyin.</a:t>
             </a:r>
           </a:p>
         </p:txBody>
@@ -15062,11 +15134,11 @@
                 <a:solidFill>
                   <a:srgbClr val="5A6D80"/>
                 </a:solidFill>
-                <a:latin typeface="Calibri"/>
+                <a:latin typeface="Times New Roman"/>
               </a:defRPr>
             </a:pPr>
             <a:r>
-              <a:t>Issiq vertikal kondensatsiya (sxematik)</a:t>
+              <a:t>Issiq vertikal kondensatsiya (sxematik tasvir)</a:t>
             </a:r>
           </a:p>
         </p:txBody>
@@ -15230,7 +15302,7 @@
                 <a:solidFill>
                   <a:srgbClr val="FFD27A"/>
                 </a:solidFill>
-                <a:latin typeface="Calibri"/>
+                <a:latin typeface="Times New Roman"/>
               </a:rPr>
               <a:t>◆ LABORATOR DALIL  </a:t>
             </a:r>
@@ -15239,9 +15311,9 @@
                 <a:solidFill>
                   <a:srgbClr val="FFFFFF"/>
                 </a:solidFill>
-                <a:latin typeface="Calibri"/>
+                <a:latin typeface="Times New Roman"/>
               </a:rPr>
-              <a:t>Mikro-kompyuter tomografiya (mikro-CT) tadqiqotlarida issiq usullarda oval va egri kanallarning to'lish zichligi yuqoriroq qayd etilgan.</a:t>
+              <a:t>Mikrokompyuter tomografiya (mikro-KT) tadqiqotlarida issiq usullarda oval va qiyshiq kanallarning to'lish zichligi yuqoriroq ekani qayd etilgan.</a:t>
             </a:r>
           </a:p>
         </p:txBody>
@@ -15403,7 +15475,7 @@
                 <a:solidFill>
                   <a:srgbClr val="FFFFFF"/>
                 </a:solidFill>
-                <a:latin typeface="Calibri"/>
+                <a:latin typeface="Times New Roman"/>
               </a:rPr>
               <a:t>19</a:t>
             </a:r>
@@ -15437,7 +15509,7 @@
                 <a:solidFill>
                   <a:srgbClr val="00BFA6"/>
                 </a:solidFill>
-                <a:latin typeface="Calibri"/>
+                <a:latin typeface="Times New Roman"/>
               </a:defRPr>
             </a:pPr>
             <a:r>
@@ -15473,7 +15545,7 @@
                 <a:solidFill>
                   <a:srgbClr val="FFFFFF"/>
                 </a:solidFill>
-                <a:latin typeface="Calibri Light"/>
+                <a:latin typeface="Times New Roman"/>
               </a:defRPr>
             </a:pPr>
             <a:r>
@@ -15509,7 +15581,7 @@
                 <a:solidFill>
                   <a:srgbClr val="5A6D80"/>
                 </a:solidFill>
-                <a:latin typeface="Calibri"/>
+                <a:latin typeface="Times New Roman"/>
               </a:defRPr>
             </a:pPr>
             <a:r>
@@ -15545,7 +15617,7 @@
                 <a:solidFill>
                   <a:srgbClr val="5A6D80"/>
                 </a:solidFill>
-                <a:latin typeface="Calibri"/>
+                <a:latin typeface="Times New Roman"/>
               </a:defRPr>
             </a:pPr>
             <a:r>
@@ -15726,11 +15798,11 @@
           <a:p>
             <a:pPr algn="ctr"/>
             <a:r>
-              <a:rPr sz="1400" b="1">
+              <a:rPr sz="1300" b="1">
                 <a:solidFill>
                   <a:srgbClr val="FFFFFF"/>
                 </a:solidFill>
-                <a:latin typeface="Calibri"/>
+                <a:latin typeface="Times New Roman"/>
               </a:rPr>
               <a:t>◉</a:t>
             </a:r>
@@ -15760,11 +15832,11 @@
           <a:lstStyle/>
           <a:p>
             <a:pPr algn="l">
-              <a:defRPr sz="1100" b="1" i="0">
+              <a:defRPr sz="1050" b="1" i="0">
                 <a:solidFill>
                   <a:srgbClr val="0B2C4A"/>
                 </a:solidFill>
-                <a:latin typeface="Calibri"/>
+                <a:latin typeface="Times New Roman"/>
               </a:defRPr>
             </a:pPr>
             <a:r>
@@ -15796,15 +15868,15 @@
           <a:lstStyle/>
           <a:p>
             <a:pPr algn="l">
-              <a:defRPr sz="1000" b="0" i="0">
+              <a:defRPr sz="950" b="0" i="0">
                 <a:solidFill>
                   <a:srgbClr val="5A6D80"/>
                 </a:solidFill>
-                <a:latin typeface="Calibri"/>
+                <a:latin typeface="Times New Roman"/>
               </a:defRPr>
             </a:pPr>
             <a:r>
-              <a:t>10–25×: MB2, yoriqlar, qoldiqlar</a:t>
+              <a:t>10–25× kattalashtirish: MB2 kanal, yoriqlar, qoldiqlar</a:t>
             </a:r>
           </a:p>
         </p:txBody>
@@ -15938,11 +16010,11 @@
           <a:p>
             <a:pPr algn="ctr"/>
             <a:r>
-              <a:rPr sz="1400" b="1">
+              <a:rPr sz="1300" b="1">
                 <a:solidFill>
                   <a:srgbClr val="FFFFFF"/>
                 </a:solidFill>
-                <a:latin typeface="Calibri"/>
+                <a:latin typeface="Times New Roman"/>
               </a:rPr>
               <a:t>♨</a:t>
             </a:r>
@@ -15972,15 +16044,15 @@
           <a:lstStyle/>
           <a:p>
             <a:pPr algn="l">
-              <a:defRPr sz="1100" b="1" i="0">
+              <a:defRPr sz="1050" b="1" i="0">
                 <a:solidFill>
                   <a:srgbClr val="0B2C4A"/>
                 </a:solidFill>
-                <a:latin typeface="Calibri"/>
+                <a:latin typeface="Times New Roman"/>
               </a:defRPr>
             </a:pPr>
             <a:r>
-              <a:t>Mashinali obturatsiya</a:t>
+              <a:t>Elektr obturatsiya tizimlari</a:t>
             </a:r>
           </a:p>
         </p:txBody>
@@ -16008,15 +16080,15 @@
           <a:lstStyle/>
           <a:p>
             <a:pPr algn="l">
-              <a:defRPr sz="1000" b="0" i="0">
+              <a:defRPr sz="950" b="0" i="0">
                 <a:solidFill>
                   <a:srgbClr val="5A6D80"/>
                 </a:solidFill>
-                <a:latin typeface="Calibri"/>
+                <a:latin typeface="Times New Roman"/>
               </a:defRPr>
             </a:pPr>
             <a:r>
-              <a:t>Calamus Dual, BeeFill, Elements IC</a:t>
+              <a:t>Calamus Dual, BeeFill, Elements IC — harorat nazorati</a:t>
             </a:r>
           </a:p>
         </p:txBody>
@@ -16150,11 +16222,11 @@
           <a:p>
             <a:pPr algn="ctr"/>
             <a:r>
-              <a:rPr sz="1400" b="1">
+              <a:rPr sz="1300" b="1">
                 <a:solidFill>
                   <a:srgbClr val="FFFFFF"/>
                 </a:solidFill>
-                <a:latin typeface="Calibri"/>
+                <a:latin typeface="Times New Roman"/>
               </a:rPr>
               <a:t>⬢</a:t>
             </a:r>
@@ -16184,11 +16256,11 @@
           <a:lstStyle/>
           <a:p>
             <a:pPr algn="l">
-              <a:defRPr sz="1100" b="1" i="0">
+              <a:defRPr sz="1050" b="1" i="0">
                 <a:solidFill>
                   <a:srgbClr val="0B2C4A"/>
                 </a:solidFill>
-                <a:latin typeface="Calibri"/>
+                <a:latin typeface="Times New Roman"/>
               </a:defRPr>
             </a:pPr>
             <a:r>
@@ -16220,15 +16292,15 @@
           <a:lstStyle/>
           <a:p>
             <a:pPr algn="l">
-              <a:defRPr sz="1000" b="0" i="0">
+              <a:defRPr sz="950" b="0" i="0">
                 <a:solidFill>
                   <a:srgbClr val="5A6D80"/>
                 </a:solidFill>
-                <a:latin typeface="Calibri"/>
+                <a:latin typeface="Times New Roman"/>
               </a:defRPr>
             </a:pPr>
             <a:r>
-              <a:t>Single-cone + BC sealer — trend</a:t>
+              <a:t>Yakka shtift + biokeramik sealer — yetakchi yo'nalish</a:t>
             </a:r>
           </a:p>
         </p:txBody>
@@ -16362,11 +16434,11 @@
           <a:p>
             <a:pPr algn="ctr"/>
             <a:r>
-              <a:rPr sz="1400" b="1">
+              <a:rPr sz="1300" b="1">
                 <a:solidFill>
                   <a:srgbClr val="FFFFFF"/>
                 </a:solidFill>
-                <a:latin typeface="Calibri"/>
+                <a:latin typeface="Times New Roman"/>
               </a:rPr>
               <a:t>▣</a:t>
             </a:r>
@@ -16396,15 +16468,15 @@
           <a:lstStyle/>
           <a:p>
             <a:pPr algn="l">
-              <a:defRPr sz="1100" b="1" i="0">
+              <a:defRPr sz="1050" b="1" i="0">
                 <a:solidFill>
                   <a:srgbClr val="0B2C4A"/>
                 </a:solidFill>
-                <a:latin typeface="Calibri"/>
+                <a:latin typeface="Times New Roman"/>
               </a:defRPr>
             </a:pPr>
             <a:r>
-              <a:t>MTA apikal plug</a:t>
+              <a:t>MTA apikal tiqin</a:t>
             </a:r>
           </a:p>
         </p:txBody>
@@ -16432,15 +16504,15 @@
           <a:lstStyle/>
           <a:p>
             <a:pPr algn="l">
-              <a:defRPr sz="1000" b="0" i="0">
+              <a:defRPr sz="950" b="0" i="0">
                 <a:solidFill>
                   <a:srgbClr val="5A6D80"/>
                 </a:solidFill>
-                <a:latin typeface="Calibri"/>
+                <a:latin typeface="Times New Roman"/>
               </a:defRPr>
             </a:pPr>
             <a:r>
-              <a:t>Ochiq apeksda 3–5 mm to'siq</a:t>
+              <a:t>Ochiq apeks, perforatsiya, rezorbsiyada 3–5 mm to'siq</a:t>
             </a:r>
           </a:p>
         </p:txBody>
@@ -16574,11 +16646,11 @@
           <a:p>
             <a:pPr algn="ctr"/>
             <a:r>
-              <a:rPr sz="1400" b="1">
+              <a:rPr sz="1300" b="1">
                 <a:solidFill>
                   <a:srgbClr val="FFFFFF"/>
                 </a:solidFill>
-                <a:latin typeface="Calibri"/>
+                <a:latin typeface="Times New Roman"/>
               </a:rPr>
               <a:t>☰</a:t>
             </a:r>
@@ -16608,11 +16680,11 @@
           <a:lstStyle/>
           <a:p>
             <a:pPr algn="l">
-              <a:defRPr sz="1100" b="1" i="0">
+              <a:defRPr sz="1050" b="1" i="0">
                 <a:solidFill>
                   <a:srgbClr val="0B2C4A"/>
                 </a:solidFill>
-                <a:latin typeface="Calibri"/>
+                <a:latin typeface="Times New Roman"/>
               </a:defRPr>
             </a:pPr>
             <a:r>
@@ -16644,15 +16716,15 @@
           <a:lstStyle/>
           <a:p>
             <a:pPr algn="l">
-              <a:defRPr sz="1000" b="0" i="0">
+              <a:defRPr sz="950" b="0" i="0">
                 <a:solidFill>
                   <a:srgbClr val="5A6D80"/>
                 </a:solidFill>
-                <a:latin typeface="Calibri"/>
+                <a:latin typeface="Times New Roman"/>
               </a:defRPr>
             </a:pPr>
             <a:r>
-              <a:t>Apeks-lokator + rentgen + CBCT</a:t>
+              <a:t>Apeks-lokator + rentgen + konus-nurli KT (CBCT)</a:t>
             </a:r>
           </a:p>
         </p:txBody>
@@ -16786,11 +16858,11 @@
           <a:p>
             <a:pPr algn="ctr"/>
             <a:r>
-              <a:rPr sz="1400" b="1">
+              <a:rPr sz="1300" b="1">
                 <a:solidFill>
                   <a:srgbClr val="FFFFFF"/>
                 </a:solidFill>
-                <a:latin typeface="Calibri"/>
+                <a:latin typeface="Times New Roman"/>
               </a:rPr>
               <a:t>✚</a:t>
             </a:r>
@@ -16820,15 +16892,15 @@
           <a:lstStyle/>
           <a:p>
             <a:pPr algn="l">
-              <a:defRPr sz="1100" b="1" i="0">
+              <a:defRPr sz="1050" b="1" i="0">
                 <a:solidFill>
                   <a:srgbClr val="0B2C4A"/>
                 </a:solidFill>
-                <a:latin typeface="Calibri"/>
+                <a:latin typeface="Times New Roman"/>
               </a:defRPr>
             </a:pPr>
             <a:r>
-              <a:t>Aseptika</a:t>
+              <a:t>Aseptika va antiseptika</a:t>
             </a:r>
           </a:p>
         </p:txBody>
@@ -16856,15 +16928,15 @@
           <a:lstStyle/>
           <a:p>
             <a:pPr algn="l">
-              <a:defRPr sz="1000" b="0" i="0">
+              <a:defRPr sz="950" b="0" i="0">
                 <a:solidFill>
                   <a:srgbClr val="5A6D80"/>
                 </a:solidFill>
-                <a:latin typeface="Calibri"/>
+                <a:latin typeface="Times New Roman"/>
               </a:defRPr>
             </a:pPr>
             <a:r>
-              <a:t>Kofferdam shart! NaOCl + EDTA + UZ</a:t>
+              <a:t>Koferdam majburiy! NaOCl + EDTA + ultratovushli faollashtirish</a:t>
             </a:r>
           </a:p>
         </p:txBody>
@@ -17008,11 +17080,11 @@
                 <a:solidFill>
                   <a:srgbClr val="5A6D80"/>
                 </a:solidFill>
-                <a:latin typeface="Calibri"/>
+                <a:latin typeface="Times New Roman"/>
               </a:defRPr>
             </a:pPr>
             <a:r>
-              <a:t>Operatsion mikroskop ostida davolash</a:t>
+              <a:t>Operatsion mikroskop ostida ildiz kanalini davolash</a:t>
             </a:r>
           </a:p>
         </p:txBody>
@@ -17174,7 +17246,7 @@
                 <a:solidFill>
                   <a:srgbClr val="FFFFFF"/>
                 </a:solidFill>
-                <a:latin typeface="Calibri"/>
+                <a:latin typeface="Times New Roman"/>
               </a:rPr>
               <a:t>02</a:t>
             </a:r>
@@ -17208,7 +17280,7 @@
                 <a:solidFill>
                   <a:srgbClr val="00BFA6"/>
                 </a:solidFill>
-                <a:latin typeface="Calibri"/>
+                <a:latin typeface="Times New Roman"/>
               </a:defRPr>
             </a:pPr>
             <a:r>
@@ -17244,7 +17316,7 @@
                 <a:solidFill>
                   <a:srgbClr val="FFFFFF"/>
                 </a:solidFill>
-                <a:latin typeface="Calibri Light"/>
+                <a:latin typeface="Times New Roman"/>
               </a:defRPr>
             </a:pPr>
             <a:r>
@@ -17280,7 +17352,7 @@
                 <a:solidFill>
                   <a:srgbClr val="5A6D80"/>
                 </a:solidFill>
-                <a:latin typeface="Calibri"/>
+                <a:latin typeface="Times New Roman"/>
               </a:defRPr>
             </a:pPr>
             <a:r>
@@ -17316,7 +17388,7 @@
                 <a:solidFill>
                   <a:srgbClr val="5A6D80"/>
                 </a:solidFill>
-                <a:latin typeface="Calibri"/>
+                <a:latin typeface="Times New Roman"/>
               </a:defRPr>
             </a:pPr>
             <a:r>
@@ -17483,7 +17555,7 @@
                 <a:solidFill>
                   <a:srgbClr val="009E8A"/>
                 </a:solidFill>
-                <a:latin typeface="Calibri"/>
+                <a:latin typeface="Times New Roman"/>
               </a:defRPr>
             </a:pPr>
             <a:r>
@@ -17519,7 +17591,7 @@
                 <a:solidFill>
                   <a:srgbClr val="1A2B3C"/>
                 </a:solidFill>
-                <a:latin typeface="Calibri"/>
+                <a:latin typeface="Times New Roman"/>
               </a:defRPr>
             </a:pPr>
             <a:r>
@@ -17555,11 +17627,11 @@
                 <a:solidFill>
                   <a:srgbClr val="5A6D80"/>
                 </a:solidFill>
-                <a:latin typeface="Calibri"/>
+                <a:latin typeface="Times New Roman"/>
               </a:defRPr>
             </a:pPr>
             <a:r>
-              <a:t>muammo qo'yilishi va statistika</a:t>
+              <a:t>muammoning qo'yilishi va statistika</a:t>
             </a:r>
           </a:p>
         </p:txBody>
@@ -17679,7 +17751,7 @@
                 <a:solidFill>
                   <a:srgbClr val="009E8A"/>
                 </a:solidFill>
-                <a:latin typeface="Calibri"/>
+                <a:latin typeface="Times New Roman"/>
               </a:defRPr>
             </a:pPr>
             <a:r>
@@ -17715,7 +17787,7 @@
                 <a:solidFill>
                   <a:srgbClr val="1A2B3C"/>
                 </a:solidFill>
-                <a:latin typeface="Calibri"/>
+                <a:latin typeface="Times New Roman"/>
               </a:defRPr>
             </a:pPr>
             <a:r>
@@ -17751,7 +17823,7 @@
                 <a:solidFill>
                   <a:srgbClr val="5A6D80"/>
                 </a:solidFill>
-                <a:latin typeface="Calibri"/>
+                <a:latin typeface="Times New Roman"/>
               </a:defRPr>
             </a:pPr>
             <a:r>
@@ -17875,7 +17947,7 @@
                 <a:solidFill>
                   <a:srgbClr val="009E8A"/>
                 </a:solidFill>
-                <a:latin typeface="Calibri"/>
+                <a:latin typeface="Times New Roman"/>
               </a:defRPr>
             </a:pPr>
             <a:r>
@@ -17911,7 +17983,7 @@
                 <a:solidFill>
                   <a:srgbClr val="1A2B3C"/>
                 </a:solidFill>
-                <a:latin typeface="Calibri"/>
+                <a:latin typeface="Times New Roman"/>
               </a:defRPr>
             </a:pPr>
             <a:r>
@@ -17947,11 +18019,11 @@
                 <a:solidFill>
                   <a:srgbClr val="5A6D80"/>
                 </a:solidFill>
-                <a:latin typeface="Calibri"/>
+                <a:latin typeface="Times New Roman"/>
               </a:defRPr>
             </a:pPr>
             <a:r>
-              <a:t>Grossman, ISO 6876 / 6877</a:t>
+              <a:t>Grossman mezonlari, ISO 6876 / 6877</a:t>
             </a:r>
           </a:p>
         </p:txBody>
@@ -18071,7 +18143,7 @@
                 <a:solidFill>
                   <a:srgbClr val="009E8A"/>
                 </a:solidFill>
-                <a:latin typeface="Calibri"/>
+                <a:latin typeface="Times New Roman"/>
               </a:defRPr>
             </a:pPr>
             <a:r>
@@ -18107,7 +18179,7 @@
                 <a:solidFill>
                   <a:srgbClr val="1A2B3C"/>
                 </a:solidFill>
-                <a:latin typeface="Calibri"/>
+                <a:latin typeface="Times New Roman"/>
               </a:defRPr>
             </a:pPr>
             <a:r>
@@ -18143,7 +18215,7 @@
                 <a:solidFill>
                   <a:srgbClr val="5A6D80"/>
                 </a:solidFill>
-                <a:latin typeface="Calibri"/>
+                <a:latin typeface="Times New Roman"/>
               </a:defRPr>
             </a:pPr>
             <a:r>
@@ -18267,7 +18339,7 @@
                 <a:solidFill>
                   <a:srgbClr val="009E8A"/>
                 </a:solidFill>
-                <a:latin typeface="Calibri"/>
+                <a:latin typeface="Times New Roman"/>
               </a:defRPr>
             </a:pPr>
             <a:r>
@@ -18303,7 +18375,7 @@
                 <a:solidFill>
                   <a:srgbClr val="1A2B3C"/>
                 </a:solidFill>
-                <a:latin typeface="Calibri"/>
+                <a:latin typeface="Times New Roman"/>
               </a:defRPr>
             </a:pPr>
             <a:r>
@@ -18339,11 +18411,11 @@
                 <a:solidFill>
                   <a:srgbClr val="5A6D80"/>
                 </a:solidFill>
-                <a:latin typeface="Calibri"/>
+                <a:latin typeface="Times New Roman"/>
               </a:defRPr>
             </a:pPr>
             <a:r>
-              <a:t>tushuncha, vakillar, tarkib</a:t>
+              <a:t>tushuncha, turlari, tarkibi</a:t>
             </a:r>
           </a:p>
         </p:txBody>
@@ -18463,7 +18535,7 @@
                 <a:solidFill>
                   <a:srgbClr val="009E8A"/>
                 </a:solidFill>
-                <a:latin typeface="Calibri"/>
+                <a:latin typeface="Times New Roman"/>
               </a:defRPr>
             </a:pPr>
             <a:r>
@@ -18499,7 +18571,7 @@
                 <a:solidFill>
                   <a:srgbClr val="1A2B3C"/>
                 </a:solidFill>
-                <a:latin typeface="Calibri"/>
+                <a:latin typeface="Times New Roman"/>
               </a:defRPr>
             </a:pPr>
             <a:r>
@@ -18535,11 +18607,11 @@
                 <a:solidFill>
                   <a:srgbClr val="5A6D80"/>
                 </a:solidFill>
-                <a:latin typeface="Calibri"/>
+                <a:latin typeface="Times New Roman"/>
               </a:defRPr>
             </a:pPr>
             <a:r>
-              <a:t>ZOE, rezin, GIC, biokeramika</a:t>
+              <a:t>rux oksidi, smola, biokeramika</a:t>
             </a:r>
           </a:p>
         </p:txBody>
@@ -18659,7 +18731,7 @@
                 <a:solidFill>
                   <a:srgbClr val="009E8A"/>
                 </a:solidFill>
-                <a:latin typeface="Calibri"/>
+                <a:latin typeface="Times New Roman"/>
               </a:defRPr>
             </a:pPr>
             <a:r>
@@ -18695,7 +18767,7 @@
                 <a:solidFill>
                   <a:srgbClr val="1A2B3C"/>
                 </a:solidFill>
-                <a:latin typeface="Calibri"/>
+                <a:latin typeface="Times New Roman"/>
               </a:defRPr>
             </a:pPr>
             <a:r>
@@ -18731,7 +18803,7 @@
                 <a:solidFill>
                   <a:srgbClr val="5A6D80"/>
                 </a:solidFill>
-                <a:latin typeface="Calibri"/>
+                <a:latin typeface="Times New Roman"/>
               </a:defRPr>
             </a:pPr>
             <a:r>
@@ -18855,7 +18927,7 @@
                 <a:solidFill>
                   <a:srgbClr val="009E8A"/>
                 </a:solidFill>
-                <a:latin typeface="Calibri"/>
+                <a:latin typeface="Times New Roman"/>
               </a:defRPr>
             </a:pPr>
             <a:r>
@@ -18891,7 +18963,7 @@
                 <a:solidFill>
                   <a:srgbClr val="1A2B3C"/>
                 </a:solidFill>
-                <a:latin typeface="Calibri"/>
+                <a:latin typeface="Times New Roman"/>
               </a:defRPr>
             </a:pPr>
             <a:r>
@@ -18927,7 +18999,7 @@
                 <a:solidFill>
                   <a:srgbClr val="5A6D80"/>
                 </a:solidFill>
-                <a:latin typeface="Calibri"/>
+                <a:latin typeface="Times New Roman"/>
               </a:defRPr>
             </a:pPr>
             <a:r>
@@ -19051,7 +19123,7 @@
                 <a:solidFill>
                   <a:srgbClr val="009E8A"/>
                 </a:solidFill>
-                <a:latin typeface="Calibri"/>
+                <a:latin typeface="Times New Roman"/>
               </a:defRPr>
             </a:pPr>
             <a:r>
@@ -19087,7 +19159,7 @@
                 <a:solidFill>
                   <a:srgbClr val="1A2B3C"/>
                 </a:solidFill>
-                <a:latin typeface="Calibri"/>
+                <a:latin typeface="Times New Roman"/>
               </a:defRPr>
             </a:pPr>
             <a:r>
@@ -19123,11 +19195,11 @@
                 <a:solidFill>
                   <a:srgbClr val="5A6D80"/>
                 </a:solidFill>
-                <a:latin typeface="Calibri"/>
+                <a:latin typeface="Times New Roman"/>
               </a:defRPr>
             </a:pPr>
             <a:r>
-              <a:t>mikroskop, mashinali obturatsiya</a:t>
+              <a:t>mikroskop, zamonaviy tizimlar</a:t>
             </a:r>
           </a:p>
         </p:txBody>
@@ -19247,7 +19319,7 @@
                 <a:solidFill>
                   <a:srgbClr val="009E8A"/>
                 </a:solidFill>
-                <a:latin typeface="Calibri"/>
+                <a:latin typeface="Times New Roman"/>
               </a:defRPr>
             </a:pPr>
             <a:r>
@@ -19283,7 +19355,7 @@
                 <a:solidFill>
                   <a:srgbClr val="1A2B3C"/>
                 </a:solidFill>
-                <a:latin typeface="Calibri"/>
+                <a:latin typeface="Times New Roman"/>
               </a:defRPr>
             </a:pPr>
             <a:r>
@@ -19319,11 +19391,11 @@
                 <a:solidFill>
                   <a:srgbClr val="5A6D80"/>
                 </a:solidFill>
-                <a:latin typeface="Calibri"/>
+                <a:latin typeface="Times New Roman"/>
               </a:defRPr>
             </a:pPr>
             <a:r>
-              <a:t>klinik tanlov algoritmi</a:t>
+              <a:t>klinik tanlash algoritmi</a:t>
             </a:r>
           </a:p>
         </p:txBody>
@@ -19485,7 +19557,7 @@
                 <a:solidFill>
                   <a:srgbClr val="FFFFFF"/>
                 </a:solidFill>
-                <a:latin typeface="Calibri"/>
+                <a:latin typeface="Times New Roman"/>
               </a:rPr>
               <a:t>20</a:t>
             </a:r>
@@ -19519,7 +19591,7 @@
                 <a:solidFill>
                   <a:srgbClr val="00BFA6"/>
                 </a:solidFill>
-                <a:latin typeface="Calibri"/>
+                <a:latin typeface="Times New Roman"/>
               </a:defRPr>
             </a:pPr>
             <a:r>
@@ -19555,11 +19627,11 @@
                 <a:solidFill>
                   <a:srgbClr val="FFFFFF"/>
                 </a:solidFill>
-                <a:latin typeface="Calibri Light"/>
+                <a:latin typeface="Times New Roman"/>
               </a:defRPr>
             </a:pPr>
             <a:r>
-              <a:t>Usullar qiyosiy tahlili va klinik tanlov algoritmi</a:t>
+              <a:t>Usullar qiyosiy tahlili va klinik tanlash algoritmi</a:t>
             </a:r>
           </a:p>
         </p:txBody>
@@ -19591,7 +19663,7 @@
                 <a:solidFill>
                   <a:srgbClr val="5A6D80"/>
                 </a:solidFill>
-                <a:latin typeface="Calibri"/>
+                <a:latin typeface="Times New Roman"/>
               </a:defRPr>
             </a:pPr>
             <a:r>
@@ -19627,7 +19699,7 @@
                 <a:solidFill>
                   <a:srgbClr val="5A6D80"/>
                 </a:solidFill>
-                <a:latin typeface="Calibri"/>
+                <a:latin typeface="Times New Roman"/>
               </a:defRPr>
             </a:pPr>
             <a:r>
@@ -19716,7 +19788,7 @@
                           <a:solidFill>
                             <a:srgbClr val="FFFFFF"/>
                           </a:solidFill>
-                          <a:latin typeface="Calibri"/>
+                          <a:latin typeface="Times New Roman"/>
                         </a:rPr>
                         <a:t>Usul</a:t>
                       </a:r>
@@ -19739,9 +19811,9 @@
                           <a:solidFill>
                             <a:srgbClr val="FFFFFF"/>
                           </a:solidFill>
-                          <a:latin typeface="Calibri"/>
+                          <a:latin typeface="Times New Roman"/>
                         </a:rPr>
-                        <a:t>Germetiklik</a:t>
+                        <a:t>Germetiklik darajasi</a:t>
                       </a:r>
                     </a:p>
                   </a:txBody>
@@ -19762,9 +19834,9 @@
                           <a:solidFill>
                             <a:srgbClr val="FFFFFF"/>
                           </a:solidFill>
-                          <a:latin typeface="Calibri"/>
+                          <a:latin typeface="Times New Roman"/>
                         </a:rPr>
-                        <a:t>Qiyinlik</a:t>
+                        <a:t>Murakkablik</a:t>
                       </a:r>
                     </a:p>
                   </a:txBody>
@@ -19785,9 +19857,9 @@
                           <a:solidFill>
                             <a:srgbClr val="FFFFFF"/>
                           </a:solidFill>
-                          <a:latin typeface="Calibri"/>
+                          <a:latin typeface="Times New Roman"/>
                         </a:rPr>
-                        <a:t>Jihoz</a:t>
+                        <a:t>Kerakli jihoz</a:t>
                       </a:r>
                     </a:p>
                   </a:txBody>
@@ -19808,7 +19880,7 @@
                           <a:solidFill>
                             <a:srgbClr val="FFFFFF"/>
                           </a:solidFill>
-                          <a:latin typeface="Calibri"/>
+                          <a:latin typeface="Times New Roman"/>
                         </a:rPr>
                         <a:t>Asosiy ko'rsatma</a:t>
                       </a:r>
@@ -19833,9 +19905,9 @@
                           <a:solidFill>
                             <a:srgbClr val="1A2B3C"/>
                           </a:solidFill>
-                          <a:latin typeface="Calibri"/>
+                          <a:latin typeface="Times New Roman"/>
                         </a:rPr>
-                        <a:t>Single-cone (ZOE / rezin)</a:t>
+                        <a:t>Yakka shtift (ZOE / smola)</a:t>
                       </a:r>
                     </a:p>
                   </a:txBody>
@@ -19856,7 +19928,7 @@
                           <a:solidFill>
                             <a:srgbClr val="1A2B3C"/>
                           </a:solidFill>
-                          <a:latin typeface="Calibri"/>
+                          <a:latin typeface="Times New Roman"/>
                         </a:rPr>
                         <a:t>O'rtacha</a:t>
                       </a:r>
@@ -19879,7 +19951,7 @@
                           <a:solidFill>
                             <a:srgbClr val="1A2B3C"/>
                           </a:solidFill>
-                          <a:latin typeface="Calibri"/>
+                          <a:latin typeface="Times New Roman"/>
                         </a:rPr>
                         <a:t>Oson</a:t>
                       </a:r>
@@ -19902,9 +19974,9 @@
                           <a:solidFill>
                             <a:srgbClr val="1A2B3C"/>
                           </a:solidFill>
-                          <a:latin typeface="Calibri"/>
+                          <a:latin typeface="Times New Roman"/>
                         </a:rPr>
-                        <a:t>Minimal</a:t>
+                        <a:t>Asosiy</a:t>
                       </a:r>
                     </a:p>
                   </a:txBody>
@@ -19925,7 +19997,7 @@
                           <a:solidFill>
                             <a:srgbClr val="1A2B3C"/>
                           </a:solidFill>
-                          <a:latin typeface="Calibri"/>
+                          <a:latin typeface="Times New Roman"/>
                         </a:rPr>
                         <a:t>Tor yumaloq kanal</a:t>
                       </a:r>
@@ -19950,9 +20022,9 @@
                           <a:solidFill>
                             <a:srgbClr val="1A2B3C"/>
                           </a:solidFill>
-                          <a:latin typeface="Calibri"/>
+                          <a:latin typeface="Times New Roman"/>
                         </a:rPr>
-                        <a:t>Single-cone (biokeramik)</a:t>
+                        <a:t>Yakka shtift (biokeramik)</a:t>
                       </a:r>
                     </a:p>
                   </a:txBody>
@@ -19973,7 +20045,7 @@
                           <a:solidFill>
                             <a:srgbClr val="1A2B3C"/>
                           </a:solidFill>
-                          <a:latin typeface="Calibri"/>
+                          <a:latin typeface="Times New Roman"/>
                         </a:rPr>
                         <a:t>Yuqori</a:t>
                       </a:r>
@@ -19996,7 +20068,7 @@
                           <a:solidFill>
                             <a:srgbClr val="1A2B3C"/>
                           </a:solidFill>
-                          <a:latin typeface="Calibri"/>
+                          <a:latin typeface="Times New Roman"/>
                         </a:rPr>
                         <a:t>Oson</a:t>
                       </a:r>
@@ -20019,9 +20091,9 @@
                           <a:solidFill>
                             <a:srgbClr val="1A2B3C"/>
                           </a:solidFill>
-                          <a:latin typeface="Calibri"/>
+                          <a:latin typeface="Times New Roman"/>
                         </a:rPr>
-                        <a:t>Minimal</a:t>
+                        <a:t>Asosiy</a:t>
                       </a:r>
                     </a:p>
                   </a:txBody>
@@ -20042,7 +20114,7 @@
                           <a:solidFill>
                             <a:srgbClr val="1A2B3C"/>
                           </a:solidFill>
-                          <a:latin typeface="Calibri"/>
+                          <a:latin typeface="Times New Roman"/>
                         </a:rPr>
                         <a:t>Keng / oval kanal</a:t>
                       </a:r>
@@ -20067,7 +20139,7 @@
                           <a:solidFill>
                             <a:srgbClr val="1A2B3C"/>
                           </a:solidFill>
-                          <a:latin typeface="Calibri"/>
+                          <a:latin typeface="Times New Roman"/>
                         </a:rPr>
                         <a:t>Lateral kondensatsiya</a:t>
                       </a:r>
@@ -20090,7 +20162,7 @@
                           <a:solidFill>
                             <a:srgbClr val="1A2B3C"/>
                           </a:solidFill>
-                          <a:latin typeface="Calibri"/>
+                          <a:latin typeface="Times New Roman"/>
                         </a:rPr>
                         <a:t>Yuqori</a:t>
                       </a:r>
@@ -20113,7 +20185,7 @@
                           <a:solidFill>
                             <a:srgbClr val="1A2B3C"/>
                           </a:solidFill>
-                          <a:latin typeface="Calibri"/>
+                          <a:latin typeface="Times New Roman"/>
                         </a:rPr>
                         <a:t>O'rtacha</a:t>
                       </a:r>
@@ -20136,9 +20208,9 @@
                           <a:solidFill>
                             <a:srgbClr val="1A2B3C"/>
                           </a:solidFill>
-                          <a:latin typeface="Calibri"/>
+                          <a:latin typeface="Times New Roman"/>
                         </a:rPr>
-                        <a:t>Spreader</a:t>
+                        <a:t>Yoyuvchi asbob</a:t>
                       </a:r>
                     </a:p>
                   </a:txBody>
@@ -20159,7 +20231,7 @@
                           <a:solidFill>
                             <a:srgbClr val="1A2B3C"/>
                           </a:solidFill>
-                          <a:latin typeface="Calibri"/>
+                          <a:latin typeface="Times New Roman"/>
                         </a:rPr>
                         <a:t>Universal — oltin standart</a:t>
                       </a:r>
@@ -20184,7 +20256,7 @@
                           <a:solidFill>
                             <a:srgbClr val="1A2B3C"/>
                           </a:solidFill>
-                          <a:latin typeface="Calibri"/>
+                          <a:latin typeface="Times New Roman"/>
                         </a:rPr>
                         <a:t>Vertikal / uzluksiz to'lqin</a:t>
                       </a:r>
@@ -20207,7 +20279,7 @@
                           <a:solidFill>
                             <a:srgbClr val="1A2B3C"/>
                           </a:solidFill>
-                          <a:latin typeface="Calibri"/>
+                          <a:latin typeface="Times New Roman"/>
                         </a:rPr>
                         <a:t>Eng yuqori</a:t>
                       </a:r>
@@ -20230,7 +20302,7 @@
                           <a:solidFill>
                             <a:srgbClr val="1A2B3C"/>
                           </a:solidFill>
-                          <a:latin typeface="Calibri"/>
+                          <a:latin typeface="Times New Roman"/>
                         </a:rPr>
                         <a:t>Murakkab</a:t>
                       </a:r>
@@ -20253,7 +20325,7 @@
                           <a:solidFill>
                             <a:srgbClr val="1A2B3C"/>
                           </a:solidFill>
-                          <a:latin typeface="Calibri"/>
+                          <a:latin typeface="Times New Roman"/>
                         </a:rPr>
                         <a:t>System B, Obtura</a:t>
                       </a:r>
@@ -20276,9 +20348,9 @@
                           <a:solidFill>
                             <a:srgbClr val="1A2B3C"/>
                           </a:solidFill>
-                          <a:latin typeface="Calibri"/>
+                          <a:latin typeface="Times New Roman"/>
                         </a:rPr>
-                        <a:t>Oval, egri, lateral kanallar</a:t>
+                        <a:t>Oval, qiyshiq, yon kanallar</a:t>
                       </a:r>
                     </a:p>
                   </a:txBody>
@@ -20301,7 +20373,7 @@
                           <a:solidFill>
                             <a:srgbClr val="1A2B3C"/>
                           </a:solidFill>
-                          <a:latin typeface="Calibri"/>
+                          <a:latin typeface="Times New Roman"/>
                         </a:rPr>
                         <a:t>Thermafil / GuttaCore</a:t>
                       </a:r>
@@ -20324,7 +20396,7 @@
                           <a:solidFill>
                             <a:srgbClr val="1A2B3C"/>
                           </a:solidFill>
-                          <a:latin typeface="Calibri"/>
+                          <a:latin typeface="Times New Roman"/>
                         </a:rPr>
                         <a:t>Yuqori</a:t>
                       </a:r>
@@ -20347,7 +20419,7 @@
                           <a:solidFill>
                             <a:srgbClr val="1A2B3C"/>
                           </a:solidFill>
-                          <a:latin typeface="Calibri"/>
+                          <a:latin typeface="Times New Roman"/>
                         </a:rPr>
                         <a:t>O'rtacha</a:t>
                       </a:r>
@@ -20370,9 +20442,9 @@
                           <a:solidFill>
                             <a:srgbClr val="1A2B3C"/>
                           </a:solidFill>
-                          <a:latin typeface="Calibri"/>
+                          <a:latin typeface="Times New Roman"/>
                         </a:rPr>
-                        <a:t>Maxsus pech</a:t>
+                        <a:t>Maxsus qizdirgich</a:t>
                       </a:r>
                     </a:p>
                   </a:txBody>
@@ -20393,9 +20465,9 @@
                           <a:solidFill>
                             <a:srgbClr val="1A2B3C"/>
                           </a:solidFill>
-                          <a:latin typeface="Calibri"/>
+                          <a:latin typeface="Times New Roman"/>
                         </a:rPr>
-                        <a:t>Juda egri, tor kanallar</a:t>
+                        <a:t>Keskin qiyshiq tor kanallar</a:t>
                       </a:r>
                     </a:p>
                   </a:txBody>
@@ -20525,11 +20597,11 @@
                 <a:solidFill>
                   <a:srgbClr val="00BFA6"/>
                 </a:solidFill>
-                <a:latin typeface="Calibri"/>
+                <a:latin typeface="Times New Roman"/>
               </a:defRPr>
             </a:pPr>
             <a:r>
-              <a:t>◆  KLINIK TANLOV ALGORITMI</a:t>
+              <a:t>◆  KLINIK TANLASH ALGORITMI</a:t>
             </a:r>
           </a:p>
         </p:txBody>
@@ -20561,11 +20633,11 @@
                 <a:solidFill>
                   <a:srgbClr val="FFFFFF"/>
                 </a:solidFill>
-                <a:latin typeface="Calibri"/>
+                <a:latin typeface="Times New Roman"/>
               </a:defRPr>
             </a:pPr>
             <a:r>
-              <a:t>Tor yumaloq kanal → lateral kondensatsiya  •  Oval / keng → issiq vertikal / uzluksiz to'lqin  •  Juda egri → Thermafil  •  Ochiq apeks → MTA plug  •  Qayta davolash → chiqarish oson sealer</a:t>
+              <a:t>Tor yumaloq kanal → lateral kondensatsiya  •  Oval / keng kanal → issiq vertikal yoki uzluksiz to'lqin  •  Keskin qiyshiq kanal → Thermafil  •  Ochiq apeks → MTA tiqin  •  Qayta davolash → oson chiqariladigan sealer</a:t>
             </a:r>
           </a:p>
         </p:txBody>
@@ -20729,7 +20801,7 @@
                 <a:solidFill>
                   <a:srgbClr val="FFD27A"/>
                 </a:solidFill>
-                <a:latin typeface="Calibri"/>
+                <a:latin typeface="Times New Roman"/>
               </a:rPr>
               <a:t>◆ ILMIY DALIL  </a:t>
             </a:r>
@@ -20738,9 +20810,9 @@
                 <a:solidFill>
                   <a:srgbClr val="FFFFFF"/>
                 </a:solidFill>
-                <a:latin typeface="Calibri"/>
+                <a:latin typeface="Times New Roman"/>
               </a:rPr>
-              <a:t>Ng et al., 2007–2008 (sistematik sharh): apikal chegara 0–2 mm + bo'shliqsiz zichlash + sifatli koronal restavratsiya = eng yuqori muvaffaqiyat.</a:t>
+              <a:t>Ng va b., 2007–2008 (sistematik sharh): plomba chegarasi cho'qqidan 0–2 mm da + bo'shliqsiz zichlash + sifatli koronal restavratsiya = eng yuqori samaradorlik.</a:t>
             </a:r>
           </a:p>
         </p:txBody>
@@ -20902,7 +20974,7 @@
                 <a:solidFill>
                   <a:srgbClr val="FFFFFF"/>
                 </a:solidFill>
-                <a:latin typeface="Calibri"/>
+                <a:latin typeface="Times New Roman"/>
               </a:rPr>
               <a:t>03</a:t>
             </a:r>
@@ -20936,7 +21008,7 @@
                 <a:solidFill>
                   <a:srgbClr val="00BFA6"/>
                 </a:solidFill>
-                <a:latin typeface="Calibri"/>
+                <a:latin typeface="Times New Roman"/>
               </a:defRPr>
             </a:pPr>
             <a:r>
@@ -20972,7 +21044,7 @@
                 <a:solidFill>
                   <a:srgbClr val="FFFFFF"/>
                 </a:solidFill>
-                <a:latin typeface="Calibri Light"/>
+                <a:latin typeface="Times New Roman"/>
               </a:defRPr>
             </a:pPr>
             <a:r>
@@ -21008,7 +21080,7 @@
                 <a:solidFill>
                   <a:srgbClr val="5A6D80"/>
                 </a:solidFill>
-                <a:latin typeface="Calibri"/>
+                <a:latin typeface="Times New Roman"/>
               </a:defRPr>
             </a:pPr>
             <a:r>
@@ -21044,7 +21116,7 @@
                 <a:solidFill>
                   <a:srgbClr val="5A6D80"/>
                 </a:solidFill>
-                <a:latin typeface="Calibri"/>
+                <a:latin typeface="Times New Roman"/>
               </a:defRPr>
             </a:pPr>
             <a:r>
@@ -21208,7 +21280,7 @@
           <a:p>
             <a:pPr>
               <a:lnSpc>
-                <a:spcPct val="115000"/>
+                <a:spcPct val="112000"/>
               </a:lnSpc>
               <a:spcBef>
                 <a:spcPts val="100"/>
@@ -21222,7 +21294,7 @@
                 <a:solidFill>
                   <a:srgbClr val="009E8A"/>
                 </a:solidFill>
-                <a:latin typeface="Calibri"/>
+                <a:latin typeface="Times New Roman"/>
               </a:rPr>
               <a:t>▸  </a:t>
             </a:r>
@@ -21231,7 +21303,7 @@
                 <a:solidFill>
                   <a:srgbClr val="1A2B3C"/>
                 </a:solidFill>
-                <a:latin typeface="Calibri"/>
+                <a:latin typeface="Times New Roman"/>
               </a:rPr>
               <a:t>Muammo ko'lami: </a:t>
             </a:r>
@@ -21240,15 +21312,15 @@
                 <a:solidFill>
                   <a:srgbClr val="1A2B3C"/>
                 </a:solidFill>
-                <a:latin typeface="Calibri"/>
+                <a:latin typeface="Times New Roman"/>
               </a:rPr>
-              <a:t>katta yoshli aholining yarmidan ko'pida kamida bitta endodontik davolangan tish (populyatsion tadqiqotlar).</a:t>
+              <a:t>katta yoshli aholining yarmidan ko'pida kamida bitta ildiz kanali davolangan tish mavjud (populyatsion tadqiqotlar).</a:t>
             </a:r>
           </a:p>
           <a:p>
             <a:pPr>
               <a:lnSpc>
-                <a:spcPct val="115000"/>
+                <a:spcPct val="112000"/>
               </a:lnSpc>
               <a:spcBef>
                 <a:spcPts val="100"/>
@@ -21262,7 +21334,7 @@
                 <a:solidFill>
                   <a:srgbClr val="009E8A"/>
                 </a:solidFill>
-                <a:latin typeface="Calibri"/>
+                <a:latin typeface="Times New Roman"/>
               </a:rPr>
               <a:t>▸  </a:t>
             </a:r>
@@ -21271,24 +21343,24 @@
                 <a:solidFill>
                   <a:srgbClr val="1A2B3C"/>
                 </a:solidFill>
-                <a:latin typeface="Calibri"/>
+                <a:latin typeface="Times New Roman"/>
               </a:rPr>
-              <a:t>Apikal periodontit saqlanmoqda: </a:t>
+              <a:t>Apikal periodontit saqlanib qolmoqda: </a:t>
             </a:r>
             <a:r>
               <a:rPr sz="1100">
                 <a:solidFill>
                   <a:srgbClr val="1A2B3C"/>
                 </a:solidFill>
-                <a:latin typeface="Calibri"/>
+                <a:latin typeface="Times New Roman"/>
               </a:rPr>
-              <a:t>davolangan tishlarning ~30–40% ida periapikal o'zgarishlar radiologik aniqlanadi.</a:t>
+              <a:t>davolangan tishlarning taxminan 30–40 foizida periapikal o'zgarishlar rentgenologik aniqlanadi.</a:t>
             </a:r>
           </a:p>
           <a:p>
             <a:pPr>
               <a:lnSpc>
-                <a:spcPct val="115000"/>
+                <a:spcPct val="112000"/>
               </a:lnSpc>
               <a:spcBef>
                 <a:spcPts val="100"/>
@@ -21302,7 +21374,7 @@
                 <a:solidFill>
                   <a:srgbClr val="009E8A"/>
                 </a:solidFill>
-                <a:latin typeface="Calibri"/>
+                <a:latin typeface="Times New Roman"/>
               </a:rPr>
               <a:t>▸  </a:t>
             </a:r>
@@ -21311,24 +21383,24 @@
                 <a:solidFill>
                   <a:srgbClr val="1A2B3C"/>
                 </a:solidFill>
-                <a:latin typeface="Calibri"/>
+                <a:latin typeface="Times New Roman"/>
               </a:rPr>
-              <a:t>Omadsizlikning ~60% sababi — </a:t>
+              <a:t>Samarasizlikning asosiy sababi — </a:t>
             </a:r>
             <a:r>
               <a:rPr sz="1100">
                 <a:solidFill>
                   <a:srgbClr val="1A2B3C"/>
                 </a:solidFill>
-                <a:latin typeface="Calibri"/>
+                <a:latin typeface="Times New Roman"/>
               </a:rPr>
-              <a:t>germetik bo'lmagan obturatsiya: mikrosızıntı → reinfeksiya (Ingle's Endodontics).</a:t>
+              <a:t>germetik bo'lmagan obturatsiya (taxminan 60 foiz): mikrooqish → qayta zararlanish (endodontik adabiyotlar tahlili bo'yicha).</a:t>
             </a:r>
           </a:p>
           <a:p>
             <a:pPr>
               <a:lnSpc>
-                <a:spcPct val="115000"/>
+                <a:spcPct val="112000"/>
               </a:lnSpc>
               <a:spcBef>
                 <a:spcPts val="100"/>
@@ -21342,7 +21414,7 @@
                 <a:solidFill>
                   <a:srgbClr val="009E8A"/>
                 </a:solidFill>
-                <a:latin typeface="Calibri"/>
+                <a:latin typeface="Times New Roman"/>
               </a:rPr>
               <a:t>▸  </a:t>
             </a:r>
@@ -21351,24 +21423,24 @@
                 <a:solidFill>
                   <a:srgbClr val="1A2B3C"/>
                 </a:solidFill>
-                <a:latin typeface="Calibri"/>
+                <a:latin typeface="Times New Roman"/>
               </a:rPr>
-              <a:t>Kanal mikrobiotasi chidamli: </a:t>
+              <a:t>Kanal mikroflorasi chidamli: </a:t>
             </a:r>
             <a:r>
               <a:rPr sz="1100">
                 <a:solidFill>
                   <a:srgbClr val="1A2B3C"/>
                 </a:solidFill>
-                <a:latin typeface="Calibri"/>
+                <a:latin typeface="Times New Roman"/>
               </a:rPr>
-              <a:t>E. faecalis dentin naychalariga chuqur kiradi va davolashdan omon qoladi (Molander et al., 1998).</a:t>
+              <a:t>Enterococcus faecalis dentin naychalariga chuqur kirib o'rnashadi va ishlovdan so'ng ham omon qoladi (Molander va b., 1998).</a:t>
             </a:r>
           </a:p>
           <a:p>
             <a:pPr>
               <a:lnSpc>
-                <a:spcPct val="115000"/>
+                <a:spcPct val="112000"/>
               </a:lnSpc>
               <a:spcBef>
                 <a:spcPts val="100"/>
@@ -21382,7 +21454,7 @@
                 <a:solidFill>
                   <a:srgbClr val="009E8A"/>
                 </a:solidFill>
-                <a:latin typeface="Calibri"/>
+                <a:latin typeface="Times New Roman"/>
               </a:rPr>
               <a:t>▸  </a:t>
             </a:r>
@@ -21391,18 +21463,18 @@
                 <a:solidFill>
                   <a:srgbClr val="1A2B3C"/>
                 </a:solidFill>
-                <a:latin typeface="Calibri"/>
+                <a:latin typeface="Times New Roman"/>
               </a:rPr>
-              <a:t>Sifatli davolash muvaffaqiyati — </a:t>
+              <a:t>Sifatli davolash samaradorligi — </a:t>
             </a:r>
             <a:r>
               <a:rPr sz="1100">
                 <a:solidFill>
                   <a:srgbClr val="1A2B3C"/>
                 </a:solidFill>
-                <a:latin typeface="Calibri"/>
+                <a:latin typeface="Times New Roman"/>
               </a:rPr>
-              <a:t>90–95%: zich apikal to'siq + koronal germetiklik uzoq muddatli natijani belgilaydi.</a:t>
+              <a:t>90–95 foiz: zich apikal to'siq va koronal germetiklik uzoq muddatli natijani belgilaydi.</a:t>
             </a:r>
           </a:p>
         </p:txBody>
@@ -21546,11 +21618,11 @@
                 <a:solidFill>
                   <a:srgbClr val="5A6D80"/>
                 </a:solidFill>
-                <a:latin typeface="Calibri"/>
+                <a:latin typeface="Times New Roman"/>
               </a:defRPr>
             </a:pPr>
             <a:r>
-              <a:t>Rentgen: ildiz uchida periapikal o'choq (sxematik)</a:t>
+              <a:t>Rentgenogramma: ildiz uchida periapikal o'choq (sxematik tasvir)</a:t>
             </a:r>
           </a:p>
         </p:txBody>
@@ -21670,11 +21742,11 @@
                 <a:solidFill>
                   <a:srgbClr val="00BFA6"/>
                 </a:solidFill>
-                <a:latin typeface="Calibri"/>
+                <a:latin typeface="Times New Roman"/>
               </a:defRPr>
             </a:pPr>
             <a:r>
-              <a:t>90–95%</a:t>
+              <a:t>90–95 %</a:t>
             </a:r>
           </a:p>
         </p:txBody>
@@ -21706,7 +21778,7 @@
                 <a:solidFill>
                   <a:srgbClr val="FFFFFF"/>
                 </a:solidFill>
-                <a:latin typeface="Calibri"/>
+                <a:latin typeface="Times New Roman"/>
               </a:defRPr>
             </a:pPr>
             <a:r>
@@ -21714,7 +21786,7 @@
             </a:r>
             <a:br/>
             <a:r>
-              <a:t>muvaffaqiyati</a:t>
+              <a:t>samaradorligi</a:t>
             </a:r>
           </a:p>
         </p:txBody>
@@ -21834,11 +21906,11 @@
                 <a:solidFill>
                   <a:srgbClr val="00BFA6"/>
                 </a:solidFill>
-                <a:latin typeface="Calibri"/>
+                <a:latin typeface="Times New Roman"/>
               </a:defRPr>
             </a:pPr>
             <a:r>
-              <a:t>~60%</a:t>
+              <a:t>~60 %</a:t>
             </a:r>
           </a:p>
         </p:txBody>
@@ -21870,15 +21942,15 @@
                 <a:solidFill>
                   <a:srgbClr val="FFFFFF"/>
                 </a:solidFill>
-                <a:latin typeface="Calibri"/>
+                <a:latin typeface="Times New Roman"/>
               </a:defRPr>
             </a:pPr>
             <a:r>
-              <a:t>omadsizlik sababi —</a:t>
+              <a:t>samarasizlik sababi —</a:t>
             </a:r>
             <a:br/>
             <a:r>
-              <a:t>germetiksizlik</a:t>
+              <a:t>germetiklik buzilishi</a:t>
             </a:r>
           </a:p>
         </p:txBody>
@@ -22042,7 +22114,7 @@
                 <a:solidFill>
                   <a:srgbClr val="FFD27A"/>
                 </a:solidFill>
-                <a:latin typeface="Calibri"/>
+                <a:latin typeface="Times New Roman"/>
               </a:rPr>
               <a:t>◆ ILMIY DALIL  </a:t>
             </a:r>
@@ -22051,9 +22123,9 @@
                 <a:solidFill>
                   <a:srgbClr val="FFFFFF"/>
                 </a:solidFill>
-                <a:latin typeface="Calibri"/>
+                <a:latin typeface="Times New Roman"/>
               </a:rPr>
-              <a:t>Sjögren et al., 1990: obturatsiya paytida kanal ekmasida mikrob topilmasa muvaffaqiyat 94%, topilsa 68%.  •  Kakehashi et al., 1965: mikrobsiz muhitda ochiq pulpa nekrozga uchramaydi — infeksiya birlamchi sabab.</a:t>
+              <a:t>Sjögren va b., 1990: obturatsiya vaqtida kanal ekmasida mikroorganizmlar topilmasa, samaradorlik 94 foiz, topilsa — 68 foiz.  •  Kakehashi va b., 1965: mikroorganizmlarsiz muhitda ochiq pulpa nekrozga uchramaydi — infeksiya birlamchi sababdir.</a:t>
             </a:r>
           </a:p>
         </p:txBody>
@@ -22215,7 +22287,7 @@
                 <a:solidFill>
                   <a:srgbClr val="FFFFFF"/>
                 </a:solidFill>
-                <a:latin typeface="Calibri"/>
+                <a:latin typeface="Times New Roman"/>
               </a:rPr>
               <a:t>04</a:t>
             </a:r>
@@ -22249,7 +22321,7 @@
                 <a:solidFill>
                   <a:srgbClr val="00BFA6"/>
                 </a:solidFill>
-                <a:latin typeface="Calibri"/>
+                <a:latin typeface="Times New Roman"/>
               </a:defRPr>
             </a:pPr>
             <a:r>
@@ -22285,7 +22357,7 @@
                 <a:solidFill>
                   <a:srgbClr val="FFFFFF"/>
                 </a:solidFill>
-                <a:latin typeface="Calibri Light"/>
+                <a:latin typeface="Times New Roman"/>
               </a:defRPr>
             </a:pPr>
             <a:r>
@@ -22321,7 +22393,7 @@
                 <a:solidFill>
                   <a:srgbClr val="5A6D80"/>
                 </a:solidFill>
-                <a:latin typeface="Calibri"/>
+                <a:latin typeface="Times New Roman"/>
               </a:defRPr>
             </a:pPr>
             <a:r>
@@ -22357,7 +22429,7 @@
                 <a:solidFill>
                   <a:srgbClr val="5A6D80"/>
                 </a:solidFill>
-                <a:latin typeface="Calibri"/>
+                <a:latin typeface="Times New Roman"/>
               </a:defRPr>
             </a:pPr>
             <a:r>
@@ -22524,11 +22596,11 @@
                 <a:solidFill>
                   <a:srgbClr val="0B2C4A"/>
                 </a:solidFill>
-                <a:latin typeface="Calibri"/>
+                <a:latin typeface="Times New Roman"/>
               </a:defRPr>
             </a:pPr>
             <a:r>
-              <a:t>Murakkab 3D labirint</a:t>
+              <a:t>Murakkab uch o'lchamli labirint</a:t>
             </a:r>
           </a:p>
         </p:txBody>
@@ -22557,7 +22629,7 @@
           <a:p>
             <a:pPr>
               <a:lnSpc>
-                <a:spcPct val="115000"/>
+                <a:spcPct val="112000"/>
               </a:lnSpc>
               <a:spcBef>
                 <a:spcPts val="100"/>
@@ -22571,7 +22643,7 @@
                 <a:solidFill>
                   <a:srgbClr val="009E8A"/>
                 </a:solidFill>
-                <a:latin typeface="Calibri"/>
+                <a:latin typeface="Times New Roman"/>
               </a:rPr>
               <a:t>●  </a:t>
             </a:r>
@@ -22580,24 +22652,24 @@
                 <a:solidFill>
                   <a:srgbClr val="1A2B3C"/>
                 </a:solidFill>
-                <a:latin typeface="Calibri"/>
+                <a:latin typeface="Times New Roman"/>
               </a:rPr>
-              <a:t>Lateral kanallar </a:t>
+              <a:t>Yon (lateral) va qo'shimcha </a:t>
             </a:r>
             <a:r>
               <a:rPr sz="1050">
                 <a:solidFill>
                   <a:srgbClr val="1A2B3C"/>
                 </a:solidFill>
-                <a:latin typeface="Calibri"/>
+                <a:latin typeface="Times New Roman"/>
               </a:rPr>
-              <a:t>— 30–40% ildizlarda</a:t>
+              <a:t>kanallar — 30–40 foiz ildizlarda</a:t>
             </a:r>
           </a:p>
           <a:p>
             <a:pPr>
               <a:lnSpc>
-                <a:spcPct val="115000"/>
+                <a:spcPct val="112000"/>
               </a:lnSpc>
               <a:spcBef>
                 <a:spcPts val="100"/>
@@ -22611,7 +22683,7 @@
                 <a:solidFill>
                   <a:srgbClr val="009E8A"/>
                 </a:solidFill>
-                <a:latin typeface="Calibri"/>
+                <a:latin typeface="Times New Roman"/>
               </a:rPr>
               <a:t>●  </a:t>
             </a:r>
@@ -22620,24 +22692,24 @@
                 <a:solidFill>
                   <a:srgbClr val="1A2B3C"/>
                 </a:solidFill>
-                <a:latin typeface="Calibri"/>
+                <a:latin typeface="Times New Roman"/>
               </a:rPr>
-              <a:t>Isthmus, anastomoz, </a:t>
+              <a:t>Istmus, anastomozlar, </a:t>
             </a:r>
             <a:r>
               <a:rPr sz="1050">
                 <a:solidFill>
                   <a:srgbClr val="1A2B3C"/>
                 </a:solidFill>
-                <a:latin typeface="Calibri"/>
+                <a:latin typeface="Times New Roman"/>
               </a:rPr>
-              <a:t>apikal delta</a:t>
+              <a:t>apikal delta tarmoqlari</a:t>
             </a:r>
           </a:p>
           <a:p>
             <a:pPr>
               <a:lnSpc>
-                <a:spcPct val="115000"/>
+                <a:spcPct val="112000"/>
               </a:lnSpc>
               <a:spcBef>
                 <a:spcPts val="100"/>
@@ -22651,7 +22723,7 @@
                 <a:solidFill>
                   <a:srgbClr val="009E8A"/>
                 </a:solidFill>
-                <a:latin typeface="Calibri"/>
+                <a:latin typeface="Times New Roman"/>
               </a:rPr>
               <a:t>●  </a:t>
             </a:r>
@@ -22660,24 +22732,24 @@
                 <a:solidFill>
                   <a:srgbClr val="1A2B3C"/>
                 </a:solidFill>
-                <a:latin typeface="Calibri"/>
+                <a:latin typeface="Times New Roman"/>
               </a:rPr>
-              <a:t>Oval / C-shakl kesim </a:t>
+              <a:t>Oval yoki C-simon kesim </a:t>
             </a:r>
             <a:r>
               <a:rPr sz="1050">
                 <a:solidFill>
                   <a:srgbClr val="1A2B3C"/>
                 </a:solidFill>
-                <a:latin typeface="Calibri"/>
+                <a:latin typeface="Times New Roman"/>
               </a:rPr>
-              <a:t>— shtift bilan to'lmaydi</a:t>
+              <a:t>— yumaloq shtift bilan yopilmaydi</a:t>
             </a:r>
           </a:p>
           <a:p>
             <a:pPr>
               <a:lnSpc>
-                <a:spcPct val="115000"/>
+                <a:spcPct val="112000"/>
               </a:lnSpc>
               <a:spcBef>
                 <a:spcPts val="100"/>
@@ -22691,7 +22763,7 @@
                 <a:solidFill>
                   <a:srgbClr val="009E8A"/>
                 </a:solidFill>
-                <a:latin typeface="Calibri"/>
+                <a:latin typeface="Times New Roman"/>
               </a:rPr>
               <a:t>●  </a:t>
             </a:r>
@@ -22700,7 +22772,7 @@
                 <a:solidFill>
                   <a:srgbClr val="1A2B3C"/>
                 </a:solidFill>
-                <a:latin typeface="Calibri"/>
+                <a:latin typeface="Times New Roman"/>
               </a:rPr>
               <a:t>MB2 kanal </a:t>
             </a:r>
@@ -22709,15 +22781,15 @@
                 <a:solidFill>
                   <a:srgbClr val="1A2B3C"/>
                 </a:solidFill>
-                <a:latin typeface="Calibri"/>
+                <a:latin typeface="Times New Roman"/>
               </a:rPr>
-              <a:t>— yuqori 1-molyarda 60–90%</a:t>
+              <a:t>— yuqori birinchi katta oziq tishda 60–90 foiz</a:t>
             </a:r>
           </a:p>
           <a:p>
             <a:pPr>
               <a:lnSpc>
-                <a:spcPct val="115000"/>
+                <a:spcPct val="112000"/>
               </a:lnSpc>
               <a:spcBef>
                 <a:spcPts val="100"/>
@@ -22731,7 +22803,7 @@
                 <a:solidFill>
                   <a:srgbClr val="009E8A"/>
                 </a:solidFill>
-                <a:latin typeface="Calibri"/>
+                <a:latin typeface="Times New Roman"/>
               </a:rPr>
               <a:t>●  </a:t>
             </a:r>
@@ -22740,7 +22812,7 @@
                 <a:solidFill>
                   <a:srgbClr val="1A2B3C"/>
                 </a:solidFill>
-                <a:latin typeface="Calibri"/>
+                <a:latin typeface="Times New Roman"/>
               </a:rPr>
               <a:t>Dentin naychalari </a:t>
             </a:r>
@@ -22749,9 +22821,9 @@
                 <a:solidFill>
                   <a:srgbClr val="1A2B3C"/>
                 </a:solidFill>
-                <a:latin typeface="Calibri"/>
+                <a:latin typeface="Times New Roman"/>
               </a:rPr>
-              <a:t>— 1 mm² da 20–40 ming</a:t>
+              <a:t>— 1 mm² da 20–40 ming dona</a:t>
             </a:r>
           </a:p>
         </p:txBody>
@@ -22895,11 +22967,11 @@
                 <a:solidFill>
                   <a:srgbClr val="5A6D80"/>
                 </a:solidFill>
-                <a:latin typeface="Calibri"/>
+                <a:latin typeface="Times New Roman"/>
               </a:defRPr>
             </a:pPr>
             <a:r>
-              <a:t>Lateral kanallar, isthmus va apikal delta (sxematik)</a:t>
+              <a:t>Yon kanallar, istmus va apikal delta (sxematik tasvir)</a:t>
             </a:r>
           </a:p>
         </p:txBody>
@@ -23019,7 +23091,7 @@
                 <a:solidFill>
                   <a:srgbClr val="00BFA6"/>
                 </a:solidFill>
-                <a:latin typeface="Calibri"/>
+                <a:latin typeface="Times New Roman"/>
               </a:defRPr>
             </a:pPr>
             <a:r>
@@ -23073,7 +23145,7 @@
                 <a:solidFill>
                   <a:srgbClr val="FFFFFF"/>
                 </a:solidFill>
-                <a:latin typeface="Calibri"/>
+                <a:latin typeface="Times New Roman"/>
               </a:rPr>
               <a:t>1</a:t>
             </a:r>
@@ -23107,7 +23179,7 @@
                 <a:solidFill>
                   <a:srgbClr val="FFFFFF"/>
                 </a:solidFill>
-                <a:latin typeface="Calibri"/>
+                <a:latin typeface="Times New Roman"/>
               </a:defRPr>
             </a:pPr>
             <a:r>
@@ -23161,7 +23233,7 @@
                 <a:solidFill>
                   <a:srgbClr val="FFFFFF"/>
                 </a:solidFill>
-                <a:latin typeface="Calibri"/>
+                <a:latin typeface="Times New Roman"/>
               </a:rPr>
               <a:t>2</a:t>
             </a:r>
@@ -23195,7 +23267,7 @@
                 <a:solidFill>
                   <a:srgbClr val="FFFFFF"/>
                 </a:solidFill>
-                <a:latin typeface="Calibri"/>
+                <a:latin typeface="Times New Roman"/>
               </a:defRPr>
             </a:pPr>
             <a:r>
@@ -23249,7 +23321,7 @@
                 <a:solidFill>
                   <a:srgbClr val="FFFFFF"/>
                 </a:solidFill>
-                <a:latin typeface="Calibri"/>
+                <a:latin typeface="Times New Roman"/>
               </a:rPr>
               <a:t>3</a:t>
             </a:r>
@@ -23283,11 +23355,11 @@
                 <a:solidFill>
                   <a:srgbClr val="FFFFFF"/>
                 </a:solidFill>
-                <a:latin typeface="Calibri"/>
+                <a:latin typeface="Times New Roman"/>
               </a:defRPr>
             </a:pPr>
             <a:r>
-              <a:t>Reinfeksiya va mikrosızıntını oldini olish</a:t>
+              <a:t>Qayta zararlanish va mikrooqishning oldini olish</a:t>
             </a:r>
           </a:p>
         </p:txBody>
@@ -23337,7 +23409,7 @@
                 <a:solidFill>
                   <a:srgbClr val="FFFFFF"/>
                 </a:solidFill>
-                <a:latin typeface="Calibri"/>
+                <a:latin typeface="Times New Roman"/>
               </a:rPr>
               <a:t>4</a:t>
             </a:r>
@@ -23371,7 +23443,7 @@
                 <a:solidFill>
                   <a:srgbClr val="FFFFFF"/>
                 </a:solidFill>
-                <a:latin typeface="Calibri"/>
+                <a:latin typeface="Times New Roman"/>
               </a:defRPr>
             </a:pPr>
             <a:r>
@@ -23407,11 +23479,11 @@
                 <a:solidFill>
                   <a:srgbClr val="00BFA6"/>
                 </a:solidFill>
-                <a:latin typeface="Calibri"/>
+                <a:latin typeface="Times New Roman"/>
               </a:defRPr>
             </a:pPr>
             <a:r>
-              <a:t>Triada: tayyorlash → dezinfeksiya → obturatsiya</a:t>
+              <a:t>Davolash triadasi: tayyorlash → dezinfeksiya → obturatsiya</a:t>
             </a:r>
           </a:p>
         </p:txBody>
@@ -23573,7 +23645,7 @@
                 <a:solidFill>
                   <a:srgbClr val="FFFFFF"/>
                 </a:solidFill>
-                <a:latin typeface="Calibri"/>
+                <a:latin typeface="Times New Roman"/>
               </a:rPr>
               <a:t>05</a:t>
             </a:r>
@@ -23607,7 +23679,7 @@
                 <a:solidFill>
                   <a:srgbClr val="00BFA6"/>
                 </a:solidFill>
-                <a:latin typeface="Calibri"/>
+                <a:latin typeface="Times New Roman"/>
               </a:defRPr>
             </a:pPr>
             <a:r>
@@ -23643,7 +23715,7 @@
                 <a:solidFill>
                   <a:srgbClr val="FFFFFF"/>
                 </a:solidFill>
-                <a:latin typeface="Calibri Light"/>
+                <a:latin typeface="Times New Roman"/>
               </a:defRPr>
             </a:pPr>
             <a:r>
@@ -23679,7 +23751,7 @@
                 <a:solidFill>
                   <a:srgbClr val="5A6D80"/>
                 </a:solidFill>
-                <a:latin typeface="Calibri"/>
+                <a:latin typeface="Times New Roman"/>
               </a:defRPr>
             </a:pPr>
             <a:r>
@@ -23715,7 +23787,7 @@
                 <a:solidFill>
                   <a:srgbClr val="5A6D80"/>
                 </a:solidFill>
-                <a:latin typeface="Calibri"/>
+                <a:latin typeface="Times New Roman"/>
               </a:defRPr>
             </a:pPr>
             <a:r>
@@ -23925,7 +23997,7 @@
                 <a:solidFill>
                   <a:srgbClr val="0B2C4A"/>
                 </a:solidFill>
-                <a:latin typeface="Calibri"/>
+                <a:latin typeface="Times New Roman"/>
               </a:defRPr>
             </a:pPr>
             <a:r>
@@ -23961,7 +24033,7 @@
                 <a:solidFill>
                   <a:srgbClr val="5A6D80"/>
                 </a:solidFill>
-                <a:latin typeface="Calibri"/>
+                <a:latin typeface="Times New Roman"/>
               </a:defRPr>
             </a:pPr>
             <a:r>
@@ -24128,11 +24200,11 @@
                 <a:solidFill>
                   <a:srgbClr val="0B2C4A"/>
                 </a:solidFill>
-                <a:latin typeface="Calibri"/>
+                <a:latin typeface="Times New Roman"/>
               </a:defRPr>
             </a:pPr>
             <a:r>
-              <a:t>◈  Ajoyib germetiklik</a:t>
+              <a:t>◈  To'liq germetiklik</a:t>
             </a:r>
           </a:p>
         </p:txBody>
@@ -24164,11 +24236,11 @@
                 <a:solidFill>
                   <a:srgbClr val="5A6D80"/>
                 </a:solidFill>
-                <a:latin typeface="Calibri"/>
+                <a:latin typeface="Times New Roman"/>
               </a:defRPr>
             </a:pPr>
             <a:r>
-              <a:t>lateral + apikal mikrosızıntı yo'q</a:t>
+              <a:t>apikal va lateral mikrooqish yo'q</a:t>
             </a:r>
           </a:p>
         </p:txBody>
@@ -24331,11 +24403,11 @@
                 <a:solidFill>
                   <a:srgbClr val="0B2C4A"/>
                 </a:solidFill>
-                <a:latin typeface="Calibri"/>
+                <a:latin typeface="Times New Roman"/>
               </a:defRPr>
             </a:pPr>
             <a:r>
-              <a:t>◈  O'lcham barqaror</a:t>
+              <a:t>◈  Hajm barqarorligi</a:t>
             </a:r>
           </a:p>
         </p:txBody>
@@ -24367,7 +24439,7 @@
                 <a:solidFill>
                   <a:srgbClr val="5A6D80"/>
                 </a:solidFill>
-                <a:latin typeface="Calibri"/>
+                <a:latin typeface="Times New Roman"/>
               </a:defRPr>
             </a:pPr>
             <a:r>
@@ -24534,11 +24606,11 @@
                 <a:solidFill>
                   <a:srgbClr val="0B2C4A"/>
                 </a:solidFill>
-                <a:latin typeface="Calibri"/>
+                <a:latin typeface="Times New Roman"/>
               </a:defRPr>
             </a:pPr>
             <a:r>
-              <a:t>◈  Rentgenkontrastli</a:t>
+              <a:t>◈  Rentgenkontrastlilik</a:t>
             </a:r>
           </a:p>
         </p:txBody>
@@ -24570,11 +24642,11 @@
                 <a:solidFill>
                   <a:srgbClr val="5A6D80"/>
                 </a:solidFill>
-                <a:latin typeface="Calibri"/>
+                <a:latin typeface="Times New Roman"/>
               </a:defRPr>
             </a:pPr>
             <a:r>
-              <a:t>rentgenda aniq ko'rinadi</a:t>
+              <a:t>rentgenogrammada aniq ko'rinadi</a:t>
             </a:r>
           </a:p>
         </p:txBody>
@@ -24737,11 +24809,11 @@
                 <a:solidFill>
                   <a:srgbClr val="0B2C4A"/>
                 </a:solidFill>
-                <a:latin typeface="Calibri"/>
+                <a:latin typeface="Times New Roman"/>
               </a:defRPr>
             </a:pPr>
             <a:r>
-              <a:t>◈  Bakteriostatik</a:t>
+              <a:t>◈  Bakteriostatik ta'sir</a:t>
             </a:r>
           </a:p>
         </p:txBody>
@@ -24773,11 +24845,11 @@
                 <a:solidFill>
                   <a:srgbClr val="5A6D80"/>
                 </a:solidFill>
-                <a:latin typeface="Calibri"/>
+                <a:latin typeface="Times New Roman"/>
               </a:defRPr>
             </a:pPr>
             <a:r>
-              <a:t>steril, antiseptik xususiyatli</a:t>
+              <a:t>steril, mikrob ko'payishini to'xtatadi</a:t>
             </a:r>
           </a:p>
         </p:txBody>
@@ -24940,11 +25012,11 @@
                 <a:solidFill>
                   <a:srgbClr val="0B2C4A"/>
                 </a:solidFill>
-                <a:latin typeface="Calibri"/>
+                <a:latin typeface="Times New Roman"/>
               </a:defRPr>
             </a:pPr>
             <a:r>
-              <a:t>◈  Biomoslashuvchan</a:t>
+              <a:t>◈  Biomuvofiqlik</a:t>
             </a:r>
           </a:p>
         </p:txBody>
@@ -24976,11 +25048,11 @@
                 <a:solidFill>
                   <a:srgbClr val="5A6D80"/>
                 </a:solidFill>
-                <a:latin typeface="Calibri"/>
+                <a:latin typeface="Times New Roman"/>
               </a:defRPr>
             </a:pPr>
             <a:r>
-              <a:t>qotgach toksik emas, tirnashsiz</a:t>
+              <a:t>qotgandan keyin bezarar, jarohatlamaydi</a:t>
             </a:r>
           </a:p>
         </p:txBody>
@@ -25143,11 +25215,11 @@
                 <a:solidFill>
                   <a:srgbClr val="0B2C4A"/>
                 </a:solidFill>
-                <a:latin typeface="Calibri"/>
+                <a:latin typeface="Times New Roman"/>
               </a:defRPr>
             </a:pPr>
             <a:r>
-              <a:t>◈  Bo'yoq bermaydi</a:t>
+              <a:t>◈  Rangni o'zgartirmaydi</a:t>
             </a:r>
           </a:p>
         </p:txBody>
@@ -25179,7 +25251,7 @@
                 <a:solidFill>
                   <a:srgbClr val="5A6D80"/>
                 </a:solidFill>
-                <a:latin typeface="Calibri"/>
+                <a:latin typeface="Times New Roman"/>
               </a:defRPr>
             </a:pPr>
             <a:r>
@@ -25346,11 +25418,11 @@
                 <a:solidFill>
                   <a:srgbClr val="0B2C4A"/>
                 </a:solidFill>
-                <a:latin typeface="Calibri"/>
+                <a:latin typeface="Times New Roman"/>
               </a:defRPr>
             </a:pPr>
             <a:r>
-              <a:t>◈  Qayta olinadi</a:t>
+              <a:t>◈  Qayta chiqariladi</a:t>
             </a:r>
           </a:p>
         </p:txBody>
@@ -25382,11 +25454,11 @@
                 <a:solidFill>
                   <a:srgbClr val="5A6D80"/>
                 </a:solidFill>
-                <a:latin typeface="Calibri"/>
+                <a:latin typeface="Times New Roman"/>
               </a:defRPr>
             </a:pPr>
             <a:r>
-              <a:t>retreatmentda oson chiqariladi</a:t>
+              <a:t>qayta davolashda oson olinadi</a:t>
             </a:r>
           </a:p>
         </p:txBody>
@@ -25549,11 +25621,11 @@
                 <a:solidFill>
                   <a:srgbClr val="0B2C4A"/>
                 </a:solidFill>
-                <a:latin typeface="Calibri"/>
+                <a:latin typeface="Times New Roman"/>
               </a:defRPr>
             </a:pPr>
             <a:r>
-              <a:t>◈  Namda ishlaydi</a:t>
+              <a:t>◈  Nam muhitda barqaror</a:t>
             </a:r>
           </a:p>
         </p:txBody>
@@ -25585,11 +25657,11 @@
                 <a:solidFill>
                   <a:srgbClr val="5A6D80"/>
                 </a:solidFill>
-                <a:latin typeface="Calibri"/>
+                <a:latin typeface="Times New Roman"/>
               </a:defRPr>
             </a:pPr>
             <a:r>
-              <a:t>nam kanal muhitiga chidamli</a:t>
+              <a:t>nam sharoitda xususiyatini saqlaydi</a:t>
             </a:r>
           </a:p>
         </p:txBody>
@@ -25621,11 +25693,11 @@
                 <a:solidFill>
                   <a:srgbClr val="5A6D80"/>
                 </a:solidFill>
-                <a:latin typeface="Calibri"/>
+                <a:latin typeface="Times New Roman"/>
               </a:defRPr>
             </a:pPr>
             <a:r>
-              <a:t>Grossman L.I., Endodontic Practice — 11 talabning qisqartirilgan talqini: ideal material hali yaratilmagan, tanlov klinik vaziyatga ko'ra!</a:t>
+              <a:t>Grossman L.I., Endodontic Practice — 11 talabning qisqartirilgan bayoni: ideal material hozirgacha yaratilmagan, tanlash klinik vaziyatga ko'ra amalga oshiriladi!</a:t>
             </a:r>
           </a:p>
         </p:txBody>
@@ -25787,7 +25859,7 @@
                 <a:solidFill>
                   <a:srgbClr val="FFFFFF"/>
                 </a:solidFill>
-                <a:latin typeface="Calibri"/>
+                <a:latin typeface="Times New Roman"/>
               </a:rPr>
               <a:t>06</a:t>
             </a:r>
@@ -25821,7 +25893,7 @@
                 <a:solidFill>
                   <a:srgbClr val="00BFA6"/>
                 </a:solidFill>
-                <a:latin typeface="Calibri"/>
+                <a:latin typeface="Times New Roman"/>
               </a:defRPr>
             </a:pPr>
             <a:r>
@@ -25857,7 +25929,7 @@
                 <a:solidFill>
                   <a:srgbClr val="FFFFFF"/>
                 </a:solidFill>
-                <a:latin typeface="Calibri Light"/>
+                <a:latin typeface="Times New Roman"/>
               </a:defRPr>
             </a:pPr>
             <a:r>
@@ -25893,7 +25965,7 @@
                 <a:solidFill>
                   <a:srgbClr val="5A6D80"/>
                 </a:solidFill>
-                <a:latin typeface="Calibri"/>
+                <a:latin typeface="Times New Roman"/>
               </a:defRPr>
             </a:pPr>
             <a:r>
@@ -25929,7 +26001,7 @@
                 <a:solidFill>
                   <a:srgbClr val="5A6D80"/>
                 </a:solidFill>
-                <a:latin typeface="Calibri"/>
+                <a:latin typeface="Times New Roman"/>
               </a:defRPr>
             </a:pPr>
             <a:r>
@@ -26016,7 +26088,7 @@
                           <a:solidFill>
                             <a:srgbClr val="FFFFFF"/>
                           </a:solidFill>
-                          <a:latin typeface="Calibri"/>
+                          <a:latin typeface="Times New Roman"/>
                         </a:rPr>
                         <a:t>Ko'rsatkich (ISO 6876)</a:t>
                       </a:r>
@@ -26039,9 +26111,9 @@
                           <a:solidFill>
                             <a:srgbClr val="FFFFFF"/>
                           </a:solidFill>
-                          <a:latin typeface="Calibri"/>
+                          <a:latin typeface="Times New Roman"/>
                         </a:rPr>
-                        <a:t>Minimal talab</a:t>
+                        <a:t>Me'yoriy talab</a:t>
                       </a:r>
                     </a:p>
                   </a:txBody>
@@ -26062,9 +26134,9 @@
                           <a:solidFill>
                             <a:srgbClr val="FFFFFF"/>
                           </a:solidFill>
-                          <a:latin typeface="Calibri"/>
+                          <a:latin typeface="Times New Roman"/>
                         </a:rPr>
-                        <a:t>Klinik ma'nosi</a:t>
+                        <a:t>Klinik ahamiyati</a:t>
                       </a:r>
                     </a:p>
                   </a:txBody>
@@ -26087,9 +26159,9 @@
                           <a:solidFill>
                             <a:srgbClr val="1A2B3C"/>
                           </a:solidFill>
-                          <a:latin typeface="Calibri"/>
+                          <a:latin typeface="Times New Roman"/>
                         </a:rPr>
-                        <a:t>Oqimtarlik (flow)</a:t>
+                        <a:t>Oquvchanlik (flow)</a:t>
                       </a:r>
                     </a:p>
                   </a:txBody>
@@ -26110,7 +26182,7 @@
                           <a:solidFill>
                             <a:srgbClr val="1A2B3C"/>
                           </a:solidFill>
-                          <a:latin typeface="Calibri"/>
+                          <a:latin typeface="Times New Roman"/>
                         </a:rPr>
                         <a:t>≥ 17 mm (disk diametri)</a:t>
                       </a:r>
@@ -26133,9 +26205,9 @@
                           <a:solidFill>
                             <a:srgbClr val="1A2B3C"/>
                           </a:solidFill>
-                          <a:latin typeface="Calibri"/>
+                          <a:latin typeface="Times New Roman"/>
                         </a:rPr>
-                        <a:t>Lateral kanallarga kirib borish</a:t>
+                        <a:t>Yon kanallarga kirib borish</a:t>
                       </a:r>
                     </a:p>
                   </a:txBody>
@@ -26158,9 +26230,9 @@
                           <a:solidFill>
                             <a:srgbClr val="1A2B3C"/>
                           </a:solidFill>
-                          <a:latin typeface="Calibri"/>
+                          <a:latin typeface="Times New Roman"/>
                         </a:rPr>
-                        <a:t>Plyonka qalinligi</a:t>
+                        <a:t>Parda qalinligi (film)</a:t>
                       </a:r>
                     </a:p>
                   </a:txBody>
@@ -26181,9 +26253,9 @@
                           <a:solidFill>
                             <a:srgbClr val="1A2B3C"/>
                           </a:solidFill>
-                          <a:latin typeface="Calibri"/>
+                          <a:latin typeface="Times New Roman"/>
                         </a:rPr>
-                        <a:t>≤ 50 mkm</a:t>
+                        <a:t>≤ 50 µm</a:t>
                       </a:r>
                     </a:p>
                   </a:txBody>
@@ -26204,9 +26276,9 @@
                           <a:solidFill>
                             <a:srgbClr val="1A2B3C"/>
                           </a:solidFill>
-                          <a:latin typeface="Calibri"/>
+                          <a:latin typeface="Times New Roman"/>
                         </a:rPr>
-                        <a:t>Yupqa qatlam = kam qisqarish</a:t>
+                        <a:t>Yupqa qatlam — kam qisqarish</a:t>
                       </a:r>
                     </a:p>
                   </a:txBody>
@@ -26229,9 +26301,9 @@
                           <a:solidFill>
                             <a:srgbClr val="1A2B3C"/>
                           </a:solidFill>
-                          <a:latin typeface="Calibri"/>
+                          <a:latin typeface="Times New Roman"/>
                         </a:rPr>
-                        <a:t>Erish / buzilish (suvda)</a:t>
+                        <a:t>Suvda eruvchanlik</a:t>
                       </a:r>
                     </a:p>
                   </a:txBody>
@@ -26252,9 +26324,9 @@
                           <a:solidFill>
                             <a:srgbClr val="1A2B3C"/>
                           </a:solidFill>
-                          <a:latin typeface="Calibri"/>
+                          <a:latin typeface="Times New Roman"/>
                         </a:rPr>
-                        <a:t>≤ 3% (massa ulushi)</a:t>
+                        <a:t>≤ 3 % (massa ulushi)</a:t>
                       </a:r>
                     </a:p>
                   </a:txBody>
@@ -26275,7 +26347,7 @@
                           <a:solidFill>
                             <a:srgbClr val="1A2B3C"/>
                           </a:solidFill>
-                          <a:latin typeface="Calibri"/>
+                          <a:latin typeface="Times New Roman"/>
                         </a:rPr>
                         <a:t>Uzoq muddatli germetiklik</a:t>
                       </a:r>
@@ -26300,7 +26372,7 @@
                           <a:solidFill>
                             <a:srgbClr val="1A2B3C"/>
                           </a:solidFill>
-                          <a:latin typeface="Calibri"/>
+                          <a:latin typeface="Times New Roman"/>
                         </a:rPr>
                         <a:t>Rentgenkontrastlilik</a:t>
                       </a:r>
@@ -26323,9 +26395,9 @@
                           <a:solidFill>
                             <a:srgbClr val="1A2B3C"/>
                           </a:solidFill>
-                          <a:latin typeface="Calibri"/>
+                          <a:latin typeface="Times New Roman"/>
                         </a:rPr>
-                        <a:t>≥ 3 mm Al ekvivalenti</a:t>
+                        <a:t>≥ 3 mm alyuminiy (Al)</a:t>
                       </a:r>
                     </a:p>
                   </a:txBody>
@@ -26346,9 +26418,9 @@
                           <a:solidFill>
                             <a:srgbClr val="1A2B3C"/>
                           </a:solidFill>
-                          <a:latin typeface="Calibri"/>
+                          <a:latin typeface="Times New Roman"/>
                         </a:rPr>
-                        <a:t>Rentgenda aniq ko'rinish</a:t>
+                        <a:t>Rentgenogrammada aniq ko'rinish</a:t>
                       </a:r>
                     </a:p>
                   </a:txBody>
@@ -26371,9 +26443,9 @@
                           <a:solidFill>
                             <a:srgbClr val="1A2B3C"/>
                           </a:solidFill>
-                          <a:latin typeface="Calibri"/>
+                          <a:latin typeface="Times New Roman"/>
                         </a:rPr>
-                        <a:t>O'lcham o'zgarishi</a:t>
+                        <a:t>Qotgandan keyingi o'lcham</a:t>
                       </a:r>
                     </a:p>
                   </a:txBody>
@@ -26394,9 +26466,9 @@
                           <a:solidFill>
                             <a:srgbClr val="1A2B3C"/>
                           </a:solidFill>
-                          <a:latin typeface="Calibri"/>
+                          <a:latin typeface="Times New Roman"/>
                         </a:rPr>
-                        <a:t>Kengayish ≤ 0,1%; qisqarish ≤ 1%</a:t>
+                        <a:t>Kengayish ≤ 0,1 %; qisqarish ≤ 1 %</a:t>
                       </a:r>
                     </a:p>
                   </a:txBody>
@@ -26417,9 +26489,9 @@
                           <a:solidFill>
                             <a:srgbClr val="1A2B3C"/>
                           </a:solidFill>
-                          <a:latin typeface="Calibri"/>
+                          <a:latin typeface="Times New Roman"/>
                         </a:rPr>
-                        <a:t>Mikrosızıntı oldini olish</a:t>
+                        <a:t>Mikrooqishning oldini olish</a:t>
                       </a:r>
                     </a:p>
                   </a:txBody>
@@ -26442,7 +26514,7 @@
                           <a:solidFill>
                             <a:srgbClr val="1A2B3C"/>
                           </a:solidFill>
-                          <a:latin typeface="Calibri"/>
+                          <a:latin typeface="Times New Roman"/>
                         </a:rPr>
                         <a:t>Qotish vaqti</a:t>
                       </a:r>
@@ -26465,9 +26537,9 @@
                           <a:solidFill>
                             <a:srgbClr val="1A2B3C"/>
                           </a:solidFill>
-                          <a:latin typeface="Calibri"/>
+                          <a:latin typeface="Times New Roman"/>
                         </a:rPr>
-                        <a:t>Ishlab chiqaruvchi deklaratsiyasiga mos</a:t>
+                        <a:t>Ishlab chiqaruvchi yo'riqnomasiga mos</a:t>
                       </a:r>
                     </a:p>
                   </a:txBody>
@@ -26488,9 +26560,9 @@
                           <a:solidFill>
                             <a:srgbClr val="1A2B3C"/>
                           </a:solidFill>
-                          <a:latin typeface="Calibri"/>
+                          <a:latin typeface="Times New Roman"/>
                         </a:rPr>
-                        <a:t>Ish protokolini rejalash</a:t>
+                        <a:t>Ish protokolini rejalashtirish</a:t>
                       </a:r>
                     </a:p>
                   </a:txBody>
@@ -26620,7 +26692,7 @@
                 <a:solidFill>
                   <a:srgbClr val="00BFA6"/>
                 </a:solidFill>
-                <a:latin typeface="Calibri"/>
+                <a:latin typeface="Times New Roman"/>
               </a:defRPr>
             </a:pPr>
             <a:r>
@@ -26653,7 +26725,7 @@
           <a:p>
             <a:pPr>
               <a:lnSpc>
-                <a:spcPct val="115000"/>
+                <a:spcPct val="112000"/>
               </a:lnSpc>
               <a:spcBef>
                 <a:spcPts val="100"/>
@@ -26667,7 +26739,7 @@
                 <a:solidFill>
                   <a:srgbClr val="00BFA6"/>
                 </a:solidFill>
-                <a:latin typeface="Calibri"/>
+                <a:latin typeface="Times New Roman"/>
               </a:rPr>
               <a:t>●  </a:t>
             </a:r>
@@ -26676,7 +26748,7 @@
                 <a:solidFill>
                   <a:srgbClr val="FFFFFF"/>
                 </a:solidFill>
-                <a:latin typeface="Calibri"/>
+                <a:latin typeface="Times New Roman"/>
               </a:rPr>
               <a:t>O'lchamlar: </a:t>
             </a:r>
@@ -26685,7 +26757,7 @@
                 <a:solidFill>
                   <a:srgbClr val="FFFFFF"/>
                 </a:solidFill>
-                <a:latin typeface="Calibri"/>
+                <a:latin typeface="Times New Roman"/>
               </a:rPr>
               <a:t>uch diametri 15–80</a:t>
             </a:r>
@@ -26693,7 +26765,7 @@
           <a:p>
             <a:pPr>
               <a:lnSpc>
-                <a:spcPct val="115000"/>
+                <a:spcPct val="112000"/>
               </a:lnSpc>
               <a:spcBef>
                 <a:spcPts val="100"/>
@@ -26707,7 +26779,7 @@
                 <a:solidFill>
                   <a:srgbClr val="00BFA6"/>
                 </a:solidFill>
-                <a:latin typeface="Calibri"/>
+                <a:latin typeface="Times New Roman"/>
               </a:rPr>
               <a:t>●  </a:t>
             </a:r>
@@ -26716,24 +26788,24 @@
                 <a:solidFill>
                   <a:srgbClr val="FFFFFF"/>
                 </a:solidFill>
-                <a:latin typeface="Calibri"/>
+                <a:latin typeface="Times New Roman"/>
               </a:rPr>
-              <a:t>Konussimonlik: </a:t>
+              <a:t>Konussimonlik (taper): </a:t>
             </a:r>
             <a:r>
               <a:rPr sz="1050">
                 <a:solidFill>
                   <a:srgbClr val="FFFFFF"/>
                 </a:solidFill>
-                <a:latin typeface="Calibri"/>
+                <a:latin typeface="Times New Roman"/>
               </a:rPr>
-              <a:t>02 / 04 / 06 taper</a:t>
+              <a:t>02 / 04 / 06</a:t>
             </a:r>
           </a:p>
           <a:p>
             <a:pPr>
               <a:lnSpc>
-                <a:spcPct val="115000"/>
+                <a:spcPct val="112000"/>
               </a:lnSpc>
               <a:spcBef>
                 <a:spcPts val="100"/>
@@ -26747,7 +26819,7 @@
                 <a:solidFill>
                   <a:srgbClr val="00BFA6"/>
                 </a:solidFill>
-                <a:latin typeface="Calibri"/>
+                <a:latin typeface="Times New Roman"/>
               </a:rPr>
               <a:t>●  </a:t>
             </a:r>
@@ -26756,16 +26828,16 @@
                 <a:solidFill>
                   <a:srgbClr val="FFFFFF"/>
                 </a:solidFill>
-                <a:latin typeface="Calibri"/>
+                <a:latin typeface="Times New Roman"/>
               </a:rPr>
-              <a:t>Master-shtift </a:t>
+              <a:t>Asosiy shtift (master) </a:t>
             </a:r>
             <a:r>
               <a:rPr sz="1050">
                 <a:solidFill>
                   <a:srgbClr val="FFFFFF"/>
                 </a:solidFill>
-                <a:latin typeface="Calibri"/>
+                <a:latin typeface="Times New Roman"/>
               </a:rPr>
               <a:t>mosligi talablari</a:t>
             </a:r>
@@ -26842,11 +26914,11 @@
                 <a:solidFill>
                   <a:srgbClr val="FFD27A"/>
                 </a:solidFill>
-                <a:latin typeface="Calibri"/>
+                <a:latin typeface="Times New Roman"/>
               </a:defRPr>
             </a:pPr>
             <a:r>
-              <a:t>Nima uchun muhim?</a:t>
+              <a:t>Amaliy ahamiyati</a:t>
             </a:r>
           </a:p>
         </p:txBody>
@@ -26878,11 +26950,11 @@
                 <a:solidFill>
                   <a:srgbClr val="FFFFFF"/>
                 </a:solidFill>
-                <a:latin typeface="Calibri"/>
+                <a:latin typeface="Times New Roman"/>
               </a:defRPr>
             </a:pPr>
             <a:r>
-              <a:t>Sealer va shtift xarid qilishda ISO 6876 / 6877 muvofiqligi — sifat kafolati. AH Plus va biokeramik sealerlar ISO 6876 talablariga javob beradi.</a:t>
+              <a:t>Sealer va shtift tanlashda ISO 6876 / 6877 muvofiqligi — sifat kafolati. AH Plus va biokeramik sealerlar ISO 6876 talablariga javob beradi.</a:t>
             </a:r>
           </a:p>
         </p:txBody>
@@ -27044,7 +27116,7 @@
                 <a:solidFill>
                   <a:srgbClr val="FFFFFF"/>
                 </a:solidFill>
-                <a:latin typeface="Calibri"/>
+                <a:latin typeface="Times New Roman"/>
               </a:rPr>
               <a:t>07</a:t>
             </a:r>
@@ -27078,7 +27150,7 @@
                 <a:solidFill>
                   <a:srgbClr val="00BFA6"/>
                 </a:solidFill>
-                <a:latin typeface="Calibri"/>
+                <a:latin typeface="Times New Roman"/>
               </a:defRPr>
             </a:pPr>
             <a:r>
@@ -27114,7 +27186,7 @@
                 <a:solidFill>
                   <a:srgbClr val="FFFFFF"/>
                 </a:solidFill>
-                <a:latin typeface="Calibri Light"/>
+                <a:latin typeface="Times New Roman"/>
               </a:defRPr>
             </a:pPr>
             <a:r>
@@ -27150,7 +27222,7 @@
                 <a:solidFill>
                   <a:srgbClr val="5A6D80"/>
                 </a:solidFill>
-                <a:latin typeface="Calibri"/>
+                <a:latin typeface="Times New Roman"/>
               </a:defRPr>
             </a:pPr>
             <a:r>
@@ -27186,7 +27258,7 @@
                 <a:solidFill>
                   <a:srgbClr val="5A6D80"/>
                 </a:solidFill>
-                <a:latin typeface="Calibri"/>
+                <a:latin typeface="Times New Roman"/>
               </a:defRPr>
             </a:pPr>
             <a:r>
@@ -27396,7 +27468,7 @@
                 <a:solidFill>
                   <a:srgbClr val="FFFFFF"/>
                 </a:solidFill>
-                <a:latin typeface="Calibri"/>
+                <a:latin typeface="Times New Roman"/>
               </a:defRPr>
             </a:pPr>
             <a:r>
@@ -27436,7 +27508,7 @@
                 <a:solidFill>
                   <a:srgbClr val="009E8A"/>
                 </a:solidFill>
-                <a:latin typeface="Calibri"/>
+                <a:latin typeface="Times New Roman"/>
               </a:defRPr>
             </a:pPr>
             <a:r>
@@ -27469,7 +27541,7 @@
           <a:p>
             <a:pPr>
               <a:lnSpc>
-                <a:spcPct val="115000"/>
+                <a:spcPct val="112000"/>
               </a:lnSpc>
               <a:spcBef>
                 <a:spcPts val="100"/>
@@ -27483,7 +27555,7 @@
                 <a:solidFill>
                   <a:srgbClr val="009E8A"/>
                 </a:solidFill>
-                <a:latin typeface="Calibri"/>
+                <a:latin typeface="Times New Roman"/>
               </a:rPr>
               <a:t>✓  </a:t>
             </a:r>
@@ -27492,15 +27564,15 @@
                 <a:solidFill>
                   <a:srgbClr val="1A2B3C"/>
                 </a:solidFill>
-                <a:latin typeface="Calibri"/>
+                <a:latin typeface="Times New Roman"/>
               </a:rPr>
-              <a:t>Ca(OH)₂ pastalari</a:t>
+              <a:t>Kalsiy gidroksidli pastalar</a:t>
             </a:r>
           </a:p>
           <a:p>
             <a:pPr>
               <a:lnSpc>
-                <a:spcPct val="115000"/>
+                <a:spcPct val="112000"/>
               </a:lnSpc>
               <a:spcBef>
                 <a:spcPts val="100"/>
@@ -27514,7 +27586,7 @@
                 <a:solidFill>
                   <a:srgbClr val="009E8A"/>
                 </a:solidFill>
-                <a:latin typeface="Calibri"/>
+                <a:latin typeface="Times New Roman"/>
               </a:rPr>
               <a:t>✓  </a:t>
             </a:r>
@@ -27523,7 +27595,7 @@
                 <a:solidFill>
                   <a:srgbClr val="1A2B3C"/>
                 </a:solidFill>
-                <a:latin typeface="Calibri"/>
+                <a:latin typeface="Times New Roman"/>
               </a:rPr>
               <a:t>Yodoformli pastalar</a:t>
             </a:r>
@@ -27531,7 +27603,7 @@
           <a:p>
             <a:pPr>
               <a:lnSpc>
-                <a:spcPct val="115000"/>
+                <a:spcPct val="112000"/>
               </a:lnSpc>
               <a:spcBef>
                 <a:spcPts val="100"/>
@@ -27545,7 +27617,7 @@
                 <a:solidFill>
                   <a:srgbClr val="009E8A"/>
                 </a:solidFill>
-                <a:latin typeface="Calibri"/>
+                <a:latin typeface="Times New Roman"/>
               </a:rPr>
               <a:t>✓  </a:t>
             </a:r>
@@ -27554,15 +27626,15 @@
                 <a:solidFill>
                   <a:srgbClr val="1A2B3C"/>
                 </a:solidFill>
-                <a:latin typeface="Calibri"/>
+                <a:latin typeface="Times New Roman"/>
               </a:rPr>
-              <a:t>Antibiotik + kortikosteroid</a:t>
+              <a:t>Antibiotik + kortikosteroidli</a:t>
             </a:r>
           </a:p>
           <a:p>
             <a:pPr>
               <a:lnSpc>
-                <a:spcPct val="115000"/>
+                <a:spcPct val="112000"/>
               </a:lnSpc>
               <a:spcBef>
                 <a:spcPts val="100"/>
@@ -27576,7 +27648,7 @@
                 <a:solidFill>
                   <a:srgbClr val="009E8A"/>
                 </a:solidFill>
-                <a:latin typeface="Calibri"/>
+                <a:latin typeface="Times New Roman"/>
               </a:rPr>
               <a:t>✓  </a:t>
             </a:r>
@@ -27585,7 +27657,7 @@
                 <a:solidFill>
                   <a:srgbClr val="1A2B3C"/>
                 </a:solidFill>
-                <a:latin typeface="Calibri"/>
+                <a:latin typeface="Times New Roman"/>
               </a:rPr>
               <a:t>7–30 kun → almashtiriladi</a:t>
             </a:r>
@@ -27750,7 +27822,7 @@
                 <a:solidFill>
                   <a:srgbClr val="FFFFFF"/>
                 </a:solidFill>
-                <a:latin typeface="Calibri"/>
+                <a:latin typeface="Times New Roman"/>
               </a:defRPr>
             </a:pPr>
             <a:r>
@@ -27790,7 +27862,7 @@
                 <a:solidFill>
                   <a:srgbClr val="0B2C4A"/>
                 </a:solidFill>
-                <a:latin typeface="Calibri"/>
+                <a:latin typeface="Times New Roman"/>
               </a:defRPr>
             </a:pPr>
             <a:r>
@@ -27823,7 +27895,7 @@
           <a:p>
             <a:pPr>
               <a:lnSpc>
-                <a:spcPct val="115000"/>
+                <a:spcPct val="112000"/>
               </a:lnSpc>
               <a:spcBef>
                 <a:spcPts val="100"/>
@@ -27837,7 +27909,7 @@
                 <a:solidFill>
                   <a:srgbClr val="0B2C4A"/>
                 </a:solidFill>
-                <a:latin typeface="Calibri"/>
+                <a:latin typeface="Times New Roman"/>
               </a:rPr>
               <a:t>✓  </a:t>
             </a:r>
@@ -27846,15 +27918,15 @@
                 <a:solidFill>
                   <a:srgbClr val="1A2B3C"/>
                 </a:solidFill>
-                <a:latin typeface="Calibri"/>
+                <a:latin typeface="Times New Roman"/>
               </a:rPr>
-              <a:t>Sink-oksid evgenolli (ZOE)</a:t>
+              <a:t>Rux oksidi-evgenolli (ZOE)</a:t>
             </a:r>
           </a:p>
           <a:p>
             <a:pPr>
               <a:lnSpc>
-                <a:spcPct val="115000"/>
+                <a:spcPct val="112000"/>
               </a:lnSpc>
               <a:spcBef>
                 <a:spcPts val="100"/>
@@ -27868,7 +27940,7 @@
                 <a:solidFill>
                   <a:srgbClr val="0B2C4A"/>
                 </a:solidFill>
-                <a:latin typeface="Calibri"/>
+                <a:latin typeface="Times New Roman"/>
               </a:rPr>
               <a:t>✓  </a:t>
             </a:r>
@@ -27877,15 +27949,15 @@
                 <a:solidFill>
                   <a:srgbClr val="1A2B3C"/>
                 </a:solidFill>
-                <a:latin typeface="Calibri"/>
+                <a:latin typeface="Times New Roman"/>
               </a:rPr>
-              <a:t>Epoksi-rezin (AH Plus)</a:t>
+              <a:t>Epoksid smolali (AH Plus)</a:t>
             </a:r>
           </a:p>
           <a:p>
             <a:pPr>
               <a:lnSpc>
-                <a:spcPct val="115000"/>
+                <a:spcPct val="112000"/>
               </a:lnSpc>
               <a:spcBef>
                 <a:spcPts val="100"/>
@@ -27899,7 +27971,7 @@
                 <a:solidFill>
                   <a:srgbClr val="0B2C4A"/>
                 </a:solidFill>
-                <a:latin typeface="Calibri"/>
+                <a:latin typeface="Times New Roman"/>
               </a:rPr>
               <a:t>✓  </a:t>
             </a:r>
@@ -27908,15 +27980,15 @@
                 <a:solidFill>
                   <a:srgbClr val="1A2B3C"/>
                 </a:solidFill>
-                <a:latin typeface="Calibri"/>
+                <a:latin typeface="Times New Roman"/>
               </a:rPr>
-              <a:t>Shisha ionomer / Silikon</a:t>
+              <a:t>Shishaionomer / silikonli</a:t>
             </a:r>
           </a:p>
           <a:p>
             <a:pPr>
               <a:lnSpc>
-                <a:spcPct val="115000"/>
+                <a:spcPct val="112000"/>
               </a:lnSpc>
               <a:spcBef>
                 <a:spcPts val="100"/>
@@ -27930,7 +28002,7 @@
                 <a:solidFill>
                   <a:srgbClr val="0B2C4A"/>
                 </a:solidFill>
-                <a:latin typeface="Calibri"/>
+                <a:latin typeface="Times New Roman"/>
               </a:rPr>
               <a:t>✓  </a:t>
             </a:r>
@@ -27939,7 +28011,7 @@
                 <a:solidFill>
                   <a:srgbClr val="1A2B3C"/>
                 </a:solidFill>
-                <a:latin typeface="Calibri"/>
+                <a:latin typeface="Times New Roman"/>
               </a:rPr>
               <a:t>Biokeramik (yangi avlod)</a:t>
             </a:r>
@@ -28104,7 +28176,7 @@
                 <a:solidFill>
                   <a:srgbClr val="FFFFFF"/>
                 </a:solidFill>
-                <a:latin typeface="Calibri"/>
+                <a:latin typeface="Times New Roman"/>
               </a:defRPr>
             </a:pPr>
             <a:r>
@@ -28144,7 +28216,7 @@
                 <a:solidFill>
                   <a:srgbClr val="1E88E5"/>
                 </a:solidFill>
-                <a:latin typeface="Calibri"/>
+                <a:latin typeface="Times New Roman"/>
               </a:defRPr>
             </a:pPr>
             <a:r>
@@ -28177,7 +28249,7 @@
           <a:p>
             <a:pPr>
               <a:lnSpc>
-                <a:spcPct val="115000"/>
+                <a:spcPct val="112000"/>
               </a:lnSpc>
               <a:spcBef>
                 <a:spcPts val="100"/>
@@ -28191,7 +28263,7 @@
                 <a:solidFill>
                   <a:srgbClr val="1E88E5"/>
                 </a:solidFill>
-                <a:latin typeface="Calibri"/>
+                <a:latin typeface="Times New Roman"/>
               </a:rPr>
               <a:t>✓  </a:t>
             </a:r>
@@ -28200,7 +28272,7 @@
                 <a:solidFill>
                   <a:srgbClr val="1A2B3C"/>
                 </a:solidFill>
-                <a:latin typeface="Calibri"/>
+                <a:latin typeface="Times New Roman"/>
               </a:rPr>
               <a:t>Gutta-percha (asosiy)</a:t>
             </a:r>
@@ -28208,7 +28280,7 @@
           <a:p>
             <a:pPr>
               <a:lnSpc>
-                <a:spcPct val="115000"/>
+                <a:spcPct val="112000"/>
               </a:lnSpc>
               <a:spcBef>
                 <a:spcPts val="100"/>
@@ -28222,7 +28294,7 @@
                 <a:solidFill>
                   <a:srgbClr val="1E88E5"/>
                 </a:solidFill>
-                <a:latin typeface="Calibri"/>
+                <a:latin typeface="Times New Roman"/>
               </a:rPr>
               <a:t>✓  </a:t>
             </a:r>
@@ -28231,15 +28303,15 @@
                 <a:solidFill>
                   <a:srgbClr val="1A2B3C"/>
                 </a:solidFill>
-                <a:latin typeface="Calibri"/>
+                <a:latin typeface="Times New Roman"/>
               </a:rPr>
-              <a:t>Resilon / sintetik</a:t>
+              <a:t>Resilon / sintetik o'zaklar</a:t>
             </a:r>
           </a:p>
           <a:p>
             <a:pPr>
               <a:lnSpc>
-                <a:spcPct val="115000"/>
+                <a:spcPct val="112000"/>
               </a:lnSpc>
               <a:spcBef>
                 <a:spcPts val="100"/>
@@ -28253,7 +28325,7 @@
                 <a:solidFill>
                   <a:srgbClr val="1E88E5"/>
                 </a:solidFill>
-                <a:latin typeface="Calibri"/>
+                <a:latin typeface="Times New Roman"/>
               </a:rPr>
               <a:t>✓  </a:t>
             </a:r>
@@ -28262,15 +28334,15 @@
                 <a:solidFill>
                   <a:srgbClr val="1A2B3C"/>
                 </a:solidFill>
-                <a:latin typeface="Calibri"/>
+                <a:latin typeface="Times New Roman"/>
               </a:rPr>
-              <a:t>MTA apikal plug</a:t>
+              <a:t>MTA apikal tiqin</a:t>
             </a:r>
           </a:p>
           <a:p>
             <a:pPr>
               <a:lnSpc>
-                <a:spcPct val="115000"/>
+                <a:spcPct val="112000"/>
               </a:lnSpc>
               <a:spcBef>
                 <a:spcPts val="100"/>
@@ -28284,7 +28356,7 @@
                 <a:solidFill>
                   <a:srgbClr val="1E88E5"/>
                 </a:solidFill>
-                <a:latin typeface="Calibri"/>
+                <a:latin typeface="Times New Roman"/>
               </a:rPr>
               <a:t>✓  </a:t>
             </a:r>
@@ -28293,7 +28365,7 @@
                 <a:solidFill>
                   <a:srgbClr val="1A2B3C"/>
                 </a:solidFill>
-                <a:latin typeface="Calibri"/>
+                <a:latin typeface="Times New Roman"/>
               </a:rPr>
               <a:t>Shtiftlar (tarixiy)</a:t>
             </a:r>
@@ -28327,11 +28399,11 @@
                 <a:solidFill>
                   <a:srgbClr val="0B2C4A"/>
                 </a:solidFill>
-                <a:latin typeface="Calibri"/>
+                <a:latin typeface="Times New Roman"/>
               </a:defRPr>
             </a:pPr>
             <a:r>
-              <a:t>Klinik formula:  Qotmaydigan (davolash)  →  Qattiq o'zak + Qotadigan sealer (doimiy obturatsiya)</a:t>
+              <a:t>Klinik formula:  Qotmaydigan malham (davolash bosqichi)  →  Qattiq o'zak + Qotadigan sealer (doimiy obturatsiya)</a:t>
             </a:r>
           </a:p>
         </p:txBody>
@@ -28493,7 +28565,7 @@
                 <a:solidFill>
                   <a:srgbClr val="FFFFFF"/>
                 </a:solidFill>
-                <a:latin typeface="Calibri"/>
+                <a:latin typeface="Times New Roman"/>
               </a:rPr>
               <a:t>08</a:t>
             </a:r>
@@ -28527,7 +28599,7 @@
                 <a:solidFill>
                   <a:srgbClr val="00BFA6"/>
                 </a:solidFill>
-                <a:latin typeface="Calibri"/>
+                <a:latin typeface="Times New Roman"/>
               </a:defRPr>
             </a:pPr>
             <a:r>
@@ -28563,11 +28635,11 @@
                 <a:solidFill>
                   <a:srgbClr val="FFFFFF"/>
                 </a:solidFill>
-                <a:latin typeface="Calibri Light"/>
+                <a:latin typeface="Times New Roman"/>
               </a:defRPr>
             </a:pPr>
             <a:r>
-              <a:t>Qotmaydigan malhamlar: tushuncha va qo'llash falsafasi</a:t>
+              <a:t>Qotmaydigan malhamlar: tushunchasi va qo'llash prinsiplari</a:t>
             </a:r>
           </a:p>
         </p:txBody>
@@ -28599,7 +28671,7 @@
                 <a:solidFill>
                   <a:srgbClr val="5A6D80"/>
                 </a:solidFill>
-                <a:latin typeface="Calibri"/>
+                <a:latin typeface="Times New Roman"/>
               </a:defRPr>
             </a:pPr>
             <a:r>
@@ -28635,7 +28707,7 @@
                 <a:solidFill>
                   <a:srgbClr val="5A6D80"/>
                 </a:solidFill>
-                <a:latin typeface="Calibri"/>
+                <a:latin typeface="Times New Roman"/>
               </a:defRPr>
             </a:pPr>
             <a:r>
@@ -28802,11 +28874,11 @@
                 <a:solidFill>
                   <a:srgbClr val="FFFFFF"/>
                 </a:solidFill>
-                <a:latin typeface="Calibri"/>
+                <a:latin typeface="Times New Roman"/>
               </a:defRPr>
             </a:pPr>
             <a:r>
-              <a:t>Ta'rif:  kanal ichida qotmaydigan, vaqtinchalik davolovchi maqsadda 7–30 kun turadigan, so'ng albatta almashtiriladigan dori pastasi.</a:t>
+              <a:t>Ta'rif:  kanal bo'shlig'ida qotmaydigan, vaqtinchalik davolovchi maqsadda 7–30 kun saqlanadigan, so'ng almashtirilishi shart bo'lgan dorivor pasta.</a:t>
             </a:r>
           </a:p>
         </p:txBody>
@@ -28969,7 +29041,7 @@
                 <a:solidFill>
                   <a:srgbClr val="FFFFFF"/>
                 </a:solidFill>
-                <a:latin typeface="Calibri"/>
+                <a:latin typeface="Times New Roman"/>
               </a:defRPr>
             </a:pPr>
             <a:r>
@@ -29002,7 +29074,7 @@
           <a:p>
             <a:pPr>
               <a:lnSpc>
-                <a:spcPct val="115000"/>
+                <a:spcPct val="112000"/>
               </a:lnSpc>
               <a:spcBef>
                 <a:spcPts val="100"/>
@@ -29016,7 +29088,7 @@
                 <a:solidFill>
                   <a:srgbClr val="009E8A"/>
                 </a:solidFill>
-                <a:latin typeface="Calibri"/>
+                <a:latin typeface="Times New Roman"/>
               </a:rPr>
               <a:t>▸  </a:t>
             </a:r>
@@ -29025,7 +29097,7 @@
                 <a:solidFill>
                   <a:srgbClr val="1A2B3C"/>
                 </a:solidFill>
-                <a:latin typeface="Calibri"/>
+                <a:latin typeface="Times New Roman"/>
               </a:rPr>
               <a:t>Antiseptik ta'sir</a:t>
             </a:r>
@@ -29033,7 +29105,7 @@
           <a:p>
             <a:pPr>
               <a:lnSpc>
-                <a:spcPct val="115000"/>
+                <a:spcPct val="112000"/>
               </a:lnSpc>
               <a:spcBef>
                 <a:spcPts val="100"/>
@@ -29047,7 +29119,7 @@
                 <a:solidFill>
                   <a:srgbClr val="009E8A"/>
                 </a:solidFill>
-                <a:latin typeface="Calibri"/>
+                <a:latin typeface="Times New Roman"/>
               </a:rPr>
               <a:t>▸  </a:t>
             </a:r>
@@ -29056,15 +29128,15 @@
                 <a:solidFill>
                   <a:srgbClr val="1A2B3C"/>
                 </a:solidFill>
-                <a:latin typeface="Calibri"/>
+                <a:latin typeface="Times New Roman"/>
               </a:rPr>
-              <a:t>Yallig'lanishni kamaytirish</a:t>
+              <a:t>Yallig'lanishga qarshi ta'sir</a:t>
             </a:r>
           </a:p>
           <a:p>
             <a:pPr>
               <a:lnSpc>
-                <a:spcPct val="115000"/>
+                <a:spcPct val="112000"/>
               </a:lnSpc>
               <a:spcBef>
                 <a:spcPts val="100"/>
@@ -29078,7 +29150,7 @@
                 <a:solidFill>
                   <a:srgbClr val="009E8A"/>
                 </a:solidFill>
-                <a:latin typeface="Calibri"/>
+                <a:latin typeface="Times New Roman"/>
               </a:rPr>
               <a:t>▸  </a:t>
             </a:r>
@@ -29087,15 +29159,15 @@
                 <a:solidFill>
                   <a:srgbClr val="1A2B3C"/>
                 </a:solidFill>
-                <a:latin typeface="Calibri"/>
+                <a:latin typeface="Times New Roman"/>
               </a:rPr>
-              <a:t>Ekssudatsiyani to'xtatish</a:t>
+              <a:t>Ekssudat ajralishini to'xtatish</a:t>
             </a:r>
           </a:p>
           <a:p>
             <a:pPr>
               <a:lnSpc>
-                <a:spcPct val="115000"/>
+                <a:spcPct val="112000"/>
               </a:lnSpc>
               <a:spcBef>
                 <a:spcPts val="100"/>
@@ -29109,7 +29181,7 @@
                 <a:solidFill>
                   <a:srgbClr val="009E8A"/>
                 </a:solidFill>
-                <a:latin typeface="Calibri"/>
+                <a:latin typeface="Times New Roman"/>
               </a:rPr>
               <a:t>▸  </a:t>
             </a:r>
@@ -29118,9 +29190,9 @@
                 <a:solidFill>
                   <a:srgbClr val="1A2B3C"/>
                 </a:solidFill>
-                <a:latin typeface="Calibri"/>
+                <a:latin typeface="Times New Roman"/>
               </a:rPr>
-              <a:t>Apeksifikatsiyani stimullash</a:t>
+              <a:t>Apeksifikatsiyani rag'batlantirish</a:t>
             </a:r>
           </a:p>
         </p:txBody>
@@ -29283,7 +29355,7 @@
                 <a:solidFill>
                   <a:srgbClr val="FFFFFF"/>
                 </a:solidFill>
-                <a:latin typeface="Calibri"/>
+                <a:latin typeface="Times New Roman"/>
               </a:defRPr>
             </a:pPr>
             <a:r>
@@ -29316,7 +29388,7 @@
           <a:p>
             <a:pPr>
               <a:lnSpc>
-                <a:spcPct val="115000"/>
+                <a:spcPct val="112000"/>
               </a:lnSpc>
               <a:spcBef>
                 <a:spcPts val="100"/>
@@ -29330,7 +29402,7 @@
                 <a:solidFill>
                   <a:srgbClr val="1E88E5"/>
                 </a:solidFill>
-                <a:latin typeface="Calibri"/>
+                <a:latin typeface="Times New Roman"/>
               </a:rPr>
               <a:t>▸  </a:t>
             </a:r>
@@ -29339,15 +29411,15 @@
                 <a:solidFill>
                   <a:srgbClr val="1A2B3C"/>
                 </a:solidFill>
-                <a:latin typeface="Calibri"/>
+                <a:latin typeface="Times New Roman"/>
               </a:rPr>
-              <a:t>O'tkir / kronik periodontit</a:t>
+              <a:t>O'tkir va surunkali periodontit</a:t>
             </a:r>
           </a:p>
           <a:p>
             <a:pPr>
               <a:lnSpc>
-                <a:spcPct val="115000"/>
+                <a:spcPct val="112000"/>
               </a:lnSpc>
               <a:spcBef>
                 <a:spcPts val="100"/>
@@ -29361,7 +29433,7 @@
                 <a:solidFill>
                   <a:srgbClr val="1E88E5"/>
                 </a:solidFill>
-                <a:latin typeface="Calibri"/>
+                <a:latin typeface="Times New Roman"/>
               </a:rPr>
               <a:t>▸  </a:t>
             </a:r>
@@ -29370,15 +29442,15 @@
                 <a:solidFill>
                   <a:srgbClr val="1A2B3C"/>
                 </a:solidFill>
-                <a:latin typeface="Calibri"/>
+                <a:latin typeface="Times New Roman"/>
               </a:rPr>
-              <a:t>Gangrenoz / xom pulpit</a:t>
+              <a:t>Gangrenoz pulpit (nekroz)</a:t>
             </a:r>
           </a:p>
           <a:p>
             <a:pPr>
               <a:lnSpc>
-                <a:spcPct val="115000"/>
+                <a:spcPct val="112000"/>
               </a:lnSpc>
               <a:spcBef>
                 <a:spcPts val="100"/>
@@ -29392,7 +29464,7 @@
                 <a:solidFill>
                   <a:srgbClr val="1E88E5"/>
                 </a:solidFill>
-                <a:latin typeface="Calibri"/>
+                <a:latin typeface="Times New Roman"/>
               </a:rPr>
               <a:t>▸  </a:t>
             </a:r>
@@ -29401,7 +29473,7 @@
                 <a:solidFill>
                   <a:srgbClr val="1A2B3C"/>
                 </a:solidFill>
-                <a:latin typeface="Calibri"/>
+                <a:latin typeface="Times New Roman"/>
               </a:rPr>
               <a:t>Yiringli ekssudat</a:t>
             </a:r>
@@ -29409,7 +29481,7 @@
           <a:p>
             <a:pPr>
               <a:lnSpc>
-                <a:spcPct val="115000"/>
+                <a:spcPct val="112000"/>
               </a:lnSpc>
               <a:spcBef>
                 <a:spcPts val="100"/>
@@ -29423,7 +29495,7 @@
                 <a:solidFill>
                   <a:srgbClr val="1E88E5"/>
                 </a:solidFill>
-                <a:latin typeface="Calibri"/>
+                <a:latin typeface="Times New Roman"/>
               </a:rPr>
               <a:t>▸  </a:t>
             </a:r>
@@ -29432,9 +29504,9 @@
                 <a:solidFill>
                   <a:srgbClr val="1A2B3C"/>
                 </a:solidFill>
-                <a:latin typeface="Calibri"/>
+                <a:latin typeface="Times New Roman"/>
               </a:rPr>
-              <a:t>Apeksifikatsiya</a:t>
+              <a:t>Apeksifikatsiya zarurati</a:t>
             </a:r>
           </a:p>
         </p:txBody>
@@ -29597,7 +29669,7 @@
                 <a:solidFill>
                   <a:srgbClr val="FFFFFF"/>
                 </a:solidFill>
-                <a:latin typeface="Calibri"/>
+                <a:latin typeface="Times New Roman"/>
               </a:defRPr>
             </a:pPr>
             <a:r>
@@ -29630,7 +29702,7 @@
           <a:p>
             <a:pPr>
               <a:lnSpc>
-                <a:spcPct val="115000"/>
+                <a:spcPct val="112000"/>
               </a:lnSpc>
               <a:spcBef>
                 <a:spcPts val="100"/>
@@ -29644,7 +29716,7 @@
                 <a:solidFill>
                   <a:srgbClr val="FF6F00"/>
                 </a:solidFill>
-                <a:latin typeface="Calibri"/>
+                <a:latin typeface="Times New Roman"/>
               </a:rPr>
               <a:t>▸  </a:t>
             </a:r>
@@ -29653,15 +29725,15 @@
                 <a:solidFill>
                   <a:srgbClr val="1A2B3C"/>
                 </a:solidFill>
-                <a:latin typeface="Calibri"/>
+                <a:latin typeface="Times New Roman"/>
               </a:rPr>
-              <a:t>Doimiy plomba EMAS!</a:t>
+              <a:t>Doimiy plomba o'rnida qo'llanilmaydi!</a:t>
             </a:r>
           </a:p>
           <a:p>
             <a:pPr>
               <a:lnSpc>
-                <a:spcPct val="115000"/>
+                <a:spcPct val="112000"/>
               </a:lnSpc>
               <a:spcBef>
                 <a:spcPts val="100"/>
@@ -29675,7 +29747,7 @@
                 <a:solidFill>
                   <a:srgbClr val="FF6F00"/>
                 </a:solidFill>
-                <a:latin typeface="Calibri"/>
+                <a:latin typeface="Times New Roman"/>
               </a:rPr>
               <a:t>▸  </a:t>
             </a:r>
@@ -29684,7 +29756,7 @@
                 <a:solidFill>
                   <a:srgbClr val="1A2B3C"/>
                 </a:solidFill>
-                <a:latin typeface="Calibri"/>
+                <a:latin typeface="Times New Roman"/>
               </a:rPr>
               <a:t>Eriydi va so'riladi</a:t>
             </a:r>
@@ -29692,7 +29764,7 @@
           <a:p>
             <a:pPr>
               <a:lnSpc>
-                <a:spcPct val="115000"/>
+                <a:spcPct val="112000"/>
               </a:lnSpc>
               <a:spcBef>
                 <a:spcPts val="100"/>
@@ -29706,7 +29778,7 @@
                 <a:solidFill>
                   <a:srgbClr val="FF6F00"/>
                 </a:solidFill>
-                <a:latin typeface="Calibri"/>
+                <a:latin typeface="Times New Roman"/>
               </a:rPr>
               <a:t>▸  </a:t>
             </a:r>
@@ -29715,15 +29787,15 @@
                 <a:solidFill>
                   <a:srgbClr val="1A2B3C"/>
                 </a:solidFill>
-                <a:latin typeface="Calibri"/>
+                <a:latin typeface="Times New Roman"/>
               </a:rPr>
-              <a:t>Germetiklik bermaydi</a:t>
+              <a:t>Germetiklikni ta'minlamaydi</a:t>
             </a:r>
           </a:p>
           <a:p>
             <a:pPr>
               <a:lnSpc>
-                <a:spcPct val="115000"/>
+                <a:spcPct val="112000"/>
               </a:lnSpc>
               <a:spcBef>
                 <a:spcPts val="100"/>
@@ -29737,7 +29809,7 @@
                 <a:solidFill>
                   <a:srgbClr val="FF6F00"/>
                 </a:solidFill>
-                <a:latin typeface="Calibri"/>
+                <a:latin typeface="Times New Roman"/>
               </a:rPr>
               <a:t>▸  </a:t>
             </a:r>
@@ -29746,9 +29818,9 @@
                 <a:solidFill>
                   <a:srgbClr val="1A2B3C"/>
                 </a:solidFill>
-                <a:latin typeface="Calibri"/>
+                <a:latin typeface="Times New Roman"/>
               </a:rPr>
-              <a:t>Vaqtida almashtirish shart</a:t>
+              <a:t>O'z vaqtida almashtirish shart</a:t>
             </a:r>
           </a:p>
         </p:txBody>
@@ -29892,11 +29964,11 @@
                 <a:solidFill>
                   <a:srgbClr val="5A6D80"/>
                 </a:solidFill>
-                <a:latin typeface="Calibri"/>
+                <a:latin typeface="Times New Roman"/>
               </a:defRPr>
             </a:pPr>
             <a:r>
-              <a:t>Ca(OH)₂ pastasini Lentulo bilan kiritish (sxematik)</a:t>
+              <a:t>Dorivor pastani spiral to'ldirgich (Lentulo) bilan kiritish (sxematik tasvir)</a:t>
             </a:r>
           </a:p>
         </p:txBody>
@@ -29928,11 +30000,11 @@
                 <a:solidFill>
                   <a:srgbClr val="5A6D80"/>
                 </a:solidFill>
-                <a:latin typeface="Calibri"/>
+                <a:latin typeface="Times New Roman"/>
               </a:defRPr>
             </a:pPr>
             <a:r>
-              <a:t>Qo'llash:  Lentulo / kanal to'ldirgich bilan kiritiladi → vaqtinchalik plomba ostida → keyingi tashrifda yuvib chiqariladi</a:t>
+              <a:t>Qo'llash tartibi:  spiral to'ldirgich (Lentulo) bilan kiritiladi → vaqtinchalik plomba ostida saqlanadi → keyingi tashrifda yuvib chiqariladi</a:t>
             </a:r>
           </a:p>
         </p:txBody>
@@ -30094,7 +30166,7 @@
                 <a:solidFill>
                   <a:srgbClr val="FFFFFF"/>
                 </a:solidFill>
-                <a:latin typeface="Calibri"/>
+                <a:latin typeface="Times New Roman"/>
               </a:rPr>
               <a:t>09</a:t>
             </a:r>
@@ -30128,7 +30200,7 @@
                 <a:solidFill>
                   <a:srgbClr val="00BFA6"/>
                 </a:solidFill>
-                <a:latin typeface="Calibri"/>
+                <a:latin typeface="Times New Roman"/>
               </a:defRPr>
             </a:pPr>
             <a:r>
@@ -30164,7 +30236,7 @@
                 <a:solidFill>
                   <a:srgbClr val="FFFFFF"/>
                 </a:solidFill>
-                <a:latin typeface="Calibri Light"/>
+                <a:latin typeface="Times New Roman"/>
               </a:defRPr>
             </a:pPr>
             <a:r>
@@ -30200,7 +30272,7 @@
                 <a:solidFill>
                   <a:srgbClr val="5A6D80"/>
                 </a:solidFill>
-                <a:latin typeface="Calibri"/>
+                <a:latin typeface="Times New Roman"/>
               </a:defRPr>
             </a:pPr>
             <a:r>
@@ -30236,7 +30308,7 @@
                 <a:solidFill>
                   <a:srgbClr val="5A6D80"/>
                 </a:solidFill>
-                <a:latin typeface="Calibri"/>
+                <a:latin typeface="Times New Roman"/>
               </a:defRPr>
             </a:pPr>
             <a:r>
@@ -30324,9 +30396,9 @@
                           <a:solidFill>
                             <a:srgbClr val="FFFFFF"/>
                           </a:solidFill>
-                          <a:latin typeface="Calibri"/>
+                          <a:latin typeface="Times New Roman"/>
                         </a:rPr>
-                        <a:t>Guruh / Nomi</a:t>
+                        <a:t>Guruh / Savdo nomi</a:t>
                       </a:r>
                     </a:p>
                   </a:txBody>
@@ -30347,7 +30419,7 @@
                           <a:solidFill>
                             <a:srgbClr val="FFFFFF"/>
                           </a:solidFill>
-                          <a:latin typeface="Calibri"/>
+                          <a:latin typeface="Times New Roman"/>
                         </a:rPr>
                         <a:t>Asosiy tarkib</a:t>
                       </a:r>
@@ -30370,7 +30442,7 @@
                           <a:solidFill>
                             <a:srgbClr val="FFFFFF"/>
                           </a:solidFill>
-                          <a:latin typeface="Calibri"/>
+                          <a:latin typeface="Times New Roman"/>
                         </a:rPr>
                         <a:t>Ta'sir mexanizmi</a:t>
                       </a:r>
@@ -30393,7 +30465,7 @@
                           <a:solidFill>
                             <a:srgbClr val="FFFFFF"/>
                           </a:solidFill>
-                          <a:latin typeface="Calibri"/>
+                          <a:latin typeface="Times New Roman"/>
                         </a:rPr>
                         <a:t>Klinik qo'llanilishi</a:t>
                       </a:r>
@@ -30418,9 +30490,9 @@
                           <a:solidFill>
                             <a:srgbClr val="1A2B3C"/>
                           </a:solidFill>
-                          <a:latin typeface="Calibri"/>
+                          <a:latin typeface="Times New Roman"/>
                         </a:rPr>
-                        <a:t>Ca(OH)₂ pastalari
+                        <a:t>Kalsiy gidroksidli
 Calcipaste, Metapaste,
 UltraCal XS</a:t>
                       </a:r>
@@ -30443,10 +30515,11 @@
                           <a:solidFill>
                             <a:srgbClr val="1A2B3C"/>
                           </a:solidFill>
-                          <a:latin typeface="Calibri"/>
+                          <a:latin typeface="Times New Roman"/>
                         </a:rPr>
                         <a:t>Kalsiy gidroksid +
-BaSO₄ (kontrast)</a:t>
+bariy sulfat — BaSO₄
+(kontrast uchun)</a:t>
                       </a:r>
                     </a:p>
                   </a:txBody>
@@ -30467,9 +30540,10 @@
                           <a:solidFill>
                             <a:srgbClr val="1A2B3C"/>
                           </a:solidFill>
-                          <a:latin typeface="Calibri"/>
+                          <a:latin typeface="Times New Roman"/>
                         </a:rPr>
-                        <a:t>pH ≈ 12,5 — kuchli ishqoriy;
+                        <a:t>pH ≈ 12,5 — kuchli
+ishqoriy muhit;
 antibakterial, dentin
 ko'prigi hosil qiladi</a:t>
                       </a:r>
@@ -30492,7 +30566,7 @@
                           <a:solidFill>
                             <a:srgbClr val="1A2B3C"/>
                           </a:solidFill>
-                          <a:latin typeface="Calibri"/>
+                          <a:latin typeface="Times New Roman"/>
                         </a:rPr>
                         <a:t>Pulpit, periodontit,
 apeksifikatsiya —
@@ -30519,9 +30593,9 @@
                           <a:solidFill>
                             <a:srgbClr val="1A2B3C"/>
                           </a:solidFill>
-                          <a:latin typeface="Calibri"/>
+                          <a:latin typeface="Times New Roman"/>
                         </a:rPr>
-                        <a:t>Yodoformli pastalar
+                        <a:t>Yodoformli
 Metapex, Vitapex</a:t>
                       </a:r>
                     </a:p>
@@ -30543,7 +30617,7 @@
                           <a:solidFill>
                             <a:srgbClr val="1A2B3C"/>
                           </a:solidFill>
-                          <a:latin typeface="Calibri"/>
+                          <a:latin typeface="Times New Roman"/>
                         </a:rPr>
                         <a:t>Ca(OH)₂ + yodoform +
 silikon moyi</a:t>
@@ -30567,11 +30641,12 @@
                           <a:solidFill>
                             <a:srgbClr val="1A2B3C"/>
                           </a:solidFill>
-                          <a:latin typeface="Calibri"/>
+                          <a:latin typeface="Times New Roman"/>
                         </a:rPr>
-                        <a:t>Uzoq antiseptik ta'sir;
-rezorbsiyalanadi,
-to'qimani tirnantirmaydi</a:t>
+                        <a:t>Uzoq muddatli antiseptik
+ta'sir; to'qimada
+so'riladi, zarar
+yetkazmaydi</a:t>
                       </a:r>
                     </a:p>
                   </a:txBody>
@@ -30592,9 +30667,9 @@
                           <a:solidFill>
                             <a:srgbClr val="1A2B3C"/>
                           </a:solidFill>
-                          <a:latin typeface="Calibri"/>
+                          <a:latin typeface="Times New Roman"/>
                         </a:rPr>
-                        <a:t>Infeksiyalangan kanal,
+                        <a:t>Zararlangan kanal,
 bolalar endodontiyasi,
 sut tishlari</a:t>
                       </a:r>
@@ -30619,7 +30694,7 @@
                           <a:solidFill>
                             <a:srgbClr val="1A2B3C"/>
                           </a:solidFill>
-                          <a:latin typeface="Calibri"/>
+                          <a:latin typeface="Times New Roman"/>
                         </a:rPr>
                         <a:t>Antibiotik +
 kortikosteroid
@@ -30644,10 +30719,10 @@
                           <a:solidFill>
                             <a:srgbClr val="1A2B3C"/>
                           </a:solidFill>
-                          <a:latin typeface="Calibri"/>
+                          <a:latin typeface="Times New Roman"/>
                         </a:rPr>
                         <a:t>Demeklosiklin +
-triamcinolon</a:t>
+triamsinolon</a:t>
                       </a:r>
                     </a:p>
                   </a:txBody>
@@ -30668,11 +30743,11 @@
                           <a:solidFill>
                             <a:srgbClr val="1A2B3C"/>
                           </a:solidFill>
-                          <a:latin typeface="Calibri"/>
+                          <a:latin typeface="Times New Roman"/>
                         </a:rPr>
-                        <a:t>Og'riqsizlantiruvchi +
+                        <a:t>Og'riq qoldiruvchi +
 yallig'lanishga qarshi;
-mikrobga qarshi</a:t>
+antibakterial ta'sir</a:t>
                       </a:r>
                     </a:p>
                   </a:txBody>
@@ -30693,9 +30768,9 @@
                           <a:solidFill>
                             <a:srgbClr val="1A2B3C"/>
                           </a:solidFill>
-                          <a:latin typeface="Calibri"/>
+                          <a:latin typeface="Times New Roman"/>
                         </a:rPr>
-                        <a:t>O'tkir og'riq, travma,
+                        <a:t>Kuchli og'riq, travma,
 ichki rezorbsiya,
 qayta davolash</a:t>
                       </a:r>
@@ -30720,10 +30795,11 @@
                           <a:solidFill>
                             <a:srgbClr val="1A2B3C"/>
                           </a:solidFill>
-                          <a:latin typeface="Calibri"/>
+                          <a:latin typeface="Times New Roman"/>
                         </a:rPr>
                         <a:t>Boshqalar (cheklangan)
-CHX-gel, formokrezol</a:t>
+Xlorgeksidin geli,
+formokrezol</a:t>
                       </a:r>
                     </a:p>
                   </a:txBody>
@@ -30744,10 +30820,11 @@
                           <a:solidFill>
                             <a:srgbClr val="1A2B3C"/>
                           </a:solidFill>
-                          <a:latin typeface="Calibri"/>
+                          <a:latin typeface="Times New Roman"/>
                         </a:rPr>
-                        <a:t>Xlorheksidin /
-formalin-krezol</a:t>
+                        <a:t>Xlorgeksidin (CHX) /
+formalin-krezol
+aralashmasi</a:t>
                       </a:r>
                     </a:p>
                   </a:txBody>
@@ -30768,10 +30845,11 @@
                           <a:solidFill>
                             <a:srgbClr val="1A2B3C"/>
                           </a:solidFill>
-                          <a:latin typeface="Calibri"/>
+                          <a:latin typeface="Times New Roman"/>
                         </a:rPr>
-                        <a:t>Antiseptik, mumiyalovchi
-(tarixiy ahamiyat)</a:t>
+                        <a:t>Antiseptik, to'qimani
+mumiyalovchi ta'sir
+(tarixiy ahamiyatga ega)</a:t>
                       </a:r>
                     </a:p>
                   </a:txBody>
@@ -30792,10 +30870,11 @@
                           <a:solidFill>
                             <a:srgbClr val="1A2B3C"/>
                           </a:solidFill>
-                          <a:latin typeface="Calibri"/>
+                          <a:latin typeface="Times New Roman"/>
                         </a:rPr>
-                        <a:t>Toksiklik sababli
-kam qo'llaniladi</a:t>
+                        <a:t>Zaharli ta'siri sababli
+hozirda kam
+qo'llaniladi</a:t>
                       </a:r>
                     </a:p>
                   </a:txBody>
